--- a/presentation/build/osracer_live_briefing.pptx
+++ b/presentation/build/osracer_live_briefing.pptx
@@ -17,6 +17,7 @@
     <p:sldId id="265" r:id="rId16"/>
     <p:sldId id="266" r:id="rId17"/>
     <p:sldId id="267" r:id="rId18"/>
+    <p:sldId id="268" r:id="rId19"/>
   </p:sldIdLst>
   <p:sldSz cx="12191695" cy="6858000" type="screen4x3"/>
   <p:notesSz cx="6858000" cy="9144000"/>
@@ -3109,7 +3110,7 @@
       <p:grpSpPr/>
       <p:pic>
         <p:nvPicPr>
-          <p:cNvPr id="2" name="Picture 1" descr="bahrain_c03v10c_dev24_seed0.png"/>
+          <p:cNvPr id="2" name="Picture 1" descr="isaac-race.png"/>
           <p:cNvPicPr>
             <a:picLocks noChangeAspect="1"/>
           </p:cNvPicPr>
@@ -3454,7 +3455,7 @@
                 </a:solidFill>
                 <a:latin typeface="Noto Sans CJK SC"/>
               </a:rPr>
-              <a:t>ROBUSTNESS</a:t>
+              <a:t>DRIFT</a:t>
             </a:r>
           </a:p>
         </p:txBody>
@@ -3489,7 +3490,7 @@
                 </a:solidFill>
                 <a:latin typeface="Noto Sans CJK SC"/>
               </a:rPr>
-              <a:t>主动观测还不是鲁棒感知：组合扰动下 10/10 失败</a:t>
+              <a:t>180° 回头弯：仿真有漂移样例，但当前实车等效动作空间不支持它</a:t>
             </a:r>
           </a:p>
         </p:txBody>
@@ -3541,7 +3542,7 @@
       </p:sp>
       <p:pic>
         <p:nvPicPr>
-          <p:cNvPr id="5" name="Picture 4" descr="bahrain_c03v10c_sensor_perturb_seed10.png"/>
+          <p:cNvPr id="5" name="Picture 4" descr="drift.png"/>
           <p:cNvPicPr>
             <a:picLocks noChangeAspect="1"/>
           </p:cNvPicPr>
@@ -3589,11 +3590,11 @@
             <a:r>
               <a:rPr sz="3300" b="1">
                 <a:solidFill>
-                  <a:srgbClr val="BE343A"/>
-                </a:solidFill>
-                <a:latin typeface="Noto Sans CJK SC"/>
-              </a:rPr>
-              <a:t>10/10</a:t>
+                  <a:srgbClr val="00998E"/>
+                </a:solidFill>
+                <a:latin typeface="Noto Sans CJK SC"/>
+              </a:rPr>
+              <a:t>27.0°</a:t>
             </a:r>
           </a:p>
         </p:txBody>
@@ -3628,7 +3629,7 @@
                 </a:solidFill>
                 <a:latin typeface="Noto Sans CJK SC"/>
               </a:rPr>
-              <a:t>组合扰动失败</a:t>
+              <a:t>后轮增速 3.5：最大侧滑</a:t>
             </a:r>
           </a:p>
         </p:txBody>
@@ -3641,7 +3642,7 @@
         </p:nvSpPr>
         <p:spPr>
           <a:xfrm>
-            <a:off x="9052560" y="2148840"/>
+            <a:off x="8961120" y="2148840"/>
             <a:ext cx="2194560" cy="502920"/>
           </a:xfrm>
           <a:prstGeom prst="rect">
@@ -3659,11 +3660,11 @@
             <a:r>
               <a:rPr sz="3300" b="1">
                 <a:solidFill>
-                  <a:srgbClr val="D95A34"/>
-                </a:solidFill>
-                <a:latin typeface="Noto Sans CJK SC"/>
-              </a:rPr>
-              <a:t>2.7 s</a:t>
+                  <a:srgbClr val="BE343A"/>
+                </a:solidFill>
+                <a:latin typeface="Noto Sans CJK SC"/>
+              </a:rPr>
+              <a:t>4.36°</a:t>
             </a:r>
           </a:p>
         </p:txBody>
@@ -3676,7 +3677,7 @@
         </p:nvSpPr>
         <p:spPr>
           <a:xfrm>
-            <a:off x="9052560" y="2679192"/>
+            <a:off x="8961120" y="2679192"/>
             <a:ext cx="2286000" cy="301752"/>
           </a:xfrm>
           <a:prstGeom prst="rect">
@@ -3698,7 +3699,7 @@
                 </a:solidFill>
                 <a:latin typeface="Noto Sans CJK SC"/>
               </a:rPr>
-              <a:t>最早撞墙时间</a:t>
+              <a:t>后轮增速 0：最大侧滑</a:t>
             </a:r>
           </a:p>
         </p:txBody>
@@ -3711,29 +3712,29 @@
         </p:nvSpPr>
         <p:spPr>
           <a:xfrm>
-            <a:off x="6492240" y="3474720"/>
-            <a:ext cx="201168" cy="256032"/>
-          </a:xfrm>
-          <a:prstGeom prst="rect">
-            <a:avLst/>
-          </a:prstGeom>
-          <a:noFill/>
-        </p:spPr>
-        <p:txBody>
-          <a:bodyPr wrap="square" anchor="ctr">
-            <a:spAutoFit/>
-          </a:bodyPr>
-          <a:lstStyle/>
-          <a:p>
-            <a:pPr algn="l"/>
-            <a:r>
-              <a:rPr sz="1700" b="1">
-                <a:solidFill>
-                  <a:srgbClr val="2478BE"/>
-                </a:solidFill>
-                <a:latin typeface="Noto Sans CJK SC"/>
-              </a:rPr>
-              <a:t>•</a:t>
+            <a:off x="6492240" y="3429000"/>
+            <a:ext cx="4572000" cy="411480"/>
+          </a:xfrm>
+          <a:prstGeom prst="rect">
+            <a:avLst/>
+          </a:prstGeom>
+          <a:noFill/>
+        </p:spPr>
+        <p:txBody>
+          <a:bodyPr wrap="square" anchor="ctr">
+            <a:spAutoFit/>
+          </a:bodyPr>
+          <a:lstStyle/>
+          <a:p>
+            <a:pPr algn="l"/>
+            <a:r>
+              <a:rPr sz="1600" b="1">
+                <a:solidFill>
+                  <a:srgbClr val="191E26"/>
+                </a:solidFill>
+                <a:latin typeface="Noto Sans CJK SC"/>
+              </a:rPr>
+              <a:t>Interlagos A/B：0.133 s 漂移 → 0.0 s；当前策略的漂移 100% 来自后轮增速。</a:t>
             </a:r>
           </a:p>
         </p:txBody>
@@ -3741,41 +3742,6 @@
       <p:sp>
         <p:nvSpPr>
           <p:cNvPr id="11" name="TextBox 10"/>
-          <p:cNvSpPr txBox="1"/>
-          <p:nvPr/>
-        </p:nvSpPr>
-        <p:spPr>
-          <a:xfrm>
-            <a:off x="6729983" y="3456432"/>
-            <a:ext cx="4242816" cy="411480"/>
-          </a:xfrm>
-          <a:prstGeom prst="rect">
-            <a:avLst/>
-          </a:prstGeom>
-          <a:noFill/>
-        </p:spPr>
-        <p:txBody>
-          <a:bodyPr wrap="square" anchor="ctr">
-            <a:spAutoFit/>
-          </a:bodyPr>
-          <a:lstStyle/>
-          <a:p>
-            <a:pPr algn="l"/>
-            <a:r>
-              <a:rPr sz="1400" b="0">
-                <a:solidFill>
-                  <a:srgbClr val="191E26"/>
-                </a:solidFill>
-                <a:latin typeface="Noto Sans CJK SC"/>
-              </a:rPr>
-              <a:t>条件：噪声 0.02 m + 丢束 5% + 延迟 50 ms；5 赛道 × 2 种子。</a:t>
-            </a:r>
-          </a:p>
-        </p:txBody>
-      </p:sp>
-      <p:sp>
-        <p:nvSpPr>
-          <p:cNvPr id="12" name="TextBox 11"/>
           <p:cNvSpPr txBox="1"/>
           <p:nvPr/>
         </p:nvSpPr>
@@ -3810,7 +3776,7 @@
       </p:sp>
       <p:sp>
         <p:nvSpPr>
-          <p:cNvPr id="13" name="TextBox 12"/>
+          <p:cNvPr id="12" name="TextBox 11"/>
           <p:cNvSpPr txBox="1"/>
           <p:nvPr/>
         </p:nvSpPr>
@@ -3838,7 +3804,42 @@
                 </a:solidFill>
                 <a:latin typeface="Noto Sans CJK SC"/>
               </a:rPr>
-              <a:t>消融：噪声单独可过；丢束或延迟单独已致命。</a:t>
+              <a:t>这证实“在给定仿真执行器下”可做发卡弯漂移。</a:t>
+            </a:r>
+          </a:p>
+        </p:txBody>
+      </p:sp>
+      <p:sp>
+        <p:nvSpPr>
+          <p:cNvPr id="13" name="TextBox 12"/>
+          <p:cNvSpPr txBox="1"/>
+          <p:nvPr/>
+        </p:nvSpPr>
+        <p:spPr>
+          <a:xfrm>
+            <a:off x="6492240" y="4663440"/>
+            <a:ext cx="201168" cy="256032"/>
+          </a:xfrm>
+          <a:prstGeom prst="rect">
+            <a:avLst/>
+          </a:prstGeom>
+          <a:noFill/>
+        </p:spPr>
+        <p:txBody>
+          <a:bodyPr wrap="square" anchor="ctr">
+            <a:spAutoFit/>
+          </a:bodyPr>
+          <a:lstStyle/>
+          <a:p>
+            <a:pPr algn="l"/>
+            <a:r>
+              <a:rPr sz="1700" b="1">
+                <a:solidFill>
+                  <a:srgbClr val="2478BE"/>
+                </a:solidFill>
+                <a:latin typeface="Noto Sans CJK SC"/>
+              </a:rPr>
+              <a:t>•</a:t>
             </a:r>
           </a:p>
         </p:txBody>
@@ -3851,29 +3852,29 @@
         </p:nvSpPr>
         <p:spPr>
           <a:xfrm>
-            <a:off x="6492240" y="4754880"/>
-            <a:ext cx="201168" cy="256032"/>
-          </a:xfrm>
-          <a:prstGeom prst="rect">
-            <a:avLst/>
-          </a:prstGeom>
-          <a:noFill/>
-        </p:spPr>
-        <p:txBody>
-          <a:bodyPr wrap="square" anchor="ctr">
-            <a:spAutoFit/>
-          </a:bodyPr>
-          <a:lstStyle/>
-          <a:p>
-            <a:pPr algn="l"/>
-            <a:r>
-              <a:rPr sz="1700" b="1">
-                <a:solidFill>
-                  <a:srgbClr val="2478BE"/>
-                </a:solidFill>
-                <a:latin typeface="Noto Sans CJK SC"/>
-              </a:rPr>
-              <a:t>•</a:t>
+            <a:off x="6729983" y="4645152"/>
+            <a:ext cx="4242816" cy="411480"/>
+          </a:xfrm>
+          <a:prstGeom prst="rect">
+            <a:avLst/>
+          </a:prstGeom>
+          <a:noFill/>
+        </p:spPr>
+        <p:txBody>
+          <a:bodyPr wrap="square" anchor="ctr">
+            <a:spAutoFit/>
+          </a:bodyPr>
+          <a:lstStyle/>
+          <a:p>
+            <a:pPr algn="l"/>
+            <a:r>
+              <a:rPr sz="1400" b="0">
+                <a:solidFill>
+                  <a:srgbClr val="BE343A"/>
+                </a:solidFill>
+                <a:latin typeface="Noto Sans CJK SC"/>
+              </a:rPr>
+              <a:t>不证实单电机四驱实车能复现：其后轮增速等效为 0。</a:t>
             </a:r>
           </a:p>
         </p:txBody>
@@ -3881,41 +3882,6 @@
       <p:sp>
         <p:nvSpPr>
           <p:cNvPr id="15" name="TextBox 14"/>
-          <p:cNvSpPr txBox="1"/>
-          <p:nvPr/>
-        </p:nvSpPr>
-        <p:spPr>
-          <a:xfrm>
-            <a:off x="6729983" y="4736592"/>
-            <a:ext cx="4242816" cy="411480"/>
-          </a:xfrm>
-          <a:prstGeom prst="rect">
-            <a:avLst/>
-          </a:prstGeom>
-          <a:noFill/>
-        </p:spPr>
-        <p:txBody>
-          <a:bodyPr wrap="square" anchor="ctr">
-            <a:spAutoFit/>
-          </a:bodyPr>
-          <a:lstStyle/>
-          <a:p>
-            <a:pPr algn="l"/>
-            <a:r>
-              <a:rPr sz="1400" b="0">
-                <a:solidFill>
-                  <a:srgbClr val="BE343A"/>
-                </a:solidFill>
-                <a:latin typeface="Noto Sans CJK SC"/>
-              </a:rPr>
-              <a:t>根因：起步扫描匹配失败，进入 motion_estimate_unavailable 的盲车模式。</a:t>
-            </a:r>
-          </a:p>
-        </p:txBody>
-      </p:sp>
-      <p:sp>
-        <p:nvSpPr>
-          <p:cNvPr id="16" name="TextBox 15"/>
           <p:cNvSpPr txBox="1"/>
           <p:nvPr/>
         </p:nvSpPr>
@@ -4004,7 +3970,7 @@
                 </a:solidFill>
                 <a:latin typeface="Noto Sans CJK SC"/>
               </a:rPr>
-              <a:t>SIM-TO-REAL</a:t>
+              <a:t>ROBUSTNESS</a:t>
             </a:r>
           </a:p>
         </p:txBody>
@@ -4039,7 +4005,7 @@
                 </a:solidFill>
                 <a:latin typeface="Noto Sans CJK SC"/>
               </a:rPr>
-              <a:t>实车路线先恢复可观测性，再谈极限操控</a:t>
+              <a:t>主动观测还不是鲁棒感知：组合扰动下 10/10 失败</a:t>
             </a:r>
           </a:p>
         </p:txBody>
@@ -4089,51 +4055,30 @@
           </a:p>
         </p:txBody>
       </p:sp>
-      <p:sp>
-        <p:nvSpPr>
-          <p:cNvPr id="5" name="Rounded Rectangle 4"/>
-          <p:cNvSpPr/>
-          <p:nvPr/>
-        </p:nvSpPr>
-        <p:spPr>
-          <a:xfrm>
-            <a:off x="640080" y="2057400"/>
-            <a:ext cx="2487168" cy="2606040"/>
-          </a:xfrm>
-          <a:prstGeom prst="roundRect">
-            <a:avLst/>
-          </a:prstGeom>
-          <a:solidFill>
-            <a:srgbClr val="FFFFFF"/>
-          </a:solidFill>
-          <a:ln>
-            <a:solidFill>
-              <a:srgbClr val="2478BE"/>
-            </a:solidFill>
-          </a:ln>
-        </p:spPr>
-        <p:style>
-          <a:lnRef idx="1">
-            <a:schemeClr val="accent1"/>
-          </a:lnRef>
-          <a:fillRef idx="3">
-            <a:schemeClr val="accent1"/>
-          </a:fillRef>
-          <a:effectRef idx="2">
-            <a:schemeClr val="accent1"/>
-          </a:effectRef>
-          <a:fontRef idx="minor">
-            <a:schemeClr val="lt1"/>
-          </a:fontRef>
-        </p:style>
-        <p:txBody>
-          <a:bodyPr rtlCol="0" anchor="ctr"/>
-          <a:lstStyle/>
-          <a:p>
-            <a:pPr algn="ctr"/>
-          </a:p>
-        </p:txBody>
-      </p:sp>
+      <p:pic>
+        <p:nvPicPr>
+          <p:cNvPr id="5" name="Picture 4" descr="perturb.png"/>
+          <p:cNvPicPr>
+            <a:picLocks noChangeAspect="1"/>
+          </p:cNvPicPr>
+          <p:nvPr/>
+        </p:nvPicPr>
+        <p:blipFill>
+          <a:blip r:embed="rId2"/>
+          <a:stretch>
+            <a:fillRect/>
+          </a:stretch>
+        </p:blipFill>
+        <p:spPr>
+          <a:xfrm>
+            <a:off x="685800" y="1828800"/>
+            <a:ext cx="5257800" cy="3246120"/>
+          </a:xfrm>
+          <a:prstGeom prst="rect">
+            <a:avLst/>
+          </a:prstGeom>
+        </p:spPr>
+      </p:pic>
       <p:sp>
         <p:nvSpPr>
           <p:cNvPr id="6" name="TextBox 5"/>
@@ -4142,43 +4087,218 @@
         </p:nvSpPr>
         <p:spPr>
           <a:xfrm>
-            <a:off x="841247" y="2286000"/>
-            <a:ext cx="320040" cy="228600"/>
-          </a:xfrm>
-          <a:prstGeom prst="rect">
-            <a:avLst/>
-          </a:prstGeom>
-          <a:noFill/>
-        </p:spPr>
-        <p:txBody>
-          <a:bodyPr wrap="square" anchor="ctr">
-            <a:spAutoFit/>
-          </a:bodyPr>
-          <a:lstStyle/>
-          <a:p>
-            <a:pPr algn="l"/>
-            <a:r>
-              <a:rPr sz="1300" b="1">
+            <a:off x="6492240" y="2148840"/>
+            <a:ext cx="2194560" cy="502920"/>
+          </a:xfrm>
+          <a:prstGeom prst="rect">
+            <a:avLst/>
+          </a:prstGeom>
+          <a:noFill/>
+        </p:spPr>
+        <p:txBody>
+          <a:bodyPr wrap="square" anchor="ctr">
+            <a:spAutoFit/>
+          </a:bodyPr>
+          <a:lstStyle/>
+          <a:p>
+            <a:pPr algn="l"/>
+            <a:r>
+              <a:rPr sz="3300" b="1">
+                <a:solidFill>
+                  <a:srgbClr val="BE343A"/>
+                </a:solidFill>
+                <a:latin typeface="Noto Sans CJK SC"/>
+              </a:rPr>
+              <a:t>10/10</a:t>
+            </a:r>
+          </a:p>
+        </p:txBody>
+      </p:sp>
+      <p:sp>
+        <p:nvSpPr>
+          <p:cNvPr id="7" name="TextBox 6"/>
+          <p:cNvSpPr txBox="1"/>
+          <p:nvPr/>
+        </p:nvSpPr>
+        <p:spPr>
+          <a:xfrm>
+            <a:off x="6492240" y="2679192"/>
+            <a:ext cx="2286000" cy="301752"/>
+          </a:xfrm>
+          <a:prstGeom prst="rect">
+            <a:avLst/>
+          </a:prstGeom>
+          <a:noFill/>
+        </p:spPr>
+        <p:txBody>
+          <a:bodyPr wrap="square" anchor="ctr">
+            <a:spAutoFit/>
+          </a:bodyPr>
+          <a:lstStyle/>
+          <a:p>
+            <a:pPr algn="l"/>
+            <a:r>
+              <a:rPr sz="1100" b="0">
+                <a:solidFill>
+                  <a:srgbClr val="5D6975"/>
+                </a:solidFill>
+                <a:latin typeface="Noto Sans CJK SC"/>
+              </a:rPr>
+              <a:t>组合扰动失败</a:t>
+            </a:r>
+          </a:p>
+        </p:txBody>
+      </p:sp>
+      <p:sp>
+        <p:nvSpPr>
+          <p:cNvPr id="8" name="TextBox 7"/>
+          <p:cNvSpPr txBox="1"/>
+          <p:nvPr/>
+        </p:nvSpPr>
+        <p:spPr>
+          <a:xfrm>
+            <a:off x="9052560" y="2148840"/>
+            <a:ext cx="2194560" cy="502920"/>
+          </a:xfrm>
+          <a:prstGeom prst="rect">
+            <a:avLst/>
+          </a:prstGeom>
+          <a:noFill/>
+        </p:spPr>
+        <p:txBody>
+          <a:bodyPr wrap="square" anchor="ctr">
+            <a:spAutoFit/>
+          </a:bodyPr>
+          <a:lstStyle/>
+          <a:p>
+            <a:pPr algn="l"/>
+            <a:r>
+              <a:rPr sz="3300" b="1">
+                <a:solidFill>
+                  <a:srgbClr val="D95A34"/>
+                </a:solidFill>
+                <a:latin typeface="Noto Sans CJK SC"/>
+              </a:rPr>
+              <a:t>2.7 s</a:t>
+            </a:r>
+          </a:p>
+        </p:txBody>
+      </p:sp>
+      <p:sp>
+        <p:nvSpPr>
+          <p:cNvPr id="9" name="TextBox 8"/>
+          <p:cNvSpPr txBox="1"/>
+          <p:nvPr/>
+        </p:nvSpPr>
+        <p:spPr>
+          <a:xfrm>
+            <a:off x="9052560" y="2679192"/>
+            <a:ext cx="2286000" cy="301752"/>
+          </a:xfrm>
+          <a:prstGeom prst="rect">
+            <a:avLst/>
+          </a:prstGeom>
+          <a:noFill/>
+        </p:spPr>
+        <p:txBody>
+          <a:bodyPr wrap="square" anchor="ctr">
+            <a:spAutoFit/>
+          </a:bodyPr>
+          <a:lstStyle/>
+          <a:p>
+            <a:pPr algn="l"/>
+            <a:r>
+              <a:rPr sz="1100" b="0">
+                <a:solidFill>
+                  <a:srgbClr val="5D6975"/>
+                </a:solidFill>
+                <a:latin typeface="Noto Sans CJK SC"/>
+              </a:rPr>
+              <a:t>最早撞墙时间</a:t>
+            </a:r>
+          </a:p>
+        </p:txBody>
+      </p:sp>
+      <p:sp>
+        <p:nvSpPr>
+          <p:cNvPr id="10" name="TextBox 9"/>
+          <p:cNvSpPr txBox="1"/>
+          <p:nvPr/>
+        </p:nvSpPr>
+        <p:spPr>
+          <a:xfrm>
+            <a:off x="6492240" y="3474720"/>
+            <a:ext cx="201168" cy="256032"/>
+          </a:xfrm>
+          <a:prstGeom prst="rect">
+            <a:avLst/>
+          </a:prstGeom>
+          <a:noFill/>
+        </p:spPr>
+        <p:txBody>
+          <a:bodyPr wrap="square" anchor="ctr">
+            <a:spAutoFit/>
+          </a:bodyPr>
+          <a:lstStyle/>
+          <a:p>
+            <a:pPr algn="l"/>
+            <a:r>
+              <a:rPr sz="1700" b="1">
                 <a:solidFill>
                   <a:srgbClr val="2478BE"/>
                 </a:solidFill>
                 <a:latin typeface="Noto Sans CJK SC"/>
               </a:rPr>
-              <a:t>01</a:t>
-            </a:r>
-          </a:p>
-        </p:txBody>
-      </p:sp>
-      <p:sp>
-        <p:nvSpPr>
-          <p:cNvPr id="7" name="TextBox 6"/>
-          <p:cNvSpPr txBox="1"/>
-          <p:nvPr/>
-        </p:nvSpPr>
-        <p:spPr>
-          <a:xfrm>
-            <a:off x="841247" y="2697480"/>
-            <a:ext cx="2029968" cy="320040"/>
+              <a:t>•</a:t>
+            </a:r>
+          </a:p>
+        </p:txBody>
+      </p:sp>
+      <p:sp>
+        <p:nvSpPr>
+          <p:cNvPr id="11" name="TextBox 10"/>
+          <p:cNvSpPr txBox="1"/>
+          <p:nvPr/>
+        </p:nvSpPr>
+        <p:spPr>
+          <a:xfrm>
+            <a:off x="6729983" y="3456432"/>
+            <a:ext cx="4242816" cy="411480"/>
+          </a:xfrm>
+          <a:prstGeom prst="rect">
+            <a:avLst/>
+          </a:prstGeom>
+          <a:noFill/>
+        </p:spPr>
+        <p:txBody>
+          <a:bodyPr wrap="square" anchor="ctr">
+            <a:spAutoFit/>
+          </a:bodyPr>
+          <a:lstStyle/>
+          <a:p>
+            <a:pPr algn="l"/>
+            <a:r>
+              <a:rPr sz="1400" b="0">
+                <a:solidFill>
+                  <a:srgbClr val="191E26"/>
+                </a:solidFill>
+                <a:latin typeface="Noto Sans CJK SC"/>
+              </a:rPr>
+              <a:t>条件：噪声 0.02 m + 丢束 5% + 延迟 50 ms；5 赛道 × 2 种子。</a:t>
+            </a:r>
+          </a:p>
+        </p:txBody>
+      </p:sp>
+      <p:sp>
+        <p:nvSpPr>
+          <p:cNvPr id="12" name="TextBox 11"/>
+          <p:cNvSpPr txBox="1"/>
+          <p:nvPr/>
+        </p:nvSpPr>
+        <p:spPr>
+          <a:xfrm>
+            <a:off x="6492240" y="4114800"/>
+            <a:ext cx="201168" cy="256032"/>
           </a:xfrm>
           <a:prstGeom prst="rect">
             <a:avLst/>
@@ -4195,278 +4315,81 @@
             <a:r>
               <a:rPr sz="1700" b="1">
                 <a:solidFill>
+                  <a:srgbClr val="2478BE"/>
+                </a:solidFill>
+                <a:latin typeface="Noto Sans CJK SC"/>
+              </a:rPr>
+              <a:t>•</a:t>
+            </a:r>
+          </a:p>
+        </p:txBody>
+      </p:sp>
+      <p:sp>
+        <p:nvSpPr>
+          <p:cNvPr id="13" name="TextBox 12"/>
+          <p:cNvSpPr txBox="1"/>
+          <p:nvPr/>
+        </p:nvSpPr>
+        <p:spPr>
+          <a:xfrm>
+            <a:off x="6729983" y="4096512"/>
+            <a:ext cx="4242816" cy="411480"/>
+          </a:xfrm>
+          <a:prstGeom prst="rect">
+            <a:avLst/>
+          </a:prstGeom>
+          <a:noFill/>
+        </p:spPr>
+        <p:txBody>
+          <a:bodyPr wrap="square" anchor="ctr">
+            <a:spAutoFit/>
+          </a:bodyPr>
+          <a:lstStyle/>
+          <a:p>
+            <a:pPr algn="l"/>
+            <a:r>
+              <a:rPr sz="1400" b="0">
+                <a:solidFill>
                   <a:srgbClr val="191E26"/>
                 </a:solidFill>
                 <a:latin typeface="Noto Sans CJK SC"/>
               </a:rPr>
-              <a:t>转向标定</a:t>
-            </a:r>
-          </a:p>
-        </p:txBody>
-      </p:sp>
-      <p:sp>
-        <p:nvSpPr>
-          <p:cNvPr id="8" name="TextBox 7"/>
-          <p:cNvSpPr txBox="1"/>
-          <p:nvPr/>
-        </p:nvSpPr>
-        <p:spPr>
-          <a:xfrm>
-            <a:off x="841247" y="3246120"/>
-            <a:ext cx="2029968" cy="731520"/>
-          </a:xfrm>
-          <a:prstGeom prst="rect">
-            <a:avLst/>
-          </a:prstGeom>
-          <a:noFill/>
-        </p:spPr>
-        <p:txBody>
-          <a:bodyPr wrap="square" anchor="ctr">
-            <a:spAutoFit/>
-          </a:bodyPr>
-          <a:lstStyle/>
-          <a:p>
-            <a:pPr algn="l"/>
-            <a:r>
-              <a:rPr sz="1300" b="0">
-                <a:solidFill>
-                  <a:srgbClr val="5D6975"/>
-                </a:solidFill>
-                <a:latin typeface="Noto Sans CJK SC"/>
-              </a:rPr>
-              <a:t>舵机指令→左右轮实际角
-含 Ackermann 差动、滞后、速率限幅</a:t>
-            </a:r>
-          </a:p>
-        </p:txBody>
-      </p:sp>
-      <p:sp>
-        <p:nvSpPr>
-          <p:cNvPr id="9" name="Rounded Rectangle 8"/>
-          <p:cNvSpPr/>
-          <p:nvPr/>
-        </p:nvSpPr>
-        <p:spPr>
-          <a:xfrm>
-            <a:off x="3493008" y="2057400"/>
-            <a:ext cx="2487168" cy="2606040"/>
-          </a:xfrm>
-          <a:prstGeom prst="roundRect">
-            <a:avLst/>
-          </a:prstGeom>
-          <a:solidFill>
-            <a:srgbClr val="FFFFFF"/>
-          </a:solidFill>
-          <a:ln>
-            <a:solidFill>
-              <a:srgbClr val="2478BE"/>
-            </a:solidFill>
-          </a:ln>
-        </p:spPr>
-        <p:style>
-          <a:lnRef idx="1">
-            <a:schemeClr val="accent1"/>
-          </a:lnRef>
-          <a:fillRef idx="3">
-            <a:schemeClr val="accent1"/>
-          </a:fillRef>
-          <a:effectRef idx="2">
-            <a:schemeClr val="accent1"/>
-          </a:effectRef>
-          <a:fontRef idx="minor">
-            <a:schemeClr val="lt1"/>
-          </a:fontRef>
-        </p:style>
-        <p:txBody>
-          <a:bodyPr rtlCol="0" anchor="ctr"/>
-          <a:lstStyle/>
-          <a:p>
-            <a:pPr algn="ctr"/>
-          </a:p>
-        </p:txBody>
-      </p:sp>
-      <p:sp>
-        <p:nvSpPr>
-          <p:cNvPr id="10" name="TextBox 9"/>
-          <p:cNvSpPr txBox="1"/>
-          <p:nvPr/>
-        </p:nvSpPr>
-        <p:spPr>
-          <a:xfrm>
-            <a:off x="3694176" y="2286000"/>
-            <a:ext cx="320040" cy="228600"/>
-          </a:xfrm>
-          <a:prstGeom prst="rect">
-            <a:avLst/>
-          </a:prstGeom>
-          <a:noFill/>
-        </p:spPr>
-        <p:txBody>
-          <a:bodyPr wrap="square" anchor="ctr">
-            <a:spAutoFit/>
-          </a:bodyPr>
-          <a:lstStyle/>
-          <a:p>
-            <a:pPr algn="l"/>
-            <a:r>
-              <a:rPr sz="1300" b="1">
+              <a:t>消融：噪声单独可过；丢束或延迟单独已致命。</a:t>
+            </a:r>
+          </a:p>
+        </p:txBody>
+      </p:sp>
+      <p:sp>
+        <p:nvSpPr>
+          <p:cNvPr id="14" name="TextBox 13"/>
+          <p:cNvSpPr txBox="1"/>
+          <p:nvPr/>
+        </p:nvSpPr>
+        <p:spPr>
+          <a:xfrm>
+            <a:off x="6492240" y="4754880"/>
+            <a:ext cx="201168" cy="256032"/>
+          </a:xfrm>
+          <a:prstGeom prst="rect">
+            <a:avLst/>
+          </a:prstGeom>
+          <a:noFill/>
+        </p:spPr>
+        <p:txBody>
+          <a:bodyPr wrap="square" anchor="ctr">
+            <a:spAutoFit/>
+          </a:bodyPr>
+          <a:lstStyle/>
+          <a:p>
+            <a:pPr algn="l"/>
+            <a:r>
+              <a:rPr sz="1700" b="1">
                 <a:solidFill>
                   <a:srgbClr val="2478BE"/>
                 </a:solidFill>
                 <a:latin typeface="Noto Sans CJK SC"/>
               </a:rPr>
-              <a:t>02</a:t>
-            </a:r>
-          </a:p>
-        </p:txBody>
-      </p:sp>
-      <p:sp>
-        <p:nvSpPr>
-          <p:cNvPr id="11" name="TextBox 10"/>
-          <p:cNvSpPr txBox="1"/>
-          <p:nvPr/>
-        </p:nvSpPr>
-        <p:spPr>
-          <a:xfrm>
-            <a:off x="3694176" y="2697480"/>
-            <a:ext cx="2029968" cy="320040"/>
-          </a:xfrm>
-          <a:prstGeom prst="rect">
-            <a:avLst/>
-          </a:prstGeom>
-          <a:noFill/>
-        </p:spPr>
-        <p:txBody>
-          <a:bodyPr wrap="square" anchor="ctr">
-            <a:spAutoFit/>
-          </a:bodyPr>
-          <a:lstStyle/>
-          <a:p>
-            <a:pPr algn="l"/>
-            <a:r>
-              <a:rPr sz="1700" b="1">
-                <a:solidFill>
-                  <a:srgbClr val="191E26"/>
-                </a:solidFill>
-                <a:latin typeface="Noto Sans CJK SC"/>
-              </a:rPr>
-              <a:t>补转向反馈</a:t>
-            </a:r>
-          </a:p>
-        </p:txBody>
-      </p:sp>
-      <p:sp>
-        <p:nvSpPr>
-          <p:cNvPr id="12" name="TextBox 11"/>
-          <p:cNvSpPr txBox="1"/>
-          <p:nvPr/>
-        </p:nvSpPr>
-        <p:spPr>
-          <a:xfrm>
-            <a:off x="3694176" y="3246120"/>
-            <a:ext cx="2029968" cy="731520"/>
-          </a:xfrm>
-          <a:prstGeom prst="rect">
-            <a:avLst/>
-          </a:prstGeom>
-          <a:noFill/>
-        </p:spPr>
-        <p:txBody>
-          <a:bodyPr wrap="square" anchor="ctr">
-            <a:spAutoFit/>
-          </a:bodyPr>
-          <a:lstStyle/>
-          <a:p>
-            <a:pPr algn="l"/>
-            <a:r>
-              <a:rPr sz="1300" b="0">
-                <a:solidFill>
-                  <a:srgbClr val="5D6975"/>
-                </a:solidFill>
-                <a:latin typeface="Noto Sans CJK SC"/>
-              </a:rPr>
-              <a:t>电位计/绝对编码器
-让安全前瞻使用实测转角</a:t>
-            </a:r>
-          </a:p>
-        </p:txBody>
-      </p:sp>
-      <p:sp>
-        <p:nvSpPr>
-          <p:cNvPr id="13" name="Rounded Rectangle 12"/>
-          <p:cNvSpPr/>
-          <p:nvPr/>
-        </p:nvSpPr>
-        <p:spPr>
-          <a:xfrm>
-            <a:off x="6345936" y="2057400"/>
-            <a:ext cx="2487168" cy="2606040"/>
-          </a:xfrm>
-          <a:prstGeom prst="roundRect">
-            <a:avLst/>
-          </a:prstGeom>
-          <a:solidFill>
-            <a:srgbClr val="FFFFFF"/>
-          </a:solidFill>
-          <a:ln>
-            <a:solidFill>
-              <a:srgbClr val="2478BE"/>
-            </a:solidFill>
-          </a:ln>
-        </p:spPr>
-        <p:style>
-          <a:lnRef idx="1">
-            <a:schemeClr val="accent1"/>
-          </a:lnRef>
-          <a:fillRef idx="3">
-            <a:schemeClr val="accent1"/>
-          </a:fillRef>
-          <a:effectRef idx="2">
-            <a:schemeClr val="accent1"/>
-          </a:effectRef>
-          <a:fontRef idx="minor">
-            <a:schemeClr val="lt1"/>
-          </a:fontRef>
-        </p:style>
-        <p:txBody>
-          <a:bodyPr rtlCol="0" anchor="ctr"/>
-          <a:lstStyle/>
-          <a:p>
-            <a:pPr algn="ctr"/>
-          </a:p>
-        </p:txBody>
-      </p:sp>
-      <p:sp>
-        <p:nvSpPr>
-          <p:cNvPr id="14" name="TextBox 13"/>
-          <p:cNvSpPr txBox="1"/>
-          <p:nvPr/>
-        </p:nvSpPr>
-        <p:spPr>
-          <a:xfrm>
-            <a:off x="6547104" y="2286000"/>
-            <a:ext cx="320040" cy="228600"/>
-          </a:xfrm>
-          <a:prstGeom prst="rect">
-            <a:avLst/>
-          </a:prstGeom>
-          <a:noFill/>
-        </p:spPr>
-        <p:txBody>
-          <a:bodyPr wrap="square" anchor="ctr">
-            <a:spAutoFit/>
-          </a:bodyPr>
-          <a:lstStyle/>
-          <a:p>
-            <a:pPr algn="l"/>
-            <a:r>
-              <a:rPr sz="1300" b="1">
-                <a:solidFill>
-                  <a:srgbClr val="2478BE"/>
-                </a:solidFill>
-                <a:latin typeface="Noto Sans CJK SC"/>
-              </a:rPr>
-              <a:t>03</a:t>
+              <a:t>•</a:t>
             </a:r>
           </a:p>
         </p:txBody>
@@ -4479,29 +4402,29 @@
         </p:nvSpPr>
         <p:spPr>
           <a:xfrm>
-            <a:off x="6547104" y="2697480"/>
-            <a:ext cx="2029968" cy="320040"/>
-          </a:xfrm>
-          <a:prstGeom prst="rect">
-            <a:avLst/>
-          </a:prstGeom>
-          <a:noFill/>
-        </p:spPr>
-        <p:txBody>
-          <a:bodyPr wrap="square" anchor="ctr">
-            <a:spAutoFit/>
-          </a:bodyPr>
-          <a:lstStyle/>
-          <a:p>
-            <a:pPr algn="l"/>
-            <a:r>
-              <a:rPr sz="1700" b="1">
-                <a:solidFill>
-                  <a:srgbClr val="191E26"/>
-                </a:solidFill>
-                <a:latin typeface="Noto Sans CJK SC"/>
-              </a:rPr>
-              <a:t>分级上线</a:t>
+            <a:off x="6729983" y="4736592"/>
+            <a:ext cx="4242816" cy="411480"/>
+          </a:xfrm>
+          <a:prstGeom prst="rect">
+            <a:avLst/>
+          </a:prstGeom>
+          <a:noFill/>
+        </p:spPr>
+        <p:txBody>
+          <a:bodyPr wrap="square" anchor="ctr">
+            <a:spAutoFit/>
+          </a:bodyPr>
+          <a:lstStyle/>
+          <a:p>
+            <a:pPr algn="l"/>
+            <a:r>
+              <a:rPr sz="1400" b="0">
+                <a:solidFill>
+                  <a:srgbClr val="BE343A"/>
+                </a:solidFill>
+                <a:latin typeface="Noto Sans CJK SC"/>
+              </a:rPr>
+              <a:t>根因：起步扫描匹配失败，进入 motion_estimate_unavailable 的盲车模式。</a:t>
             </a:r>
           </a:p>
         </p:txBody>
@@ -4509,227 +4432,6 @@
       <p:sp>
         <p:nvSpPr>
           <p:cNvPr id="16" name="TextBox 15"/>
-          <p:cNvSpPr txBox="1"/>
-          <p:nvPr/>
-        </p:nvSpPr>
-        <p:spPr>
-          <a:xfrm>
-            <a:off x="6547104" y="3246120"/>
-            <a:ext cx="2029968" cy="731520"/>
-          </a:xfrm>
-          <a:prstGeom prst="rect">
-            <a:avLst/>
-          </a:prstGeom>
-          <a:noFill/>
-        </p:spPr>
-        <p:txBody>
-          <a:bodyPr wrap="square" anchor="ctr">
-            <a:spAutoFit/>
-          </a:bodyPr>
-          <a:lstStyle/>
-          <a:p>
-            <a:pPr algn="l"/>
-            <a:r>
-              <a:rPr sz="1300" b="0">
-                <a:solidFill>
-                  <a:srgbClr val="5D6975"/>
-                </a:solidFill>
-                <a:latin typeface="Noto Sans CJK SC"/>
-              </a:rPr>
-              <a:t>shadow 回放→台架→低速→逐级提速
-每级留 rosbag/日志/圈速</a:t>
-            </a:r>
-          </a:p>
-        </p:txBody>
-      </p:sp>
-      <p:sp>
-        <p:nvSpPr>
-          <p:cNvPr id="17" name="Rounded Rectangle 16"/>
-          <p:cNvSpPr/>
-          <p:nvPr/>
-        </p:nvSpPr>
-        <p:spPr>
-          <a:xfrm>
-            <a:off x="9198863" y="2057400"/>
-            <a:ext cx="2487168" cy="2606040"/>
-          </a:xfrm>
-          <a:prstGeom prst="roundRect">
-            <a:avLst/>
-          </a:prstGeom>
-          <a:solidFill>
-            <a:srgbClr val="FFFFFF"/>
-          </a:solidFill>
-          <a:ln>
-            <a:solidFill>
-              <a:srgbClr val="2478BE"/>
-            </a:solidFill>
-          </a:ln>
-        </p:spPr>
-        <p:style>
-          <a:lnRef idx="1">
-            <a:schemeClr val="accent1"/>
-          </a:lnRef>
-          <a:fillRef idx="3">
-            <a:schemeClr val="accent1"/>
-          </a:fillRef>
-          <a:effectRef idx="2">
-            <a:schemeClr val="accent1"/>
-          </a:effectRef>
-          <a:fontRef idx="minor">
-            <a:schemeClr val="lt1"/>
-          </a:fontRef>
-        </p:style>
-        <p:txBody>
-          <a:bodyPr rtlCol="0" anchor="ctr"/>
-          <a:lstStyle/>
-          <a:p>
-            <a:pPr algn="ctr"/>
-          </a:p>
-        </p:txBody>
-      </p:sp>
-      <p:sp>
-        <p:nvSpPr>
-          <p:cNvPr id="18" name="TextBox 17"/>
-          <p:cNvSpPr txBox="1"/>
-          <p:nvPr/>
-        </p:nvSpPr>
-        <p:spPr>
-          <a:xfrm>
-            <a:off x="9400032" y="2286000"/>
-            <a:ext cx="320040" cy="228600"/>
-          </a:xfrm>
-          <a:prstGeom prst="rect">
-            <a:avLst/>
-          </a:prstGeom>
-          <a:noFill/>
-        </p:spPr>
-        <p:txBody>
-          <a:bodyPr wrap="square" anchor="ctr">
-            <a:spAutoFit/>
-          </a:bodyPr>
-          <a:lstStyle/>
-          <a:p>
-            <a:pPr algn="l"/>
-            <a:r>
-              <a:rPr sz="1300" b="1">
-                <a:solidFill>
-                  <a:srgbClr val="2478BE"/>
-                </a:solidFill>
-                <a:latin typeface="Noto Sans CJK SC"/>
-              </a:rPr>
-              <a:t>04</a:t>
-            </a:r>
-          </a:p>
-        </p:txBody>
-      </p:sp>
-      <p:sp>
-        <p:nvSpPr>
-          <p:cNvPr id="19" name="TextBox 18"/>
-          <p:cNvSpPr txBox="1"/>
-          <p:nvPr/>
-        </p:nvSpPr>
-        <p:spPr>
-          <a:xfrm>
-            <a:off x="9400032" y="2697480"/>
-            <a:ext cx="2029968" cy="320040"/>
-          </a:xfrm>
-          <a:prstGeom prst="rect">
-            <a:avLst/>
-          </a:prstGeom>
-          <a:noFill/>
-        </p:spPr>
-        <p:txBody>
-          <a:bodyPr wrap="square" anchor="ctr">
-            <a:spAutoFit/>
-          </a:bodyPr>
-          <a:lstStyle/>
-          <a:p>
-            <a:pPr algn="l"/>
-            <a:r>
-              <a:rPr sz="1700" b="1">
-                <a:solidFill>
-                  <a:srgbClr val="191E26"/>
-                </a:solidFill>
-                <a:latin typeface="Noto Sans CJK SC"/>
-              </a:rPr>
-              <a:t>漂移动作</a:t>
-            </a:r>
-          </a:p>
-        </p:txBody>
-      </p:sp>
-      <p:sp>
-        <p:nvSpPr>
-          <p:cNvPr id="20" name="TextBox 19"/>
-          <p:cNvSpPr txBox="1"/>
-          <p:nvPr/>
-        </p:nvSpPr>
-        <p:spPr>
-          <a:xfrm>
-            <a:off x="9400032" y="3246120"/>
-            <a:ext cx="2029968" cy="731520"/>
-          </a:xfrm>
-          <a:prstGeom prst="rect">
-            <a:avLst/>
-          </a:prstGeom>
-          <a:noFill/>
-        </p:spPr>
-        <p:txBody>
-          <a:bodyPr wrap="square" anchor="ctr">
-            <a:spAutoFit/>
-          </a:bodyPr>
-          <a:lstStyle/>
-          <a:p>
-            <a:pPr algn="l"/>
-            <a:r>
-              <a:rPr sz="1300" b="0">
-                <a:solidFill>
-                  <a:srgbClr val="5D6975"/>
-                </a:solidFill>
-                <a:latin typeface="Noto Sans CJK SC"/>
-              </a:rPr>
-              <a:t>接受不漂移，或新增独立后轮/手刹，或重训制动转移行为</a:t>
-            </a:r>
-          </a:p>
-        </p:txBody>
-      </p:sp>
-      <p:sp>
-        <p:nvSpPr>
-          <p:cNvPr id="21" name="TextBox 20"/>
-          <p:cNvSpPr txBox="1"/>
-          <p:nvPr/>
-        </p:nvSpPr>
-        <p:spPr>
-          <a:xfrm>
-            <a:off x="640080" y="5257800"/>
-            <a:ext cx="10515600" cy="320040"/>
-          </a:xfrm>
-          <a:prstGeom prst="rect">
-            <a:avLst/>
-          </a:prstGeom>
-          <a:noFill/>
-        </p:spPr>
-        <p:txBody>
-          <a:bodyPr wrap="square" anchor="ctr">
-            <a:spAutoFit/>
-          </a:bodyPr>
-          <a:lstStyle/>
-          <a:p>
-            <a:pPr algn="l"/>
-            <a:r>
-              <a:rPr sz="1700" b="1">
-                <a:solidFill>
-                  <a:srgbClr val="BE343A"/>
-                </a:solidFill>
-                <a:latin typeface="Noto Sans CJK SC"/>
-              </a:rPr>
-              <a:t>不要跳过阶段：两条“real”观测仿真初测有效，不等价于任何实车运行。</a:t>
-            </a:r>
-          </a:p>
-        </p:txBody>
-      </p:sp>
-      <p:sp>
-        <p:nvSpPr>
-          <p:cNvPr id="22" name="TextBox 21"/>
           <p:cNvSpPr txBox="1"/>
           <p:nvPr/>
         </p:nvSpPr>
@@ -4818,7 +4520,7 @@
                 </a:solidFill>
                 <a:latin typeface="Noto Sans CJK SC"/>
               </a:rPr>
-              <a:t>CLOSE</a:t>
+              <a:t>SIM-TO-REAL</a:t>
             </a:r>
           </a:p>
         </p:txBody>
@@ -4853,7 +4555,7 @@
                 </a:solidFill>
                 <a:latin typeface="Noto Sans CJK SC"/>
               </a:rPr>
-              <a:t>可交付的是可复现证据；未闭合的问题也已被清楚定位</a:t>
+              <a:t>实车路线先恢复可观测性，再谈极限操控</a:t>
             </a:r>
           </a:p>
         </p:txBody>
@@ -4911,6 +4613,820 @@
         </p:nvSpPr>
         <p:spPr>
           <a:xfrm>
+            <a:off x="640080" y="2057400"/>
+            <a:ext cx="2487168" cy="2606040"/>
+          </a:xfrm>
+          <a:prstGeom prst="roundRect">
+            <a:avLst/>
+          </a:prstGeom>
+          <a:solidFill>
+            <a:srgbClr val="FFFFFF"/>
+          </a:solidFill>
+          <a:ln>
+            <a:solidFill>
+              <a:srgbClr val="2478BE"/>
+            </a:solidFill>
+          </a:ln>
+        </p:spPr>
+        <p:style>
+          <a:lnRef idx="1">
+            <a:schemeClr val="accent1"/>
+          </a:lnRef>
+          <a:fillRef idx="3">
+            <a:schemeClr val="accent1"/>
+          </a:fillRef>
+          <a:effectRef idx="2">
+            <a:schemeClr val="accent1"/>
+          </a:effectRef>
+          <a:fontRef idx="minor">
+            <a:schemeClr val="lt1"/>
+          </a:fontRef>
+        </p:style>
+        <p:txBody>
+          <a:bodyPr rtlCol="0" anchor="ctr"/>
+          <a:lstStyle/>
+          <a:p>
+            <a:pPr algn="ctr"/>
+          </a:p>
+        </p:txBody>
+      </p:sp>
+      <p:sp>
+        <p:nvSpPr>
+          <p:cNvPr id="6" name="TextBox 5"/>
+          <p:cNvSpPr txBox="1"/>
+          <p:nvPr/>
+        </p:nvSpPr>
+        <p:spPr>
+          <a:xfrm>
+            <a:off x="841247" y="2286000"/>
+            <a:ext cx="320040" cy="228600"/>
+          </a:xfrm>
+          <a:prstGeom prst="rect">
+            <a:avLst/>
+          </a:prstGeom>
+          <a:noFill/>
+        </p:spPr>
+        <p:txBody>
+          <a:bodyPr wrap="square" anchor="ctr">
+            <a:spAutoFit/>
+          </a:bodyPr>
+          <a:lstStyle/>
+          <a:p>
+            <a:pPr algn="l"/>
+            <a:r>
+              <a:rPr sz="1300" b="1">
+                <a:solidFill>
+                  <a:srgbClr val="2478BE"/>
+                </a:solidFill>
+                <a:latin typeface="Noto Sans CJK SC"/>
+              </a:rPr>
+              <a:t>01</a:t>
+            </a:r>
+          </a:p>
+        </p:txBody>
+      </p:sp>
+      <p:sp>
+        <p:nvSpPr>
+          <p:cNvPr id="7" name="TextBox 6"/>
+          <p:cNvSpPr txBox="1"/>
+          <p:nvPr/>
+        </p:nvSpPr>
+        <p:spPr>
+          <a:xfrm>
+            <a:off x="841247" y="2697480"/>
+            <a:ext cx="2029968" cy="320040"/>
+          </a:xfrm>
+          <a:prstGeom prst="rect">
+            <a:avLst/>
+          </a:prstGeom>
+          <a:noFill/>
+        </p:spPr>
+        <p:txBody>
+          <a:bodyPr wrap="square" anchor="ctr">
+            <a:spAutoFit/>
+          </a:bodyPr>
+          <a:lstStyle/>
+          <a:p>
+            <a:pPr algn="l"/>
+            <a:r>
+              <a:rPr sz="1700" b="1">
+                <a:solidFill>
+                  <a:srgbClr val="191E26"/>
+                </a:solidFill>
+                <a:latin typeface="Noto Sans CJK SC"/>
+              </a:rPr>
+              <a:t>转向标定</a:t>
+            </a:r>
+          </a:p>
+        </p:txBody>
+      </p:sp>
+      <p:sp>
+        <p:nvSpPr>
+          <p:cNvPr id="8" name="TextBox 7"/>
+          <p:cNvSpPr txBox="1"/>
+          <p:nvPr/>
+        </p:nvSpPr>
+        <p:spPr>
+          <a:xfrm>
+            <a:off x="841247" y="3246120"/>
+            <a:ext cx="2029968" cy="731520"/>
+          </a:xfrm>
+          <a:prstGeom prst="rect">
+            <a:avLst/>
+          </a:prstGeom>
+          <a:noFill/>
+        </p:spPr>
+        <p:txBody>
+          <a:bodyPr wrap="square" anchor="ctr">
+            <a:spAutoFit/>
+          </a:bodyPr>
+          <a:lstStyle/>
+          <a:p>
+            <a:pPr algn="l"/>
+            <a:r>
+              <a:rPr sz="1300" b="0">
+                <a:solidFill>
+                  <a:srgbClr val="5D6975"/>
+                </a:solidFill>
+                <a:latin typeface="Noto Sans CJK SC"/>
+              </a:rPr>
+              <a:t>舵机指令→左右轮实际角
+含 Ackermann 差动、滞后、速率限幅</a:t>
+            </a:r>
+          </a:p>
+        </p:txBody>
+      </p:sp>
+      <p:sp>
+        <p:nvSpPr>
+          <p:cNvPr id="9" name="Rounded Rectangle 8"/>
+          <p:cNvSpPr/>
+          <p:nvPr/>
+        </p:nvSpPr>
+        <p:spPr>
+          <a:xfrm>
+            <a:off x="3493008" y="2057400"/>
+            <a:ext cx="2487168" cy="2606040"/>
+          </a:xfrm>
+          <a:prstGeom prst="roundRect">
+            <a:avLst/>
+          </a:prstGeom>
+          <a:solidFill>
+            <a:srgbClr val="FFFFFF"/>
+          </a:solidFill>
+          <a:ln>
+            <a:solidFill>
+              <a:srgbClr val="2478BE"/>
+            </a:solidFill>
+          </a:ln>
+        </p:spPr>
+        <p:style>
+          <a:lnRef idx="1">
+            <a:schemeClr val="accent1"/>
+          </a:lnRef>
+          <a:fillRef idx="3">
+            <a:schemeClr val="accent1"/>
+          </a:fillRef>
+          <a:effectRef idx="2">
+            <a:schemeClr val="accent1"/>
+          </a:effectRef>
+          <a:fontRef idx="minor">
+            <a:schemeClr val="lt1"/>
+          </a:fontRef>
+        </p:style>
+        <p:txBody>
+          <a:bodyPr rtlCol="0" anchor="ctr"/>
+          <a:lstStyle/>
+          <a:p>
+            <a:pPr algn="ctr"/>
+          </a:p>
+        </p:txBody>
+      </p:sp>
+      <p:sp>
+        <p:nvSpPr>
+          <p:cNvPr id="10" name="TextBox 9"/>
+          <p:cNvSpPr txBox="1"/>
+          <p:nvPr/>
+        </p:nvSpPr>
+        <p:spPr>
+          <a:xfrm>
+            <a:off x="3694176" y="2286000"/>
+            <a:ext cx="320040" cy="228600"/>
+          </a:xfrm>
+          <a:prstGeom prst="rect">
+            <a:avLst/>
+          </a:prstGeom>
+          <a:noFill/>
+        </p:spPr>
+        <p:txBody>
+          <a:bodyPr wrap="square" anchor="ctr">
+            <a:spAutoFit/>
+          </a:bodyPr>
+          <a:lstStyle/>
+          <a:p>
+            <a:pPr algn="l"/>
+            <a:r>
+              <a:rPr sz="1300" b="1">
+                <a:solidFill>
+                  <a:srgbClr val="2478BE"/>
+                </a:solidFill>
+                <a:latin typeface="Noto Sans CJK SC"/>
+              </a:rPr>
+              <a:t>02</a:t>
+            </a:r>
+          </a:p>
+        </p:txBody>
+      </p:sp>
+      <p:sp>
+        <p:nvSpPr>
+          <p:cNvPr id="11" name="TextBox 10"/>
+          <p:cNvSpPr txBox="1"/>
+          <p:nvPr/>
+        </p:nvSpPr>
+        <p:spPr>
+          <a:xfrm>
+            <a:off x="3694176" y="2697480"/>
+            <a:ext cx="2029968" cy="320040"/>
+          </a:xfrm>
+          <a:prstGeom prst="rect">
+            <a:avLst/>
+          </a:prstGeom>
+          <a:noFill/>
+        </p:spPr>
+        <p:txBody>
+          <a:bodyPr wrap="square" anchor="ctr">
+            <a:spAutoFit/>
+          </a:bodyPr>
+          <a:lstStyle/>
+          <a:p>
+            <a:pPr algn="l"/>
+            <a:r>
+              <a:rPr sz="1700" b="1">
+                <a:solidFill>
+                  <a:srgbClr val="191E26"/>
+                </a:solidFill>
+                <a:latin typeface="Noto Sans CJK SC"/>
+              </a:rPr>
+              <a:t>补转向反馈</a:t>
+            </a:r>
+          </a:p>
+        </p:txBody>
+      </p:sp>
+      <p:sp>
+        <p:nvSpPr>
+          <p:cNvPr id="12" name="TextBox 11"/>
+          <p:cNvSpPr txBox="1"/>
+          <p:nvPr/>
+        </p:nvSpPr>
+        <p:spPr>
+          <a:xfrm>
+            <a:off x="3694176" y="3246120"/>
+            <a:ext cx="2029968" cy="731520"/>
+          </a:xfrm>
+          <a:prstGeom prst="rect">
+            <a:avLst/>
+          </a:prstGeom>
+          <a:noFill/>
+        </p:spPr>
+        <p:txBody>
+          <a:bodyPr wrap="square" anchor="ctr">
+            <a:spAutoFit/>
+          </a:bodyPr>
+          <a:lstStyle/>
+          <a:p>
+            <a:pPr algn="l"/>
+            <a:r>
+              <a:rPr sz="1300" b="0">
+                <a:solidFill>
+                  <a:srgbClr val="5D6975"/>
+                </a:solidFill>
+                <a:latin typeface="Noto Sans CJK SC"/>
+              </a:rPr>
+              <a:t>电位计/绝对编码器
+让安全前瞻使用实测转角</a:t>
+            </a:r>
+          </a:p>
+        </p:txBody>
+      </p:sp>
+      <p:sp>
+        <p:nvSpPr>
+          <p:cNvPr id="13" name="Rounded Rectangle 12"/>
+          <p:cNvSpPr/>
+          <p:nvPr/>
+        </p:nvSpPr>
+        <p:spPr>
+          <a:xfrm>
+            <a:off x="6345936" y="2057400"/>
+            <a:ext cx="2487168" cy="2606040"/>
+          </a:xfrm>
+          <a:prstGeom prst="roundRect">
+            <a:avLst/>
+          </a:prstGeom>
+          <a:solidFill>
+            <a:srgbClr val="FFFFFF"/>
+          </a:solidFill>
+          <a:ln>
+            <a:solidFill>
+              <a:srgbClr val="2478BE"/>
+            </a:solidFill>
+          </a:ln>
+        </p:spPr>
+        <p:style>
+          <a:lnRef idx="1">
+            <a:schemeClr val="accent1"/>
+          </a:lnRef>
+          <a:fillRef idx="3">
+            <a:schemeClr val="accent1"/>
+          </a:fillRef>
+          <a:effectRef idx="2">
+            <a:schemeClr val="accent1"/>
+          </a:effectRef>
+          <a:fontRef idx="minor">
+            <a:schemeClr val="lt1"/>
+          </a:fontRef>
+        </p:style>
+        <p:txBody>
+          <a:bodyPr rtlCol="0" anchor="ctr"/>
+          <a:lstStyle/>
+          <a:p>
+            <a:pPr algn="ctr"/>
+          </a:p>
+        </p:txBody>
+      </p:sp>
+      <p:sp>
+        <p:nvSpPr>
+          <p:cNvPr id="14" name="TextBox 13"/>
+          <p:cNvSpPr txBox="1"/>
+          <p:nvPr/>
+        </p:nvSpPr>
+        <p:spPr>
+          <a:xfrm>
+            <a:off x="6547104" y="2286000"/>
+            <a:ext cx="320040" cy="228600"/>
+          </a:xfrm>
+          <a:prstGeom prst="rect">
+            <a:avLst/>
+          </a:prstGeom>
+          <a:noFill/>
+        </p:spPr>
+        <p:txBody>
+          <a:bodyPr wrap="square" anchor="ctr">
+            <a:spAutoFit/>
+          </a:bodyPr>
+          <a:lstStyle/>
+          <a:p>
+            <a:pPr algn="l"/>
+            <a:r>
+              <a:rPr sz="1300" b="1">
+                <a:solidFill>
+                  <a:srgbClr val="2478BE"/>
+                </a:solidFill>
+                <a:latin typeface="Noto Sans CJK SC"/>
+              </a:rPr>
+              <a:t>03</a:t>
+            </a:r>
+          </a:p>
+        </p:txBody>
+      </p:sp>
+      <p:sp>
+        <p:nvSpPr>
+          <p:cNvPr id="15" name="TextBox 14"/>
+          <p:cNvSpPr txBox="1"/>
+          <p:nvPr/>
+        </p:nvSpPr>
+        <p:spPr>
+          <a:xfrm>
+            <a:off x="6547104" y="2697480"/>
+            <a:ext cx="2029968" cy="320040"/>
+          </a:xfrm>
+          <a:prstGeom prst="rect">
+            <a:avLst/>
+          </a:prstGeom>
+          <a:noFill/>
+        </p:spPr>
+        <p:txBody>
+          <a:bodyPr wrap="square" anchor="ctr">
+            <a:spAutoFit/>
+          </a:bodyPr>
+          <a:lstStyle/>
+          <a:p>
+            <a:pPr algn="l"/>
+            <a:r>
+              <a:rPr sz="1700" b="1">
+                <a:solidFill>
+                  <a:srgbClr val="191E26"/>
+                </a:solidFill>
+                <a:latin typeface="Noto Sans CJK SC"/>
+              </a:rPr>
+              <a:t>分级上线</a:t>
+            </a:r>
+          </a:p>
+        </p:txBody>
+      </p:sp>
+      <p:sp>
+        <p:nvSpPr>
+          <p:cNvPr id="16" name="TextBox 15"/>
+          <p:cNvSpPr txBox="1"/>
+          <p:nvPr/>
+        </p:nvSpPr>
+        <p:spPr>
+          <a:xfrm>
+            <a:off x="6547104" y="3246120"/>
+            <a:ext cx="2029968" cy="731520"/>
+          </a:xfrm>
+          <a:prstGeom prst="rect">
+            <a:avLst/>
+          </a:prstGeom>
+          <a:noFill/>
+        </p:spPr>
+        <p:txBody>
+          <a:bodyPr wrap="square" anchor="ctr">
+            <a:spAutoFit/>
+          </a:bodyPr>
+          <a:lstStyle/>
+          <a:p>
+            <a:pPr algn="l"/>
+            <a:r>
+              <a:rPr sz="1300" b="0">
+                <a:solidFill>
+                  <a:srgbClr val="5D6975"/>
+                </a:solidFill>
+                <a:latin typeface="Noto Sans CJK SC"/>
+              </a:rPr>
+              <a:t>shadow 回放→台架→低速→逐级提速
+每级留 rosbag/日志/圈速</a:t>
+            </a:r>
+          </a:p>
+        </p:txBody>
+      </p:sp>
+      <p:sp>
+        <p:nvSpPr>
+          <p:cNvPr id="17" name="Rounded Rectangle 16"/>
+          <p:cNvSpPr/>
+          <p:nvPr/>
+        </p:nvSpPr>
+        <p:spPr>
+          <a:xfrm>
+            <a:off x="9198863" y="2057400"/>
+            <a:ext cx="2487168" cy="2606040"/>
+          </a:xfrm>
+          <a:prstGeom prst="roundRect">
+            <a:avLst/>
+          </a:prstGeom>
+          <a:solidFill>
+            <a:srgbClr val="FFFFFF"/>
+          </a:solidFill>
+          <a:ln>
+            <a:solidFill>
+              <a:srgbClr val="2478BE"/>
+            </a:solidFill>
+          </a:ln>
+        </p:spPr>
+        <p:style>
+          <a:lnRef idx="1">
+            <a:schemeClr val="accent1"/>
+          </a:lnRef>
+          <a:fillRef idx="3">
+            <a:schemeClr val="accent1"/>
+          </a:fillRef>
+          <a:effectRef idx="2">
+            <a:schemeClr val="accent1"/>
+          </a:effectRef>
+          <a:fontRef idx="minor">
+            <a:schemeClr val="lt1"/>
+          </a:fontRef>
+        </p:style>
+        <p:txBody>
+          <a:bodyPr rtlCol="0" anchor="ctr"/>
+          <a:lstStyle/>
+          <a:p>
+            <a:pPr algn="ctr"/>
+          </a:p>
+        </p:txBody>
+      </p:sp>
+      <p:sp>
+        <p:nvSpPr>
+          <p:cNvPr id="18" name="TextBox 17"/>
+          <p:cNvSpPr txBox="1"/>
+          <p:nvPr/>
+        </p:nvSpPr>
+        <p:spPr>
+          <a:xfrm>
+            <a:off x="9400032" y="2286000"/>
+            <a:ext cx="320040" cy="228600"/>
+          </a:xfrm>
+          <a:prstGeom prst="rect">
+            <a:avLst/>
+          </a:prstGeom>
+          <a:noFill/>
+        </p:spPr>
+        <p:txBody>
+          <a:bodyPr wrap="square" anchor="ctr">
+            <a:spAutoFit/>
+          </a:bodyPr>
+          <a:lstStyle/>
+          <a:p>
+            <a:pPr algn="l"/>
+            <a:r>
+              <a:rPr sz="1300" b="1">
+                <a:solidFill>
+                  <a:srgbClr val="2478BE"/>
+                </a:solidFill>
+                <a:latin typeface="Noto Sans CJK SC"/>
+              </a:rPr>
+              <a:t>04</a:t>
+            </a:r>
+          </a:p>
+        </p:txBody>
+      </p:sp>
+      <p:sp>
+        <p:nvSpPr>
+          <p:cNvPr id="19" name="TextBox 18"/>
+          <p:cNvSpPr txBox="1"/>
+          <p:nvPr/>
+        </p:nvSpPr>
+        <p:spPr>
+          <a:xfrm>
+            <a:off x="9400032" y="2697480"/>
+            <a:ext cx="2029968" cy="320040"/>
+          </a:xfrm>
+          <a:prstGeom prst="rect">
+            <a:avLst/>
+          </a:prstGeom>
+          <a:noFill/>
+        </p:spPr>
+        <p:txBody>
+          <a:bodyPr wrap="square" anchor="ctr">
+            <a:spAutoFit/>
+          </a:bodyPr>
+          <a:lstStyle/>
+          <a:p>
+            <a:pPr algn="l"/>
+            <a:r>
+              <a:rPr sz="1700" b="1">
+                <a:solidFill>
+                  <a:srgbClr val="191E26"/>
+                </a:solidFill>
+                <a:latin typeface="Noto Sans CJK SC"/>
+              </a:rPr>
+              <a:t>漂移动作</a:t>
+            </a:r>
+          </a:p>
+        </p:txBody>
+      </p:sp>
+      <p:sp>
+        <p:nvSpPr>
+          <p:cNvPr id="20" name="TextBox 19"/>
+          <p:cNvSpPr txBox="1"/>
+          <p:nvPr/>
+        </p:nvSpPr>
+        <p:spPr>
+          <a:xfrm>
+            <a:off x="9400032" y="3246120"/>
+            <a:ext cx="2029968" cy="731520"/>
+          </a:xfrm>
+          <a:prstGeom prst="rect">
+            <a:avLst/>
+          </a:prstGeom>
+          <a:noFill/>
+        </p:spPr>
+        <p:txBody>
+          <a:bodyPr wrap="square" anchor="ctr">
+            <a:spAutoFit/>
+          </a:bodyPr>
+          <a:lstStyle/>
+          <a:p>
+            <a:pPr algn="l"/>
+            <a:r>
+              <a:rPr sz="1300" b="0">
+                <a:solidFill>
+                  <a:srgbClr val="5D6975"/>
+                </a:solidFill>
+                <a:latin typeface="Noto Sans CJK SC"/>
+              </a:rPr>
+              <a:t>接受不漂移，或新增独立后轮/手刹，或重训制动转移行为</a:t>
+            </a:r>
+          </a:p>
+        </p:txBody>
+      </p:sp>
+      <p:sp>
+        <p:nvSpPr>
+          <p:cNvPr id="21" name="TextBox 20"/>
+          <p:cNvSpPr txBox="1"/>
+          <p:nvPr/>
+        </p:nvSpPr>
+        <p:spPr>
+          <a:xfrm>
+            <a:off x="640080" y="5257800"/>
+            <a:ext cx="10515600" cy="320040"/>
+          </a:xfrm>
+          <a:prstGeom prst="rect">
+            <a:avLst/>
+          </a:prstGeom>
+          <a:noFill/>
+        </p:spPr>
+        <p:txBody>
+          <a:bodyPr wrap="square" anchor="ctr">
+            <a:spAutoFit/>
+          </a:bodyPr>
+          <a:lstStyle/>
+          <a:p>
+            <a:pPr algn="l"/>
+            <a:r>
+              <a:rPr sz="1700" b="1">
+                <a:solidFill>
+                  <a:srgbClr val="BE343A"/>
+                </a:solidFill>
+                <a:latin typeface="Noto Sans CJK SC"/>
+              </a:rPr>
+              <a:t>不要跳过阶段：两条“real”观测仿真初测有效，不等价于任何实车运行。</a:t>
+            </a:r>
+          </a:p>
+        </p:txBody>
+      </p:sp>
+      <p:sp>
+        <p:nvSpPr>
+          <p:cNvPr id="22" name="TextBox 21"/>
+          <p:cNvSpPr txBox="1"/>
+          <p:nvPr/>
+        </p:nvSpPr>
+        <p:spPr>
+          <a:xfrm>
+            <a:off x="502920" y="6510528"/>
+            <a:ext cx="4572000" cy="164592"/>
+          </a:xfrm>
+          <a:prstGeom prst="rect">
+            <a:avLst/>
+          </a:prstGeom>
+          <a:noFill/>
+        </p:spPr>
+        <p:txBody>
+          <a:bodyPr wrap="square" anchor="ctr">
+            <a:spAutoFit/>
+          </a:bodyPr>
+          <a:lstStyle/>
+          <a:p>
+            <a:pPr algn="l"/>
+            <a:r>
+              <a:rPr sz="800" b="0">
+                <a:solidFill>
+                  <a:srgbClr val="5D6975"/>
+                </a:solidFill>
+                <a:latin typeface="Noto Sans CJK SC"/>
+              </a:rPr>
+              <a:t>OSRACER · 证据化直播材料  |  12</a:t>
+            </a:r>
+          </a:p>
+        </p:txBody>
+      </p:sp>
+    </p:spTree>
+  </p:cSld>
+  <p:clrMapOvr>
+    <a:masterClrMapping/>
+  </p:clrMapOvr>
+</p:sld>
+</file>
+
+<file path=ppt/slides/slide13.xml><?xml version="1.0" encoding="utf-8"?>
+<p:sld xmlns:a="http://schemas.openxmlformats.org/drawingml/2006/main" xmlns:p="http://schemas.openxmlformats.org/presentationml/2006/main" xmlns:r="http://schemas.openxmlformats.org/officeDocument/2006/relationships">
+  <p:cSld>
+    <p:bg>
+      <p:bgPr>
+        <a:solidFill>
+          <a:srgbClr val="FAF9F6"/>
+        </a:solidFill>
+        <a:effectLst/>
+      </p:bgPr>
+    </p:bg>
+    <p:spTree>
+      <p:nvGrpSpPr>
+        <p:cNvPr id="1" name=""/>
+        <p:cNvGrpSpPr/>
+        <p:nvPr/>
+      </p:nvGrpSpPr>
+      <p:grpSpPr/>
+      <p:sp>
+        <p:nvSpPr>
+          <p:cNvPr id="2" name="TextBox 1"/>
+          <p:cNvSpPr txBox="1"/>
+          <p:nvPr/>
+        </p:nvSpPr>
+        <p:spPr>
+          <a:xfrm>
+            <a:off x="502920" y="274320"/>
+            <a:ext cx="2743200" cy="228600"/>
+          </a:xfrm>
+          <a:prstGeom prst="rect">
+            <a:avLst/>
+          </a:prstGeom>
+          <a:noFill/>
+        </p:spPr>
+        <p:txBody>
+          <a:bodyPr wrap="square" anchor="ctr">
+            <a:spAutoFit/>
+          </a:bodyPr>
+          <a:lstStyle/>
+          <a:p>
+            <a:pPr algn="l"/>
+            <a:r>
+              <a:rPr sz="900" b="1">
+                <a:solidFill>
+                  <a:srgbClr val="2478BE"/>
+                </a:solidFill>
+                <a:latin typeface="Noto Sans CJK SC"/>
+              </a:rPr>
+              <a:t>CLOSE</a:t>
+            </a:r>
+          </a:p>
+        </p:txBody>
+      </p:sp>
+      <p:sp>
+        <p:nvSpPr>
+          <p:cNvPr id="3" name="TextBox 2"/>
+          <p:cNvSpPr txBox="1"/>
+          <p:nvPr/>
+        </p:nvSpPr>
+        <p:spPr>
+          <a:xfrm>
+            <a:off x="502920" y="566928"/>
+            <a:ext cx="10972800" cy="594360"/>
+          </a:xfrm>
+          <a:prstGeom prst="rect">
+            <a:avLst/>
+          </a:prstGeom>
+          <a:noFill/>
+        </p:spPr>
+        <p:txBody>
+          <a:bodyPr wrap="square" anchor="ctr">
+            <a:spAutoFit/>
+          </a:bodyPr>
+          <a:lstStyle/>
+          <a:p>
+            <a:pPr algn="l"/>
+            <a:r>
+              <a:rPr sz="2700" b="1">
+                <a:solidFill>
+                  <a:srgbClr val="191E26"/>
+                </a:solidFill>
+                <a:latin typeface="Noto Sans CJK SC"/>
+              </a:rPr>
+              <a:t>可交付的是可复现证据；未闭合的问题也已被清楚定位</a:t>
+            </a:r>
+          </a:p>
+        </p:txBody>
+      </p:sp>
+      <p:sp>
+        <p:nvSpPr>
+          <p:cNvPr id="4" name="Rectangle 3"/>
+          <p:cNvSpPr/>
+          <p:nvPr/>
+        </p:nvSpPr>
+        <p:spPr>
+          <a:xfrm>
+            <a:off x="502920" y="1572768"/>
+            <a:ext cx="11155680" cy="22860"/>
+          </a:xfrm>
+          <a:prstGeom prst="rect">
+            <a:avLst/>
+          </a:prstGeom>
+          <a:solidFill>
+            <a:srgbClr val="2478BE"/>
+          </a:solidFill>
+          <a:ln>
+            <a:solidFill>
+              <a:srgbClr val="2478BE"/>
+            </a:solidFill>
+          </a:ln>
+        </p:spPr>
+        <p:style>
+          <a:lnRef idx="1">
+            <a:schemeClr val="accent1"/>
+          </a:lnRef>
+          <a:fillRef idx="3">
+            <a:schemeClr val="accent1"/>
+          </a:fillRef>
+          <a:effectRef idx="2">
+            <a:schemeClr val="accent1"/>
+          </a:effectRef>
+          <a:fontRef idx="minor">
+            <a:schemeClr val="lt1"/>
+          </a:fontRef>
+        </p:style>
+        <p:txBody>
+          <a:bodyPr rtlCol="0" anchor="ctr"/>
+          <a:lstStyle/>
+          <a:p>
+            <a:pPr algn="ctr"/>
+          </a:p>
+        </p:txBody>
+      </p:sp>
+      <p:sp>
+        <p:nvSpPr>
+          <p:cNvPr id="5" name="Rounded Rectangle 4"/>
+          <p:cNvSpPr/>
+          <p:nvPr/>
+        </p:nvSpPr>
+        <p:spPr>
+          <a:xfrm>
             <a:off x="731520" y="2011680"/>
             <a:ext cx="3017520" cy="2423160"/>
           </a:xfrm>
@@ -5354,7 +5870,7 @@
                 </a:solidFill>
                 <a:latin typeface="Noto Sans CJK SC"/>
               </a:rPr>
-              <a:t>OSRACER · 证据化直播材料  |  12</a:t>
+              <a:t>OSRACER · 证据化直播材料  |  13</a:t>
             </a:r>
           </a:p>
         </p:txBody>
@@ -6163,7 +6679,7 @@
       </p:sp>
       <p:pic>
         <p:nvPicPr>
-          <p:cNvPr id="5" name="Picture 4" descr="preview.png"/>
+          <p:cNvPr id="5" name="Picture 4" descr="openusd-preview.png"/>
           <p:cNvPicPr>
             <a:picLocks noChangeAspect="1"/>
           </p:cNvPicPr>
@@ -6187,7 +6703,7 @@
       </p:pic>
       <p:pic>
         <p:nvPicPr>
-          <p:cNvPr id="6" name="Picture 5" descr="preview_0270.png"/>
+          <p:cNvPr id="6" name="Picture 5" descr="mujoco-preview.png"/>
           <p:cNvPicPr>
             <a:picLocks noChangeAspect="1"/>
           </p:cNvPicPr>
@@ -6475,7 +6991,7 @@
                 </a:solidFill>
                 <a:latin typeface="Noto Sans CJK SC"/>
               </a:rPr>
-              <a:t>EXPERIMENT CONTRACT</a:t>
+              <a:t>ASSET TOOLCHAIN</a:t>
             </a:r>
           </a:p>
         </p:txBody>
@@ -6510,7 +7026,7 @@
                 </a:solidFill>
                 <a:latin typeface="Noto Sans CJK SC"/>
               </a:rPr>
-              <a:t>我们用受限的主动观测，而不是全局定位来闭环竞速</a:t>
+              <a:t>从 SolidWorks 到 URDF、OpenUSD 与 MJCF：导出不是黑箱</a:t>
             </a:r>
           </a:p>
         </p:txBody>
@@ -6562,20 +7078,172 @@
       </p:sp>
       <p:sp>
         <p:nvSpPr>
-          <p:cNvPr id="5" name="Rounded Rectangle 4"/>
+          <p:cNvPr id="5" name="TextBox 4"/>
+          <p:cNvSpPr txBox="1"/>
+          <p:nvPr/>
+        </p:nvSpPr>
+        <p:spPr>
+          <a:xfrm>
+            <a:off x="658368" y="1755648"/>
+            <a:ext cx="10789920" cy="411480"/>
+          </a:xfrm>
+          <a:prstGeom prst="rect">
+            <a:avLst/>
+          </a:prstGeom>
+          <a:noFill/>
+        </p:spPr>
+        <p:txBody>
+          <a:bodyPr wrap="square" anchor="ctr">
+            <a:spAutoFit/>
+          </a:bodyPr>
+          <a:lstStyle/>
+          <a:p>
+            <a:pPr algn="l"/>
+            <a:r>
+              <a:rPr sz="1500" b="0">
+                <a:solidFill>
+                  <a:srgbClr val="191E26"/>
+                </a:solidFill>
+                <a:latin typeface="Noto Sans CJK SC"/>
+              </a:rPr>
+              <a:t>资产由 SolidWorks URDF Exporter Pro 导出。它减少描述资产的重复配置，但不会自动替代控制器、摩擦参数或目标仿真器验证。</a:t>
+            </a:r>
+          </a:p>
+        </p:txBody>
+      </p:sp>
+      <p:sp>
+        <p:nvSpPr>
+          <p:cNvPr id="6" name="Rounded Rectangle 5"/>
           <p:cNvSpPr/>
           <p:nvPr/>
         </p:nvSpPr>
         <p:spPr>
           <a:xfrm>
-            <a:off x="777240" y="1965960"/>
-            <a:ext cx="2788920" cy="1691640"/>
+            <a:off x="640080" y="2331720"/>
+            <a:ext cx="5074920" cy="1261872"/>
           </a:xfrm>
           <a:prstGeom prst="roundRect">
             <a:avLst/>
           </a:prstGeom>
           <a:solidFill>
-            <a:srgbClr val="EBF3F9"/>
+            <a:srgbClr val="FFFFFF"/>
+          </a:solidFill>
+          <a:ln>
+            <a:solidFill>
+              <a:srgbClr val="00998E"/>
+            </a:solidFill>
+          </a:ln>
+        </p:spPr>
+        <p:style>
+          <a:lnRef idx="1">
+            <a:schemeClr val="accent1"/>
+          </a:lnRef>
+          <a:fillRef idx="3">
+            <a:schemeClr val="accent1"/>
+          </a:fillRef>
+          <a:effectRef idx="2">
+            <a:schemeClr val="accent1"/>
+          </a:effectRef>
+          <a:fontRef idx="minor">
+            <a:schemeClr val="lt1"/>
+          </a:fontRef>
+        </p:style>
+        <p:txBody>
+          <a:bodyPr rtlCol="0" anchor="ctr"/>
+          <a:lstStyle/>
+          <a:p>
+            <a:pPr algn="ctr"/>
+          </a:p>
+        </p:txBody>
+      </p:sp>
+      <p:sp>
+        <p:nvSpPr>
+          <p:cNvPr id="7" name="TextBox 6"/>
+          <p:cNvSpPr txBox="1"/>
+          <p:nvPr/>
+        </p:nvSpPr>
+        <p:spPr>
+          <a:xfrm>
+            <a:off x="859536" y="2514600"/>
+            <a:ext cx="2011680" cy="274320"/>
+          </a:xfrm>
+          <a:prstGeom prst="rect">
+            <a:avLst/>
+          </a:prstGeom>
+          <a:noFill/>
+        </p:spPr>
+        <p:txBody>
+          <a:bodyPr wrap="square" anchor="ctr">
+            <a:spAutoFit/>
+          </a:bodyPr>
+          <a:lstStyle/>
+          <a:p>
+            <a:pPr algn="l"/>
+            <a:r>
+              <a:rPr sz="1800" b="1">
+                <a:solidFill>
+                  <a:srgbClr val="00998E"/>
+                </a:solidFill>
+                <a:latin typeface="Noto Sans CJK SC"/>
+              </a:rPr>
+              <a:t>多目标导出</a:t>
+            </a:r>
+          </a:p>
+        </p:txBody>
+      </p:sp>
+      <p:sp>
+        <p:nvSpPr>
+          <p:cNvPr id="8" name="TextBox 7"/>
+          <p:cNvSpPr txBox="1"/>
+          <p:nvPr/>
+        </p:nvSpPr>
+        <p:spPr>
+          <a:xfrm>
+            <a:off x="868680" y="2862072"/>
+            <a:ext cx="4526280" cy="594360"/>
+          </a:xfrm>
+          <a:prstGeom prst="rect">
+            <a:avLst/>
+          </a:prstGeom>
+          <a:noFill/>
+        </p:spPr>
+        <p:txBody>
+          <a:bodyPr wrap="square" anchor="ctr">
+            <a:spAutoFit/>
+          </a:bodyPr>
+          <a:lstStyle/>
+          <a:p>
+            <a:pPr algn="l"/>
+            <a:r>
+              <a:rPr sz="1300" b="0">
+                <a:solidFill>
+                  <a:srgbClr val="191E26"/>
+                </a:solidFill>
+                <a:latin typeface="Noto Sans CJK SC"/>
+              </a:rPr>
+              <a:t>ROS 1 / ROS 2 URDF
+OpenUSD robot.usd
+MuJoCo robot.xml / scene.xml</a:t>
+            </a:r>
+          </a:p>
+        </p:txBody>
+      </p:sp>
+      <p:sp>
+        <p:nvSpPr>
+          <p:cNvPr id="9" name="Rounded Rectangle 8"/>
+          <p:cNvSpPr/>
+          <p:nvPr/>
+        </p:nvSpPr>
+        <p:spPr>
+          <a:xfrm>
+            <a:off x="6172200" y="2331720"/>
+            <a:ext cx="5074920" cy="1261872"/>
+          </a:xfrm>
+          <a:prstGeom prst="roundRect">
+            <a:avLst/>
+          </a:prstGeom>
+          <a:solidFill>
+            <a:srgbClr val="FFFFFF"/>
           </a:solidFill>
           <a:ln>
             <a:solidFill>
@@ -6607,95 +7275,96 @@
       </p:sp>
       <p:sp>
         <p:nvSpPr>
-          <p:cNvPr id="6" name="TextBox 5"/>
-          <p:cNvSpPr txBox="1"/>
-          <p:nvPr/>
-        </p:nvSpPr>
-        <p:spPr>
-          <a:xfrm>
-            <a:off x="960120" y="2240280"/>
-            <a:ext cx="2423160" cy="292608"/>
-          </a:xfrm>
-          <a:prstGeom prst="rect">
-            <a:avLst/>
-          </a:prstGeom>
-          <a:noFill/>
-        </p:spPr>
-        <p:txBody>
-          <a:bodyPr wrap="square" anchor="ctr">
-            <a:spAutoFit/>
-          </a:bodyPr>
-          <a:lstStyle/>
-          <a:p>
-            <a:pPr algn="l"/>
-            <a:r>
-              <a:rPr sz="1900" b="1">
-                <a:solidFill>
-                  <a:srgbClr val="112B46"/>
-                </a:solidFill>
-                <a:latin typeface="Noto Sans CJK SC"/>
-              </a:rPr>
-              <a:t>15 Hz laser</a:t>
-            </a:r>
-          </a:p>
-        </p:txBody>
-      </p:sp>
-      <p:sp>
-        <p:nvSpPr>
-          <p:cNvPr id="7" name="TextBox 6"/>
-          <p:cNvSpPr txBox="1"/>
-          <p:nvPr/>
-        </p:nvSpPr>
-        <p:spPr>
-          <a:xfrm>
-            <a:off x="960120" y="2651760"/>
-            <a:ext cx="2423160" cy="566928"/>
-          </a:xfrm>
-          <a:prstGeom prst="rect">
-            <a:avLst/>
-          </a:prstGeom>
-          <a:noFill/>
-        </p:spPr>
-        <p:txBody>
-          <a:bodyPr wrap="square" anchor="ctr">
-            <a:spAutoFit/>
-          </a:bodyPr>
-          <a:lstStyle/>
-          <a:p>
-            <a:pPr algn="ctr"/>
-            <a:r>
-              <a:rPr sz="1500" b="0">
+          <p:cNvPr id="10" name="TextBox 9"/>
+          <p:cNvSpPr txBox="1"/>
+          <p:nvPr/>
+        </p:nvSpPr>
+        <p:spPr>
+          <a:xfrm>
+            <a:off x="6391656" y="2514600"/>
+            <a:ext cx="2011680" cy="274320"/>
+          </a:xfrm>
+          <a:prstGeom prst="rect">
+            <a:avLst/>
+          </a:prstGeom>
+          <a:noFill/>
+        </p:spPr>
+        <p:txBody>
+          <a:bodyPr wrap="square" anchor="ctr">
+            <a:spAutoFit/>
+          </a:bodyPr>
+          <a:lstStyle/>
+          <a:p>
+            <a:pPr algn="l"/>
+            <a:r>
+              <a:rPr sz="1800" b="1">
+                <a:solidFill>
+                  <a:srgbClr val="2478BE"/>
+                </a:solidFill>
+                <a:latin typeface="Noto Sans CJK SC"/>
+              </a:rPr>
+              <a:t>模型可审查</a:t>
+            </a:r>
+          </a:p>
+        </p:txBody>
+      </p:sp>
+      <p:sp>
+        <p:nvSpPr>
+          <p:cNvPr id="11" name="TextBox 10"/>
+          <p:cNvSpPr txBox="1"/>
+          <p:nvPr/>
+        </p:nvSpPr>
+        <p:spPr>
+          <a:xfrm>
+            <a:off x="6400800" y="2862072"/>
+            <a:ext cx="4526280" cy="594360"/>
+          </a:xfrm>
+          <a:prstGeom prst="rect">
+            <a:avLst/>
+          </a:prstGeom>
+          <a:noFill/>
+        </p:spPr>
+        <p:txBody>
+          <a:bodyPr wrap="square" anchor="ctr">
+            <a:spAutoFit/>
+          </a:bodyPr>
+          <a:lstStyle/>
+          <a:p>
+            <a:pPr algn="l"/>
+            <a:r>
+              <a:rPr sz="1300" b="0">
                 <a:solidFill>
                   <a:srgbClr val="191E26"/>
                 </a:solidFill>
                 <a:latin typeface="Noto Sans CJK SC"/>
               </a:rPr>
-              <a:t>laser 坐标系
-270° / 361 束</a:t>
-            </a:r>
-          </a:p>
-        </p:txBody>
-      </p:sp>
-      <p:sp>
-        <p:nvSpPr>
-          <p:cNvPr id="8" name="Rounded Rectangle 7"/>
+              <a:t>链接树、关节、坐标系
+质量、质心、惯量与方向
+导出报告保留诊断</a:t>
+            </a:r>
+          </a:p>
+        </p:txBody>
+      </p:sp>
+      <p:sp>
+        <p:nvSpPr>
+          <p:cNvPr id="12" name="Rounded Rectangle 11"/>
           <p:cNvSpPr/>
           <p:nvPr/>
         </p:nvSpPr>
         <p:spPr>
           <a:xfrm>
-            <a:off x="4041648" y="1965960"/>
-            <a:ext cx="2788920" cy="1691640"/>
+            <a:off x="640080" y="3931920"/>
+            <a:ext cx="5074920" cy="1261872"/>
           </a:xfrm>
           <a:prstGeom prst="roundRect">
             <a:avLst/>
           </a:prstGeom>
           <a:solidFill>
-            <a:srgbClr val="EBF3F9"/>
+            <a:srgbClr val="FFFFFF"/>
           </a:solidFill>
           <a:ln>
             <a:solidFill>
-              <a:srgbClr val="2478BE"/>
+              <a:srgbClr val="D95A34"/>
             </a:solidFill>
           </a:ln>
         </p:spPr>
@@ -6723,95 +7392,96 @@
       </p:sp>
       <p:sp>
         <p:nvSpPr>
-          <p:cNvPr id="9" name="TextBox 8"/>
-          <p:cNvSpPr txBox="1"/>
-          <p:nvPr/>
-        </p:nvSpPr>
-        <p:spPr>
-          <a:xfrm>
-            <a:off x="4224528" y="2240280"/>
-            <a:ext cx="2423160" cy="292608"/>
-          </a:xfrm>
-          <a:prstGeom prst="rect">
-            <a:avLst/>
-          </a:prstGeom>
-          <a:noFill/>
-        </p:spPr>
-        <p:txBody>
-          <a:bodyPr wrap="square" anchor="ctr">
-            <a:spAutoFit/>
-          </a:bodyPr>
-          <a:lstStyle/>
-          <a:p>
-            <a:pPr algn="l"/>
-            <a:r>
-              <a:rPr sz="1900" b="1">
-                <a:solidFill>
-                  <a:srgbClr val="112B46"/>
-                </a:solidFill>
-                <a:latin typeface="Noto Sans CJK SC"/>
-              </a:rPr>
-              <a:t>轮速 + 转角</a:t>
-            </a:r>
-          </a:p>
-        </p:txBody>
-      </p:sp>
-      <p:sp>
-        <p:nvSpPr>
-          <p:cNvPr id="10" name="TextBox 9"/>
-          <p:cNvSpPr txBox="1"/>
-          <p:nvPr/>
-        </p:nvSpPr>
-        <p:spPr>
-          <a:xfrm>
-            <a:off x="4224528" y="2651760"/>
-            <a:ext cx="2423160" cy="566928"/>
-          </a:xfrm>
-          <a:prstGeom prst="rect">
-            <a:avLst/>
-          </a:prstGeom>
-          <a:noFill/>
-        </p:spPr>
-        <p:txBody>
-          <a:bodyPr wrap="square" anchor="ctr">
-            <a:spAutoFit/>
-          </a:bodyPr>
-          <a:lstStyle/>
-          <a:p>
-            <a:pPr algn="ctr"/>
-            <a:r>
-              <a:rPr sz="1500" b="0">
+          <p:cNvPr id="13" name="TextBox 12"/>
+          <p:cNvSpPr txBox="1"/>
+          <p:nvPr/>
+        </p:nvSpPr>
+        <p:spPr>
+          <a:xfrm>
+            <a:off x="859536" y="4114800"/>
+            <a:ext cx="2011680" cy="274320"/>
+          </a:xfrm>
+          <a:prstGeom prst="rect">
+            <a:avLst/>
+          </a:prstGeom>
+          <a:noFill/>
+        </p:spPr>
+        <p:txBody>
+          <a:bodyPr wrap="square" anchor="ctr">
+            <a:spAutoFit/>
+          </a:bodyPr>
+          <a:lstStyle/>
+          <a:p>
+            <a:pPr algn="l"/>
+            <a:r>
+              <a:rPr sz="1800" b="1">
+                <a:solidFill>
+                  <a:srgbClr val="D95A34"/>
+                </a:solidFill>
+                <a:latin typeface="Noto Sans CJK SC"/>
+              </a:rPr>
+              <a:t>碰撞与规模</a:t>
+            </a:r>
+          </a:p>
+        </p:txBody>
+      </p:sp>
+      <p:sp>
+        <p:nvSpPr>
+          <p:cNvPr id="14" name="TextBox 13"/>
+          <p:cNvSpPr txBox="1"/>
+          <p:nvPr/>
+        </p:nvSpPr>
+        <p:spPr>
+          <a:xfrm>
+            <a:off x="868680" y="4462272"/>
+            <a:ext cx="4526280" cy="594360"/>
+          </a:xfrm>
+          <a:prstGeom prst="rect">
+            <a:avLst/>
+          </a:prstGeom>
+          <a:noFill/>
+        </p:spPr>
+        <p:txBody>
+          <a:bodyPr wrap="square" anchor="ctr">
+            <a:spAutoFit/>
+          </a:bodyPr>
+          <a:lstStyle/>
+          <a:p>
+            <a:pPr algn="l"/>
+            <a:r>
+              <a:rPr sz="1300" b="0">
                 <a:solidFill>
                   <a:srgbClr val="191E26"/>
                 </a:solidFill>
                 <a:latin typeface="Noto Sans CJK SC"/>
               </a:rPr>
-              <a:t>驱动状态与 Ackermann
-转向几何</a:t>
-            </a:r>
-          </a:p>
-        </p:txBody>
-      </p:sp>
-      <p:sp>
-        <p:nvSpPr>
-          <p:cNvPr id="11" name="Rounded Rectangle 10"/>
+              <a:t>原语 / 包围盒 / 凸包 / 简化网格
+分区 STL 与实测文件大小反馈
+外观和碰撞可分开取舍</a:t>
+            </a:r>
+          </a:p>
+        </p:txBody>
+      </p:sp>
+      <p:sp>
+        <p:nvSpPr>
+          <p:cNvPr id="15" name="Rounded Rectangle 14"/>
           <p:cNvSpPr/>
           <p:nvPr/>
         </p:nvSpPr>
         <p:spPr>
           <a:xfrm>
-            <a:off x="7315200" y="1965960"/>
-            <a:ext cx="2788920" cy="1691640"/>
+            <a:off x="6172200" y="3931920"/>
+            <a:ext cx="5074920" cy="1261872"/>
           </a:xfrm>
           <a:prstGeom prst="roundRect">
             <a:avLst/>
           </a:prstGeom>
           <a:solidFill>
-            <a:srgbClr val="EBF3F9"/>
+            <a:srgbClr val="FFFFFF"/>
           </a:solidFill>
           <a:ln>
             <a:solidFill>
-              <a:srgbClr val="2478BE"/>
+              <a:srgbClr val="112B46"/>
             </a:solidFill>
           </a:ln>
         </p:spPr>
@@ -6839,211 +7509,72 @@
       </p:sp>
       <p:sp>
         <p:nvSpPr>
-          <p:cNvPr id="12" name="TextBox 11"/>
-          <p:cNvSpPr txBox="1"/>
-          <p:nvPr/>
-        </p:nvSpPr>
-        <p:spPr>
-          <a:xfrm>
-            <a:off x="7498079" y="2240280"/>
-            <a:ext cx="2423160" cy="292608"/>
-          </a:xfrm>
-          <a:prstGeom prst="rect">
-            <a:avLst/>
-          </a:prstGeom>
-          <a:noFill/>
-        </p:spPr>
-        <p:txBody>
-          <a:bodyPr wrap="square" anchor="ctr">
-            <a:spAutoFit/>
-          </a:bodyPr>
-          <a:lstStyle/>
-          <a:p>
-            <a:pPr algn="l"/>
-            <a:r>
-              <a:rPr sz="1900" b="1">
+          <p:cNvPr id="16" name="TextBox 15"/>
+          <p:cNvSpPr txBox="1"/>
+          <p:nvPr/>
+        </p:nvSpPr>
+        <p:spPr>
+          <a:xfrm>
+            <a:off x="6391656" y="4114800"/>
+            <a:ext cx="2011680" cy="274320"/>
+          </a:xfrm>
+          <a:prstGeom prst="rect">
+            <a:avLst/>
+          </a:prstGeom>
+          <a:noFill/>
+        </p:spPr>
+        <p:txBody>
+          <a:bodyPr wrap="square" anchor="ctr">
+            <a:spAutoFit/>
+          </a:bodyPr>
+          <a:lstStyle/>
+          <a:p>
+            <a:pPr algn="l"/>
+            <a:r>
+              <a:rPr sz="1800" b="1">
                 <a:solidFill>
                   <a:srgbClr val="112B46"/>
                 </a:solidFill>
                 <a:latin typeface="Noto Sans CJK SC"/>
               </a:rPr>
-              <a:t>策略 + 安全层</a:t>
-            </a:r>
-          </a:p>
-        </p:txBody>
-      </p:sp>
-      <p:sp>
-        <p:nvSpPr>
-          <p:cNvPr id="13" name="TextBox 12"/>
-          <p:cNvSpPr txBox="1"/>
-          <p:nvPr/>
-        </p:nvSpPr>
-        <p:spPr>
-          <a:xfrm>
-            <a:off x="7498079" y="2651760"/>
-            <a:ext cx="2423160" cy="566928"/>
-          </a:xfrm>
-          <a:prstGeom prst="rect">
-            <a:avLst/>
-          </a:prstGeom>
-          <a:noFill/>
-        </p:spPr>
-        <p:txBody>
-          <a:bodyPr wrap="square" anchor="ctr">
-            <a:spAutoFit/>
-          </a:bodyPr>
-          <a:lstStyle/>
-          <a:p>
-            <a:pPr algn="ctr"/>
-            <a:r>
-              <a:rPr sz="1500" b="0">
+              <a:t>持续改进</a:t>
+            </a:r>
+          </a:p>
+        </p:txBody>
+      </p:sp>
+      <p:sp>
+        <p:nvSpPr>
+          <p:cNvPr id="17" name="TextBox 16"/>
+          <p:cNvSpPr txBox="1"/>
+          <p:nvPr/>
+        </p:nvSpPr>
+        <p:spPr>
+          <a:xfrm>
+            <a:off x="6400800" y="4462272"/>
+            <a:ext cx="4526280" cy="594360"/>
+          </a:xfrm>
+          <a:prstGeom prst="rect">
+            <a:avLst/>
+          </a:prstGeom>
+          <a:noFill/>
+        </p:spPr>
+        <p:txBody>
+          <a:bodyPr wrap="square" anchor="ctr">
+            <a:spAutoFit/>
+          </a:bodyPr>
+          <a:lstStyle/>
+          <a:p>
+            <a:pPr algn="l"/>
+            <a:r>
+              <a:rPr sz="1300" b="0">
                 <a:solidFill>
                   <a:srgbClr val="191E26"/>
                 </a:solidFill>
                 <a:latin typeface="Noto Sans CJK SC"/>
               </a:rPr>
-              <a:t>预测、超车、漂移
-碰撞与出界许可</a:t>
-            </a:r>
-          </a:p>
-        </p:txBody>
-      </p:sp>
-      <p:sp>
-        <p:nvSpPr>
-          <p:cNvPr id="14" name="TextBox 13"/>
-          <p:cNvSpPr txBox="1"/>
-          <p:nvPr/>
-        </p:nvSpPr>
-        <p:spPr>
-          <a:xfrm>
-            <a:off x="3611880" y="2487168"/>
-            <a:ext cx="320040" cy="365760"/>
-          </a:xfrm>
-          <a:prstGeom prst="rect">
-            <a:avLst/>
-          </a:prstGeom>
-          <a:noFill/>
-        </p:spPr>
-        <p:txBody>
-          <a:bodyPr wrap="square" anchor="ctr">
-            <a:spAutoFit/>
-          </a:bodyPr>
-          <a:lstStyle/>
-          <a:p>
-            <a:pPr algn="ctr"/>
-            <a:r>
-              <a:rPr sz="2500" b="1">
-                <a:solidFill>
-                  <a:srgbClr val="2478BE"/>
-                </a:solidFill>
-                <a:latin typeface="Noto Sans CJK SC"/>
-              </a:rPr>
-              <a:t>→</a:t>
-            </a:r>
-          </a:p>
-        </p:txBody>
-      </p:sp>
-      <p:sp>
-        <p:nvSpPr>
-          <p:cNvPr id="15" name="TextBox 14"/>
-          <p:cNvSpPr txBox="1"/>
-          <p:nvPr/>
-        </p:nvSpPr>
-        <p:spPr>
-          <a:xfrm>
-            <a:off x="6876288" y="2487168"/>
-            <a:ext cx="320040" cy="365760"/>
-          </a:xfrm>
-          <a:prstGeom prst="rect">
-            <a:avLst/>
-          </a:prstGeom>
-          <a:noFill/>
-        </p:spPr>
-        <p:txBody>
-          <a:bodyPr wrap="square" anchor="ctr">
-            <a:spAutoFit/>
-          </a:bodyPr>
-          <a:lstStyle/>
-          <a:p>
-            <a:pPr algn="ctr"/>
-            <a:r>
-              <a:rPr sz="2500" b="1">
-                <a:solidFill>
-                  <a:srgbClr val="2478BE"/>
-                </a:solidFill>
-                <a:latin typeface="Noto Sans CJK SC"/>
-              </a:rPr>
-              <a:t>→</a:t>
-            </a:r>
-          </a:p>
-        </p:txBody>
-      </p:sp>
-      <p:sp>
-        <p:nvSpPr>
-          <p:cNvPr id="16" name="TextBox 15"/>
-          <p:cNvSpPr txBox="1"/>
-          <p:nvPr/>
-        </p:nvSpPr>
-        <p:spPr>
-          <a:xfrm>
-            <a:off x="822960" y="4251960"/>
-            <a:ext cx="201168" cy="256032"/>
-          </a:xfrm>
-          <a:prstGeom prst="rect">
-            <a:avLst/>
-          </a:prstGeom>
-          <a:noFill/>
-        </p:spPr>
-        <p:txBody>
-          <a:bodyPr wrap="square" anchor="ctr">
-            <a:spAutoFit/>
-          </a:bodyPr>
-          <a:lstStyle/>
-          <a:p>
-            <a:pPr algn="l"/>
-            <a:r>
-              <a:rPr sz="1700" b="1">
-                <a:solidFill>
-                  <a:srgbClr val="2478BE"/>
-                </a:solidFill>
-                <a:latin typeface="Noto Sans CJK SC"/>
-              </a:rPr>
-              <a:t>•</a:t>
-            </a:r>
-          </a:p>
-        </p:txBody>
-      </p:sp>
-      <p:sp>
-        <p:nvSpPr>
-          <p:cNvPr id="17" name="TextBox 16"/>
-          <p:cNvSpPr txBox="1"/>
-          <p:nvPr/>
-        </p:nvSpPr>
-        <p:spPr>
-          <a:xfrm>
-            <a:off x="1060704" y="4233672"/>
-            <a:ext cx="10186416" cy="411480"/>
-          </a:xfrm>
-          <a:prstGeom prst="rect">
-            <a:avLst/>
-          </a:prstGeom>
-          <a:noFill/>
-        </p:spPr>
-        <p:txBody>
-          <a:bodyPr wrap="square" anchor="ctr">
-            <a:spAutoFit/>
-          </a:bodyPr>
-          <a:lstStyle/>
-          <a:p>
-            <a:pPr algn="l"/>
-            <a:r>
-              <a:rPr sz="1400" b="0">
-                <a:solidFill>
-                  <a:srgbClr val="191E26"/>
-                </a:solidFill>
-                <a:latin typeface="Noto Sans CJK SC"/>
-              </a:rPr>
-              <a:t>双车闭环：有效整圈、完整超越、碰撞、出界、连续侧滑均进入同一验证口径。</a:t>
+              <a:t>共享命名与元数据持久化
+旧配置迁移与单目标失败诊断
+欢迎 Issue、建议、测试和代码贡献</a:t>
             </a:r>
           </a:p>
         </p:txBody>
@@ -7056,29 +7587,29 @@
         </p:nvSpPr>
         <p:spPr>
           <a:xfrm>
-            <a:off x="822960" y="4800600"/>
-            <a:ext cx="201168" cy="256032"/>
-          </a:xfrm>
-          <a:prstGeom prst="rect">
-            <a:avLst/>
-          </a:prstGeom>
-          <a:noFill/>
-        </p:spPr>
-        <p:txBody>
-          <a:bodyPr wrap="square" anchor="ctr">
-            <a:spAutoFit/>
-          </a:bodyPr>
-          <a:lstStyle/>
-          <a:p>
-            <a:pPr algn="l"/>
-            <a:r>
-              <a:rPr sz="1700" b="1">
-                <a:solidFill>
-                  <a:srgbClr val="2478BE"/>
-                </a:solidFill>
-                <a:latin typeface="Noto Sans CJK SC"/>
-              </a:rPr>
-              <a:t>•</a:t>
+            <a:off x="658368" y="5715000"/>
+            <a:ext cx="10789920" cy="320040"/>
+          </a:xfrm>
+          <a:prstGeom prst="rect">
+            <a:avLst/>
+          </a:prstGeom>
+          <a:noFill/>
+        </p:spPr>
+        <p:txBody>
+          <a:bodyPr wrap="square" anchor="ctr">
+            <a:spAutoFit/>
+          </a:bodyPr>
+          <a:lstStyle/>
+          <a:p>
+            <a:pPr algn="l"/>
+            <a:r>
+              <a:rPr sz="1400" b="1">
+                <a:solidFill>
+                  <a:srgbClr val="112B46"/>
+                </a:solidFill>
+                <a:latin typeface="Noto Sans CJK SC"/>
+              </a:rPr>
+              <a:t>需要导出 OpenUSD、MJCF 或 URDF 做仿真时，欢迎试用：https://github.com/osrbot/solidworks_urdf_exporter_pro</a:t>
             </a:r>
           </a:p>
         </p:txBody>
@@ -7086,41 +7617,6 @@
       <p:sp>
         <p:nvSpPr>
           <p:cNvPr id="19" name="TextBox 18"/>
-          <p:cNvSpPr txBox="1"/>
-          <p:nvPr/>
-        </p:nvSpPr>
-        <p:spPr>
-          <a:xfrm>
-            <a:off x="1060704" y="4782312"/>
-            <a:ext cx="10186416" cy="411480"/>
-          </a:xfrm>
-          <a:prstGeom prst="rect">
-            <a:avLst/>
-          </a:prstGeom>
-          <a:noFill/>
-        </p:spPr>
-        <p:txBody>
-          <a:bodyPr wrap="square" anchor="ctr">
-            <a:spAutoFit/>
-          </a:bodyPr>
-          <a:lstStyle/>
-          <a:p>
-            <a:pPr algn="l"/>
-            <a:r>
-              <a:rPr sz="1400" b="0">
-                <a:solidFill>
-                  <a:srgbClr val="191E26"/>
-                </a:solidFill>
-                <a:latin typeface="Noto Sans CJK SC"/>
-              </a:rPr>
-              <a:t>不使用全局位置；录像、轨迹和独立审计必须相互对应。</a:t>
-            </a:r>
-          </a:p>
-        </p:txBody>
-      </p:sp>
-      <p:sp>
-        <p:nvSpPr>
-          <p:cNvPr id="20" name="TextBox 19"/>
           <p:cNvSpPr txBox="1"/>
           <p:nvPr/>
         </p:nvSpPr>
@@ -7209,7 +7705,7 @@
                 </a:solidFill>
                 <a:latin typeface="Noto Sans CJK SC"/>
               </a:rPr>
-              <a:t>EVALUATION</a:t>
+              <a:t>EXPERIMENT CONTRACT</a:t>
             </a:r>
           </a:p>
         </p:txBody>
@@ -7244,7 +7740,7 @@
                 </a:solidFill>
                 <a:latin typeface="Noto Sans CJK SC"/>
               </a:rPr>
-              <a:t>通过不是跑起来：必须同时满足 5 个可审计条件</a:t>
+              <a:t>我们用受限的主动观测，而不是全局定位来闭环竞速</a:t>
             </a:r>
           </a:p>
         </p:txBody>
@@ -7302,14 +7798,14 @@
         </p:nvSpPr>
         <p:spPr>
           <a:xfrm>
-            <a:off x="640080" y="1965960"/>
-            <a:ext cx="3337560" cy="1234440"/>
+            <a:off x="777240" y="1965960"/>
+            <a:ext cx="2788920" cy="1691640"/>
           </a:xfrm>
           <a:prstGeom prst="roundRect">
             <a:avLst/>
           </a:prstGeom>
           <a:solidFill>
-            <a:srgbClr val="FFFFFF"/>
+            <a:srgbClr val="EBF3F9"/>
           </a:solidFill>
           <a:ln>
             <a:solidFill>
@@ -7347,29 +7843,29 @@
         </p:nvSpPr>
         <p:spPr>
           <a:xfrm>
-            <a:off x="841247" y="2167128"/>
-            <a:ext cx="411480" cy="274320"/>
-          </a:xfrm>
-          <a:prstGeom prst="rect">
-            <a:avLst/>
-          </a:prstGeom>
-          <a:noFill/>
-        </p:spPr>
-        <p:txBody>
-          <a:bodyPr wrap="square" anchor="ctr">
-            <a:spAutoFit/>
-          </a:bodyPr>
-          <a:lstStyle/>
-          <a:p>
-            <a:pPr algn="l"/>
-            <a:r>
-              <a:rPr sz="1400" b="1">
-                <a:solidFill>
-                  <a:srgbClr val="2478BE"/>
-                </a:solidFill>
-                <a:latin typeface="Noto Sans CJK SC"/>
-              </a:rPr>
-              <a:t>01</a:t>
+            <a:off x="960120" y="2240280"/>
+            <a:ext cx="2423160" cy="292608"/>
+          </a:xfrm>
+          <a:prstGeom prst="rect">
+            <a:avLst/>
+          </a:prstGeom>
+          <a:noFill/>
+        </p:spPr>
+        <p:txBody>
+          <a:bodyPr wrap="square" anchor="ctr">
+            <a:spAutoFit/>
+          </a:bodyPr>
+          <a:lstStyle/>
+          <a:p>
+            <a:pPr algn="l"/>
+            <a:r>
+              <a:rPr sz="1900" b="1">
+                <a:solidFill>
+                  <a:srgbClr val="112B46"/>
+                </a:solidFill>
+                <a:latin typeface="Noto Sans CJK SC"/>
+              </a:rPr>
+              <a:t>15 Hz laser</a:t>
             </a:r>
           </a:p>
         </p:txBody>
@@ -7382,84 +7878,50 @@
         </p:nvSpPr>
         <p:spPr>
           <a:xfrm>
-            <a:off x="1353312" y="2130552"/>
-            <a:ext cx="2377440" cy="274320"/>
-          </a:xfrm>
-          <a:prstGeom prst="rect">
-            <a:avLst/>
-          </a:prstGeom>
-          <a:noFill/>
-        </p:spPr>
-        <p:txBody>
-          <a:bodyPr wrap="square" anchor="ctr">
-            <a:spAutoFit/>
-          </a:bodyPr>
-          <a:lstStyle/>
-          <a:p>
-            <a:pPr algn="l"/>
-            <a:r>
-              <a:rPr sz="1800" b="1">
+            <a:off x="960120" y="2651760"/>
+            <a:ext cx="2423160" cy="566928"/>
+          </a:xfrm>
+          <a:prstGeom prst="rect">
+            <a:avLst/>
+          </a:prstGeom>
+          <a:noFill/>
+        </p:spPr>
+        <p:txBody>
+          <a:bodyPr wrap="square" anchor="ctr">
+            <a:spAutoFit/>
+          </a:bodyPr>
+          <a:lstStyle/>
+          <a:p>
+            <a:pPr algn="ctr"/>
+            <a:r>
+              <a:rPr sz="1500" b="0">
                 <a:solidFill>
                   <a:srgbClr val="191E26"/>
                 </a:solidFill>
                 <a:latin typeface="Noto Sans CJK SC"/>
               </a:rPr>
-              <a:t>有效整圈</a:t>
-            </a:r>
-          </a:p>
-        </p:txBody>
-      </p:sp>
-      <p:sp>
-        <p:nvSpPr>
-          <p:cNvPr id="8" name="TextBox 7"/>
-          <p:cNvSpPr txBox="1"/>
-          <p:nvPr/>
-        </p:nvSpPr>
-        <p:spPr>
-          <a:xfrm>
-            <a:off x="868680" y="2587752"/>
-            <a:ext cx="2834640" cy="320040"/>
-          </a:xfrm>
-          <a:prstGeom prst="rect">
-            <a:avLst/>
-          </a:prstGeom>
-          <a:noFill/>
-        </p:spPr>
-        <p:txBody>
-          <a:bodyPr wrap="square" anchor="ctr">
-            <a:spAutoFit/>
-          </a:bodyPr>
-          <a:lstStyle/>
-          <a:p>
-            <a:pPr algn="l"/>
-            <a:r>
-              <a:rPr sz="1200" b="0">
-                <a:solidFill>
-                  <a:srgbClr val="5D6975"/>
-                </a:solidFill>
-                <a:latin typeface="Noto Sans CJK SC"/>
-              </a:rPr>
-              <a:t>完整回到终点且无判定失败</a:t>
-            </a:r>
-          </a:p>
-        </p:txBody>
-      </p:sp>
-      <p:sp>
-        <p:nvSpPr>
-          <p:cNvPr id="9" name="Rounded Rectangle 8"/>
+              <a:t>laser 坐标系
+270° / 361 束</a:t>
+            </a:r>
+          </a:p>
+        </p:txBody>
+      </p:sp>
+      <p:sp>
+        <p:nvSpPr>
+          <p:cNvPr id="8" name="Rounded Rectangle 7"/>
           <p:cNvSpPr/>
           <p:nvPr/>
         </p:nvSpPr>
         <p:spPr>
           <a:xfrm>
-            <a:off x="4389120" y="1965960"/>
-            <a:ext cx="3337560" cy="1234440"/>
+            <a:off x="4041648" y="1965960"/>
+            <a:ext cx="2788920" cy="1691640"/>
           </a:xfrm>
           <a:prstGeom prst="roundRect">
             <a:avLst/>
           </a:prstGeom>
           <a:solidFill>
-            <a:srgbClr val="FFFFFF"/>
+            <a:srgbClr val="EBF3F9"/>
           </a:solidFill>
           <a:ln>
             <a:solidFill>
@@ -7491,125 +7953,91 @@
       </p:sp>
       <p:sp>
         <p:nvSpPr>
+          <p:cNvPr id="9" name="TextBox 8"/>
+          <p:cNvSpPr txBox="1"/>
+          <p:nvPr/>
+        </p:nvSpPr>
+        <p:spPr>
+          <a:xfrm>
+            <a:off x="4224528" y="2240280"/>
+            <a:ext cx="2423160" cy="292608"/>
+          </a:xfrm>
+          <a:prstGeom prst="rect">
+            <a:avLst/>
+          </a:prstGeom>
+          <a:noFill/>
+        </p:spPr>
+        <p:txBody>
+          <a:bodyPr wrap="square" anchor="ctr">
+            <a:spAutoFit/>
+          </a:bodyPr>
+          <a:lstStyle/>
+          <a:p>
+            <a:pPr algn="l"/>
+            <a:r>
+              <a:rPr sz="1900" b="1">
+                <a:solidFill>
+                  <a:srgbClr val="112B46"/>
+                </a:solidFill>
+                <a:latin typeface="Noto Sans CJK SC"/>
+              </a:rPr>
+              <a:t>轮速 + 转角</a:t>
+            </a:r>
+          </a:p>
+        </p:txBody>
+      </p:sp>
+      <p:sp>
+        <p:nvSpPr>
           <p:cNvPr id="10" name="TextBox 9"/>
           <p:cNvSpPr txBox="1"/>
           <p:nvPr/>
         </p:nvSpPr>
         <p:spPr>
           <a:xfrm>
-            <a:off x="4590288" y="2167128"/>
-            <a:ext cx="411480" cy="274320"/>
-          </a:xfrm>
-          <a:prstGeom prst="rect">
-            <a:avLst/>
-          </a:prstGeom>
-          <a:noFill/>
-        </p:spPr>
-        <p:txBody>
-          <a:bodyPr wrap="square" anchor="ctr">
-            <a:spAutoFit/>
-          </a:bodyPr>
-          <a:lstStyle/>
-          <a:p>
-            <a:pPr algn="l"/>
-            <a:r>
-              <a:rPr sz="1400" b="1">
-                <a:solidFill>
-                  <a:srgbClr val="2478BE"/>
-                </a:solidFill>
-                <a:latin typeface="Noto Sans CJK SC"/>
-              </a:rPr>
-              <a:t>02</a:t>
-            </a:r>
-          </a:p>
-        </p:txBody>
-      </p:sp>
-      <p:sp>
-        <p:nvSpPr>
-          <p:cNvPr id="11" name="TextBox 10"/>
-          <p:cNvSpPr txBox="1"/>
-          <p:nvPr/>
-        </p:nvSpPr>
-        <p:spPr>
-          <a:xfrm>
-            <a:off x="5102352" y="2130552"/>
-            <a:ext cx="2377440" cy="274320"/>
-          </a:xfrm>
-          <a:prstGeom prst="rect">
-            <a:avLst/>
-          </a:prstGeom>
-          <a:noFill/>
-        </p:spPr>
-        <p:txBody>
-          <a:bodyPr wrap="square" anchor="ctr">
-            <a:spAutoFit/>
-          </a:bodyPr>
-          <a:lstStyle/>
-          <a:p>
-            <a:pPr algn="l"/>
-            <a:r>
-              <a:rPr sz="1800" b="1">
+            <a:off x="4224528" y="2651760"/>
+            <a:ext cx="2423160" cy="566928"/>
+          </a:xfrm>
+          <a:prstGeom prst="rect">
+            <a:avLst/>
+          </a:prstGeom>
+          <a:noFill/>
+        </p:spPr>
+        <p:txBody>
+          <a:bodyPr wrap="square" anchor="ctr">
+            <a:spAutoFit/>
+          </a:bodyPr>
+          <a:lstStyle/>
+          <a:p>
+            <a:pPr algn="ctr"/>
+            <a:r>
+              <a:rPr sz="1500" b="0">
                 <a:solidFill>
                   <a:srgbClr val="191E26"/>
                 </a:solidFill>
                 <a:latin typeface="Noto Sans CJK SC"/>
               </a:rPr>
-              <a:t>有效超车</a:t>
-            </a:r>
-          </a:p>
-        </p:txBody>
-      </p:sp>
-      <p:sp>
-        <p:nvSpPr>
-          <p:cNvPr id="12" name="TextBox 11"/>
-          <p:cNvSpPr txBox="1"/>
-          <p:nvPr/>
-        </p:nvSpPr>
-        <p:spPr>
-          <a:xfrm>
-            <a:off x="4617720" y="2587752"/>
-            <a:ext cx="2834640" cy="320040"/>
-          </a:xfrm>
-          <a:prstGeom prst="rect">
-            <a:avLst/>
-          </a:prstGeom>
-          <a:noFill/>
-        </p:spPr>
-        <p:txBody>
-          <a:bodyPr wrap="square" anchor="ctr">
-            <a:spAutoFit/>
-          </a:bodyPr>
-          <a:lstStyle/>
-          <a:p>
-            <a:pPr algn="l"/>
-            <a:r>
-              <a:rPr sz="1200" b="0">
-                <a:solidFill>
-                  <a:srgbClr val="5D6975"/>
-                </a:solidFill>
-                <a:latin typeface="Noto Sans CJK SC"/>
-              </a:rPr>
-              <a:t>完整超越，不把名次抖动算进去</a:t>
-            </a:r>
-          </a:p>
-        </p:txBody>
-      </p:sp>
-      <p:sp>
-        <p:nvSpPr>
-          <p:cNvPr id="13" name="Rounded Rectangle 12"/>
+              <a:t>驱动状态与 Ackermann
+转向几何</a:t>
+            </a:r>
+          </a:p>
+        </p:txBody>
+      </p:sp>
+      <p:sp>
+        <p:nvSpPr>
+          <p:cNvPr id="11" name="Rounded Rectangle 10"/>
           <p:cNvSpPr/>
           <p:nvPr/>
         </p:nvSpPr>
         <p:spPr>
           <a:xfrm>
-            <a:off x="8138159" y="1965960"/>
-            <a:ext cx="3337560" cy="1234440"/>
+            <a:off x="7315200" y="1965960"/>
+            <a:ext cx="2788920" cy="1691640"/>
           </a:xfrm>
           <a:prstGeom prst="roundRect">
             <a:avLst/>
           </a:prstGeom>
           <a:solidFill>
-            <a:srgbClr val="FFFFFF"/>
+            <a:srgbClr val="EBF3F9"/>
           </a:solidFill>
           <a:ln>
             <a:solidFill>
@@ -7641,35 +8069,106 @@
       </p:sp>
       <p:sp>
         <p:nvSpPr>
+          <p:cNvPr id="12" name="TextBox 11"/>
+          <p:cNvSpPr txBox="1"/>
+          <p:nvPr/>
+        </p:nvSpPr>
+        <p:spPr>
+          <a:xfrm>
+            <a:off x="7498079" y="2240280"/>
+            <a:ext cx="2423160" cy="292608"/>
+          </a:xfrm>
+          <a:prstGeom prst="rect">
+            <a:avLst/>
+          </a:prstGeom>
+          <a:noFill/>
+        </p:spPr>
+        <p:txBody>
+          <a:bodyPr wrap="square" anchor="ctr">
+            <a:spAutoFit/>
+          </a:bodyPr>
+          <a:lstStyle/>
+          <a:p>
+            <a:pPr algn="l"/>
+            <a:r>
+              <a:rPr sz="1900" b="1">
+                <a:solidFill>
+                  <a:srgbClr val="112B46"/>
+                </a:solidFill>
+                <a:latin typeface="Noto Sans CJK SC"/>
+              </a:rPr>
+              <a:t>策略 + 安全层</a:t>
+            </a:r>
+          </a:p>
+        </p:txBody>
+      </p:sp>
+      <p:sp>
+        <p:nvSpPr>
+          <p:cNvPr id="13" name="TextBox 12"/>
+          <p:cNvSpPr txBox="1"/>
+          <p:nvPr/>
+        </p:nvSpPr>
+        <p:spPr>
+          <a:xfrm>
+            <a:off x="7498079" y="2651760"/>
+            <a:ext cx="2423160" cy="566928"/>
+          </a:xfrm>
+          <a:prstGeom prst="rect">
+            <a:avLst/>
+          </a:prstGeom>
+          <a:noFill/>
+        </p:spPr>
+        <p:txBody>
+          <a:bodyPr wrap="square" anchor="ctr">
+            <a:spAutoFit/>
+          </a:bodyPr>
+          <a:lstStyle/>
+          <a:p>
+            <a:pPr algn="ctr"/>
+            <a:r>
+              <a:rPr sz="1500" b="0">
+                <a:solidFill>
+                  <a:srgbClr val="191E26"/>
+                </a:solidFill>
+                <a:latin typeface="Noto Sans CJK SC"/>
+              </a:rPr>
+              <a:t>预测、超车、漂移
+碰撞与出界许可</a:t>
+            </a:r>
+          </a:p>
+        </p:txBody>
+      </p:sp>
+      <p:sp>
+        <p:nvSpPr>
           <p:cNvPr id="14" name="TextBox 13"/>
           <p:cNvSpPr txBox="1"/>
           <p:nvPr/>
         </p:nvSpPr>
         <p:spPr>
           <a:xfrm>
-            <a:off x="8339327" y="2167128"/>
-            <a:ext cx="411480" cy="274320"/>
-          </a:xfrm>
-          <a:prstGeom prst="rect">
-            <a:avLst/>
-          </a:prstGeom>
-          <a:noFill/>
-        </p:spPr>
-        <p:txBody>
-          <a:bodyPr wrap="square" anchor="ctr">
-            <a:spAutoFit/>
-          </a:bodyPr>
-          <a:lstStyle/>
-          <a:p>
-            <a:pPr algn="l"/>
-            <a:r>
-              <a:rPr sz="1400" b="1">
+            <a:off x="3611880" y="2487168"/>
+            <a:ext cx="320040" cy="365760"/>
+          </a:xfrm>
+          <a:prstGeom prst="rect">
+            <a:avLst/>
+          </a:prstGeom>
+          <a:noFill/>
+        </p:spPr>
+        <p:txBody>
+          <a:bodyPr wrap="square" anchor="ctr">
+            <a:spAutoFit/>
+          </a:bodyPr>
+          <a:lstStyle/>
+          <a:p>
+            <a:pPr algn="ctr"/>
+            <a:r>
+              <a:rPr sz="2500" b="1">
                 <a:solidFill>
                   <a:srgbClr val="2478BE"/>
                 </a:solidFill>
                 <a:latin typeface="Noto Sans CJK SC"/>
               </a:rPr>
-              <a:t>03</a:t>
+              <a:t>→</a:t>
             </a:r>
           </a:p>
         </p:txBody>
@@ -7682,110 +8181,100 @@
         </p:nvSpPr>
         <p:spPr>
           <a:xfrm>
-            <a:off x="8851391" y="2130552"/>
-            <a:ext cx="2377440" cy="274320"/>
-          </a:xfrm>
-          <a:prstGeom prst="rect">
-            <a:avLst/>
-          </a:prstGeom>
-          <a:noFill/>
-        </p:spPr>
-        <p:txBody>
-          <a:bodyPr wrap="square" anchor="ctr">
-            <a:spAutoFit/>
-          </a:bodyPr>
-          <a:lstStyle/>
-          <a:p>
-            <a:pPr algn="l"/>
-            <a:r>
-              <a:rPr sz="1800" b="1">
+            <a:off x="6876288" y="2487168"/>
+            <a:ext cx="320040" cy="365760"/>
+          </a:xfrm>
+          <a:prstGeom prst="rect">
+            <a:avLst/>
+          </a:prstGeom>
+          <a:noFill/>
+        </p:spPr>
+        <p:txBody>
+          <a:bodyPr wrap="square" anchor="ctr">
+            <a:spAutoFit/>
+          </a:bodyPr>
+          <a:lstStyle/>
+          <a:p>
+            <a:pPr algn="ctr"/>
+            <a:r>
+              <a:rPr sz="2500" b="1">
+                <a:solidFill>
+                  <a:srgbClr val="2478BE"/>
+                </a:solidFill>
+                <a:latin typeface="Noto Sans CJK SC"/>
+              </a:rPr>
+              <a:t>→</a:t>
+            </a:r>
+          </a:p>
+        </p:txBody>
+      </p:sp>
+      <p:sp>
+        <p:nvSpPr>
+          <p:cNvPr id="16" name="TextBox 15"/>
+          <p:cNvSpPr txBox="1"/>
+          <p:nvPr/>
+        </p:nvSpPr>
+        <p:spPr>
+          <a:xfrm>
+            <a:off x="822960" y="4251960"/>
+            <a:ext cx="201168" cy="256032"/>
+          </a:xfrm>
+          <a:prstGeom prst="rect">
+            <a:avLst/>
+          </a:prstGeom>
+          <a:noFill/>
+        </p:spPr>
+        <p:txBody>
+          <a:bodyPr wrap="square" anchor="ctr">
+            <a:spAutoFit/>
+          </a:bodyPr>
+          <a:lstStyle/>
+          <a:p>
+            <a:pPr algn="l"/>
+            <a:r>
+              <a:rPr sz="1700" b="1">
+                <a:solidFill>
+                  <a:srgbClr val="2478BE"/>
+                </a:solidFill>
+                <a:latin typeface="Noto Sans CJK SC"/>
+              </a:rPr>
+              <a:t>•</a:t>
+            </a:r>
+          </a:p>
+        </p:txBody>
+      </p:sp>
+      <p:sp>
+        <p:nvSpPr>
+          <p:cNvPr id="17" name="TextBox 16"/>
+          <p:cNvSpPr txBox="1"/>
+          <p:nvPr/>
+        </p:nvSpPr>
+        <p:spPr>
+          <a:xfrm>
+            <a:off x="1060704" y="4233672"/>
+            <a:ext cx="10186416" cy="411480"/>
+          </a:xfrm>
+          <a:prstGeom prst="rect">
+            <a:avLst/>
+          </a:prstGeom>
+          <a:noFill/>
+        </p:spPr>
+        <p:txBody>
+          <a:bodyPr wrap="square" anchor="ctr">
+            <a:spAutoFit/>
+          </a:bodyPr>
+          <a:lstStyle/>
+          <a:p>
+            <a:pPr algn="l"/>
+            <a:r>
+              <a:rPr sz="1400" b="0">
                 <a:solidFill>
                   <a:srgbClr val="191E26"/>
                 </a:solidFill>
                 <a:latin typeface="Noto Sans CJK SC"/>
               </a:rPr>
-              <a:t>连续漂移</a:t>
-            </a:r>
-          </a:p>
-        </p:txBody>
-      </p:sp>
-      <p:sp>
-        <p:nvSpPr>
-          <p:cNvPr id="16" name="TextBox 15"/>
-          <p:cNvSpPr txBox="1"/>
-          <p:nvPr/>
-        </p:nvSpPr>
-        <p:spPr>
-          <a:xfrm>
-            <a:off x="8366759" y="2587752"/>
-            <a:ext cx="2834640" cy="320040"/>
-          </a:xfrm>
-          <a:prstGeom prst="rect">
-            <a:avLst/>
-          </a:prstGeom>
-          <a:noFill/>
-        </p:spPr>
-        <p:txBody>
-          <a:bodyPr wrap="square" anchor="ctr">
-            <a:spAutoFit/>
-          </a:bodyPr>
-          <a:lstStyle/>
-          <a:p>
-            <a:pPr algn="l"/>
-            <a:r>
-              <a:rPr sz="1200" b="0">
-                <a:solidFill>
-                  <a:srgbClr val="5D6975"/>
-                </a:solidFill>
-                <a:latin typeface="Noto Sans CJK SC"/>
-              </a:rPr>
-              <a:t>侧滑角与持续时间达标</a:t>
-            </a:r>
-          </a:p>
-        </p:txBody>
-      </p:sp>
-      <p:sp>
-        <p:nvSpPr>
-          <p:cNvPr id="17" name="Rounded Rectangle 16"/>
-          <p:cNvSpPr/>
-          <p:nvPr/>
-        </p:nvSpPr>
-        <p:spPr>
-          <a:xfrm>
-            <a:off x="640080" y="3566160"/>
-            <a:ext cx="3337560" cy="1234440"/>
-          </a:xfrm>
-          <a:prstGeom prst="roundRect">
-            <a:avLst/>
-          </a:prstGeom>
-          <a:solidFill>
-            <a:srgbClr val="FFFFFF"/>
-          </a:solidFill>
-          <a:ln>
-            <a:solidFill>
-              <a:srgbClr val="2478BE"/>
-            </a:solidFill>
-          </a:ln>
-        </p:spPr>
-        <p:style>
-          <a:lnRef idx="1">
-            <a:schemeClr val="accent1"/>
-          </a:lnRef>
-          <a:fillRef idx="3">
-            <a:schemeClr val="accent1"/>
-          </a:fillRef>
-          <a:effectRef idx="2">
-            <a:schemeClr val="accent1"/>
-          </a:effectRef>
-          <a:fontRef idx="minor">
-            <a:schemeClr val="lt1"/>
-          </a:fontRef>
-        </p:style>
-        <p:txBody>
-          <a:bodyPr rtlCol="0" anchor="ctr"/>
-          <a:lstStyle/>
-          <a:p>
-            <a:pPr algn="ctr"/>
+              <a:t>双车闭环：有效整圈、完整超越、碰撞、出界、连续侧滑均进入同一验证口径。</a:t>
+            </a:r>
           </a:p>
         </p:txBody>
       </p:sp>
@@ -7797,29 +8286,29 @@
         </p:nvSpPr>
         <p:spPr>
           <a:xfrm>
-            <a:off x="841247" y="3767328"/>
-            <a:ext cx="411480" cy="274320"/>
-          </a:xfrm>
-          <a:prstGeom prst="rect">
-            <a:avLst/>
-          </a:prstGeom>
-          <a:noFill/>
-        </p:spPr>
-        <p:txBody>
-          <a:bodyPr wrap="square" anchor="ctr">
-            <a:spAutoFit/>
-          </a:bodyPr>
-          <a:lstStyle/>
-          <a:p>
-            <a:pPr algn="l"/>
-            <a:r>
-              <a:rPr sz="1400" b="1">
+            <a:off x="822960" y="4800600"/>
+            <a:ext cx="201168" cy="256032"/>
+          </a:xfrm>
+          <a:prstGeom prst="rect">
+            <a:avLst/>
+          </a:prstGeom>
+          <a:noFill/>
+        </p:spPr>
+        <p:txBody>
+          <a:bodyPr wrap="square" anchor="ctr">
+            <a:spAutoFit/>
+          </a:bodyPr>
+          <a:lstStyle/>
+          <a:p>
+            <a:pPr algn="l"/>
+            <a:r>
+              <a:rPr sz="1700" b="1">
                 <a:solidFill>
                   <a:srgbClr val="2478BE"/>
                 </a:solidFill>
                 <a:latin typeface="Noto Sans CJK SC"/>
               </a:rPr>
-              <a:t>04</a:t>
+              <a:t>•</a:t>
             </a:r>
           </a:p>
         </p:txBody>
@@ -7832,29 +8321,29 @@
         </p:nvSpPr>
         <p:spPr>
           <a:xfrm>
-            <a:off x="1353312" y="3730752"/>
-            <a:ext cx="2377440" cy="274320"/>
-          </a:xfrm>
-          <a:prstGeom prst="rect">
-            <a:avLst/>
-          </a:prstGeom>
-          <a:noFill/>
-        </p:spPr>
-        <p:txBody>
-          <a:bodyPr wrap="square" anchor="ctr">
-            <a:spAutoFit/>
-          </a:bodyPr>
-          <a:lstStyle/>
-          <a:p>
-            <a:pPr algn="l"/>
-            <a:r>
-              <a:rPr sz="1800" b="1">
+            <a:off x="1060704" y="4782312"/>
+            <a:ext cx="10186416" cy="411480"/>
+          </a:xfrm>
+          <a:prstGeom prst="rect">
+            <a:avLst/>
+          </a:prstGeom>
+          <a:noFill/>
+        </p:spPr>
+        <p:txBody>
+          <a:bodyPr wrap="square" anchor="ctr">
+            <a:spAutoFit/>
+          </a:bodyPr>
+          <a:lstStyle/>
+          <a:p>
+            <a:pPr algn="l"/>
+            <a:r>
+              <a:rPr sz="1400" b="0">
                 <a:solidFill>
                   <a:srgbClr val="191E26"/>
                 </a:solidFill>
                 <a:latin typeface="Noto Sans CJK SC"/>
               </a:rPr>
-              <a:t>轨迹审计</a:t>
+              <a:t>不使用全局位置；录像、轨迹和独立审计必须相互对应。</a:t>
             </a:r>
           </a:p>
         </p:txBody>
@@ -7862,226 +8351,6 @@
       <p:sp>
         <p:nvSpPr>
           <p:cNvPr id="20" name="TextBox 19"/>
-          <p:cNvSpPr txBox="1"/>
-          <p:nvPr/>
-        </p:nvSpPr>
-        <p:spPr>
-          <a:xfrm>
-            <a:off x="868680" y="4187952"/>
-            <a:ext cx="2834640" cy="320040"/>
-          </a:xfrm>
-          <a:prstGeom prst="rect">
-            <a:avLst/>
-          </a:prstGeom>
-          <a:noFill/>
-        </p:spPr>
-        <p:txBody>
-          <a:bodyPr wrap="square" anchor="ctr">
-            <a:spAutoFit/>
-          </a:bodyPr>
-          <a:lstStyle/>
-          <a:p>
-            <a:pPr algn="l"/>
-            <a:r>
-              <a:rPr sz="1200" b="0">
-                <a:solidFill>
-                  <a:srgbClr val="5D6975"/>
-                </a:solidFill>
-                <a:latin typeface="Noto Sans CJK SC"/>
-              </a:rPr>
-              <a:t>独立校验每回合状态与统计</a:t>
-            </a:r>
-          </a:p>
-        </p:txBody>
-      </p:sp>
-      <p:sp>
-        <p:nvSpPr>
-          <p:cNvPr id="21" name="Rounded Rectangle 20"/>
-          <p:cNvSpPr/>
-          <p:nvPr/>
-        </p:nvSpPr>
-        <p:spPr>
-          <a:xfrm>
-            <a:off x="4389120" y="3566160"/>
-            <a:ext cx="3337560" cy="1234440"/>
-          </a:xfrm>
-          <a:prstGeom prst="roundRect">
-            <a:avLst/>
-          </a:prstGeom>
-          <a:solidFill>
-            <a:srgbClr val="FFFFFF"/>
-          </a:solidFill>
-          <a:ln>
-            <a:solidFill>
-              <a:srgbClr val="2478BE"/>
-            </a:solidFill>
-          </a:ln>
-        </p:spPr>
-        <p:style>
-          <a:lnRef idx="1">
-            <a:schemeClr val="accent1"/>
-          </a:lnRef>
-          <a:fillRef idx="3">
-            <a:schemeClr val="accent1"/>
-          </a:fillRef>
-          <a:effectRef idx="2">
-            <a:schemeClr val="accent1"/>
-          </a:effectRef>
-          <a:fontRef idx="minor">
-            <a:schemeClr val="lt1"/>
-          </a:fontRef>
-        </p:style>
-        <p:txBody>
-          <a:bodyPr rtlCol="0" anchor="ctr"/>
-          <a:lstStyle/>
-          <a:p>
-            <a:pPr algn="ctr"/>
-          </a:p>
-        </p:txBody>
-      </p:sp>
-      <p:sp>
-        <p:nvSpPr>
-          <p:cNvPr id="22" name="TextBox 21"/>
-          <p:cNvSpPr txBox="1"/>
-          <p:nvPr/>
-        </p:nvSpPr>
-        <p:spPr>
-          <a:xfrm>
-            <a:off x="4590288" y="3767328"/>
-            <a:ext cx="411480" cy="274320"/>
-          </a:xfrm>
-          <a:prstGeom prst="rect">
-            <a:avLst/>
-          </a:prstGeom>
-          <a:noFill/>
-        </p:spPr>
-        <p:txBody>
-          <a:bodyPr wrap="square" anchor="ctr">
-            <a:spAutoFit/>
-          </a:bodyPr>
-          <a:lstStyle/>
-          <a:p>
-            <a:pPr algn="l"/>
-            <a:r>
-              <a:rPr sz="1400" b="1">
-                <a:solidFill>
-                  <a:srgbClr val="2478BE"/>
-                </a:solidFill>
-                <a:latin typeface="Noto Sans CJK SC"/>
-              </a:rPr>
-              <a:t>05</a:t>
-            </a:r>
-          </a:p>
-        </p:txBody>
-      </p:sp>
-      <p:sp>
-        <p:nvSpPr>
-          <p:cNvPr id="23" name="TextBox 22"/>
-          <p:cNvSpPr txBox="1"/>
-          <p:nvPr/>
-        </p:nvSpPr>
-        <p:spPr>
-          <a:xfrm>
-            <a:off x="5102352" y="3730752"/>
-            <a:ext cx="2377440" cy="274320"/>
-          </a:xfrm>
-          <a:prstGeom prst="rect">
-            <a:avLst/>
-          </a:prstGeom>
-          <a:noFill/>
-        </p:spPr>
-        <p:txBody>
-          <a:bodyPr wrap="square" anchor="ctr">
-            <a:spAutoFit/>
-          </a:bodyPr>
-          <a:lstStyle/>
-          <a:p>
-            <a:pPr algn="l"/>
-            <a:r>
-              <a:rPr sz="1800" b="1">
-                <a:solidFill>
-                  <a:srgbClr val="191E26"/>
-                </a:solidFill>
-                <a:latin typeface="Noto Sans CJK SC"/>
-              </a:rPr>
-              <a:t>原生录像</a:t>
-            </a:r>
-          </a:p>
-        </p:txBody>
-      </p:sp>
-      <p:sp>
-        <p:nvSpPr>
-          <p:cNvPr id="24" name="TextBox 23"/>
-          <p:cNvSpPr txBox="1"/>
-          <p:nvPr/>
-        </p:nvSpPr>
-        <p:spPr>
-          <a:xfrm>
-            <a:off x="4617720" y="4187952"/>
-            <a:ext cx="2834640" cy="320040"/>
-          </a:xfrm>
-          <a:prstGeom prst="rect">
-            <a:avLst/>
-          </a:prstGeom>
-          <a:noFill/>
-        </p:spPr>
-        <p:txBody>
-          <a:bodyPr wrap="square" anchor="ctr">
-            <a:spAutoFit/>
-          </a:bodyPr>
-          <a:lstStyle/>
-          <a:p>
-            <a:pPr algn="l"/>
-            <a:r>
-              <a:rPr sz="1200" b="0">
-                <a:solidFill>
-                  <a:srgbClr val="5D6975"/>
-                </a:solidFill>
-                <a:latin typeface="Noto Sans CJK SC"/>
-              </a:rPr>
-              <a:t>同一标签下可解码、可回放</a:t>
-            </a:r>
-          </a:p>
-        </p:txBody>
-      </p:sp>
-      <p:sp>
-        <p:nvSpPr>
-          <p:cNvPr id="25" name="TextBox 24"/>
-          <p:cNvSpPr txBox="1"/>
-          <p:nvPr/>
-        </p:nvSpPr>
-        <p:spPr>
-          <a:xfrm>
-            <a:off x="640080" y="5532120"/>
-            <a:ext cx="10332720" cy="320040"/>
-          </a:xfrm>
-          <a:prstGeom prst="rect">
-            <a:avLst/>
-          </a:prstGeom>
-          <a:noFill/>
-        </p:spPr>
-        <p:txBody>
-          <a:bodyPr wrap="square" anchor="ctr">
-            <a:spAutoFit/>
-          </a:bodyPr>
-          <a:lstStyle/>
-          <a:p>
-            <a:pPr algn="l"/>
-            <a:r>
-              <a:rPr sz="1800" b="1">
-                <a:solidFill>
-                  <a:srgbClr val="BE343A"/>
-                </a:solidFill>
-                <a:latin typeface="Noto Sans CJK SC"/>
-              </a:rPr>
-              <a:t>“加载模型”“单个成功视频”或“测试通过”都不能替代整圈资格。</a:t>
-            </a:r>
-          </a:p>
-        </p:txBody>
-      </p:sp>
-      <p:sp>
-        <p:nvSpPr>
-          <p:cNvPr id="26" name="TextBox 25"/>
           <p:cNvSpPr txBox="1"/>
           <p:nvPr/>
         </p:nvSpPr>
@@ -8170,7 +8439,7 @@
                 </a:solidFill>
                 <a:latin typeface="Noto Sans CJK SC"/>
               </a:rPr>
-              <a:t>RACING RESULTS</a:t>
+              <a:t>EVALUATION</a:t>
             </a:r>
           </a:p>
         </p:txBody>
@@ -8205,7 +8474,7 @@
                 </a:solidFill>
                 <a:latin typeface="Noto Sans CJK SC"/>
               </a:rPr>
-              <a:t>冻结 v10c：MuJoCo 24/24，Isaac 22/24；差异被保留</a:t>
+              <a:t>通过不是跑起来：必须同时满足 5 个可审计条件</a:t>
             </a:r>
           </a:p>
         </p:txBody>
@@ -8257,260 +8526,20 @@
       </p:sp>
       <p:sp>
         <p:nvSpPr>
-          <p:cNvPr id="5" name="TextBox 4"/>
-          <p:cNvSpPr txBox="1"/>
-          <p:nvPr/>
-        </p:nvSpPr>
-        <p:spPr>
-          <a:xfrm>
-            <a:off x="777240" y="2148840"/>
-            <a:ext cx="2194560" cy="274320"/>
-          </a:xfrm>
-          <a:prstGeom prst="rect">
-            <a:avLst/>
-          </a:prstGeom>
-          <a:noFill/>
-        </p:spPr>
-        <p:txBody>
-          <a:bodyPr wrap="square" anchor="ctr">
-            <a:spAutoFit/>
-          </a:bodyPr>
-          <a:lstStyle/>
-          <a:p>
-            <a:pPr algn="l"/>
-            <a:r>
-              <a:rPr sz="1300" b="1">
-                <a:solidFill>
-                  <a:srgbClr val="191E26"/>
-                </a:solidFill>
-                <a:latin typeface="Noto Sans CJK SC"/>
-              </a:rPr>
-              <a:t>MuJoCo · 7.25 m/s · 24 赛道</a:t>
-            </a:r>
-          </a:p>
-        </p:txBody>
-      </p:sp>
-      <p:sp>
-        <p:nvSpPr>
-          <p:cNvPr id="6" name="Rectangle 5"/>
+          <p:cNvPr id="5" name="Rounded Rectangle 4"/>
           <p:cNvSpPr/>
           <p:nvPr/>
         </p:nvSpPr>
         <p:spPr>
           <a:xfrm>
-            <a:off x="3017520" y="2167128"/>
-            <a:ext cx="5029200" cy="201168"/>
-          </a:xfrm>
-          <a:prstGeom prst="rect">
+            <a:off x="640080" y="1965960"/>
+            <a:ext cx="3337560" cy="1234440"/>
+          </a:xfrm>
+          <a:prstGeom prst="roundRect">
             <a:avLst/>
           </a:prstGeom>
           <a:solidFill>
-            <a:srgbClr val="E2E7EC"/>
-          </a:solidFill>
-          <a:ln>
-            <a:solidFill>
-              <a:srgbClr val="E2E7EC"/>
-            </a:solidFill>
-          </a:ln>
-        </p:spPr>
-        <p:style>
-          <a:lnRef idx="1">
-            <a:schemeClr val="accent1"/>
-          </a:lnRef>
-          <a:fillRef idx="3">
-            <a:schemeClr val="accent1"/>
-          </a:fillRef>
-          <a:effectRef idx="2">
-            <a:schemeClr val="accent1"/>
-          </a:effectRef>
-          <a:fontRef idx="minor">
-            <a:schemeClr val="lt1"/>
-          </a:fontRef>
-        </p:style>
-        <p:txBody>
-          <a:bodyPr rtlCol="0" anchor="ctr"/>
-          <a:lstStyle/>
-          <a:p>
-            <a:pPr algn="ctr"/>
-          </a:p>
-        </p:txBody>
-      </p:sp>
-      <p:sp>
-        <p:nvSpPr>
-          <p:cNvPr id="7" name="Rectangle 6"/>
-          <p:cNvSpPr/>
-          <p:nvPr/>
-        </p:nvSpPr>
-        <p:spPr>
-          <a:xfrm>
-            <a:off x="3017520" y="2167128"/>
-            <a:ext cx="5029200" cy="201168"/>
-          </a:xfrm>
-          <a:prstGeom prst="rect">
-            <a:avLst/>
-          </a:prstGeom>
-          <a:solidFill>
-            <a:srgbClr val="00998E"/>
-          </a:solidFill>
-          <a:ln>
-            <a:solidFill>
-              <a:srgbClr val="00998E"/>
-            </a:solidFill>
-          </a:ln>
-        </p:spPr>
-        <p:style>
-          <a:lnRef idx="1">
-            <a:schemeClr val="accent1"/>
-          </a:lnRef>
-          <a:fillRef idx="3">
-            <a:schemeClr val="accent1"/>
-          </a:fillRef>
-          <a:effectRef idx="2">
-            <a:schemeClr val="accent1"/>
-          </a:effectRef>
-          <a:fontRef idx="minor">
-            <a:schemeClr val="lt1"/>
-          </a:fontRef>
-        </p:style>
-        <p:txBody>
-          <a:bodyPr rtlCol="0" anchor="ctr"/>
-          <a:lstStyle/>
-          <a:p>
-            <a:pPr algn="ctr"/>
-          </a:p>
-        </p:txBody>
-      </p:sp>
-      <p:sp>
-        <p:nvSpPr>
-          <p:cNvPr id="8" name="TextBox 7"/>
-          <p:cNvSpPr txBox="1"/>
-          <p:nvPr/>
-        </p:nvSpPr>
-        <p:spPr>
-          <a:xfrm>
-            <a:off x="8183879" y="2121408"/>
-            <a:ext cx="731520" cy="274320"/>
-          </a:xfrm>
-          <a:prstGeom prst="rect">
-            <a:avLst/>
-          </a:prstGeom>
-          <a:noFill/>
-        </p:spPr>
-        <p:txBody>
-          <a:bodyPr wrap="square" anchor="ctr">
-            <a:spAutoFit/>
-          </a:bodyPr>
-          <a:lstStyle/>
-          <a:p>
-            <a:pPr algn="r"/>
-            <a:r>
-              <a:rPr sz="1400" b="1">
-                <a:solidFill>
-                  <a:srgbClr val="00998E"/>
-                </a:solidFill>
-                <a:latin typeface="Noto Sans CJK SC"/>
-              </a:rPr>
-              <a:t>24/24</a:t>
-            </a:r>
-          </a:p>
-        </p:txBody>
-      </p:sp>
-      <p:sp>
-        <p:nvSpPr>
-          <p:cNvPr id="9" name="TextBox 8"/>
-          <p:cNvSpPr txBox="1"/>
-          <p:nvPr/>
-        </p:nvSpPr>
-        <p:spPr>
-          <a:xfrm>
-            <a:off x="777240" y="2834640"/>
-            <a:ext cx="2194560" cy="274320"/>
-          </a:xfrm>
-          <a:prstGeom prst="rect">
-            <a:avLst/>
-          </a:prstGeom>
-          <a:noFill/>
-        </p:spPr>
-        <p:txBody>
-          <a:bodyPr wrap="square" anchor="ctr">
-            <a:spAutoFit/>
-          </a:bodyPr>
-          <a:lstStyle/>
-          <a:p>
-            <a:pPr algn="l"/>
-            <a:r>
-              <a:rPr sz="1300" b="1">
-                <a:solidFill>
-                  <a:srgbClr val="191E26"/>
-                </a:solidFill>
-                <a:latin typeface="Noto Sans CJK SC"/>
-              </a:rPr>
-              <a:t>Isaac · 7.25 m/s · 24 赛道</a:t>
-            </a:r>
-          </a:p>
-        </p:txBody>
-      </p:sp>
-      <p:sp>
-        <p:nvSpPr>
-          <p:cNvPr id="10" name="Rectangle 9"/>
-          <p:cNvSpPr/>
-          <p:nvPr/>
-        </p:nvSpPr>
-        <p:spPr>
-          <a:xfrm>
-            <a:off x="3017520" y="2852928"/>
-            <a:ext cx="5029200" cy="201168"/>
-          </a:xfrm>
-          <a:prstGeom prst="rect">
-            <a:avLst/>
-          </a:prstGeom>
-          <a:solidFill>
-            <a:srgbClr val="E2E7EC"/>
-          </a:solidFill>
-          <a:ln>
-            <a:solidFill>
-              <a:srgbClr val="E2E7EC"/>
-            </a:solidFill>
-          </a:ln>
-        </p:spPr>
-        <p:style>
-          <a:lnRef idx="1">
-            <a:schemeClr val="accent1"/>
-          </a:lnRef>
-          <a:fillRef idx="3">
-            <a:schemeClr val="accent1"/>
-          </a:fillRef>
-          <a:effectRef idx="2">
-            <a:schemeClr val="accent1"/>
-          </a:effectRef>
-          <a:fontRef idx="minor">
-            <a:schemeClr val="lt1"/>
-          </a:fontRef>
-        </p:style>
-        <p:txBody>
-          <a:bodyPr rtlCol="0" anchor="ctr"/>
-          <a:lstStyle/>
-          <a:p>
-            <a:pPr algn="ctr"/>
-          </a:p>
-        </p:txBody>
-      </p:sp>
-      <p:sp>
-        <p:nvSpPr>
-          <p:cNvPr id="11" name="Rectangle 10"/>
-          <p:cNvSpPr/>
-          <p:nvPr/>
-        </p:nvSpPr>
-        <p:spPr>
-          <a:xfrm>
-            <a:off x="3017520" y="2852928"/>
-            <a:ext cx="4610100" cy="201168"/>
-          </a:xfrm>
-          <a:prstGeom prst="rect">
-            <a:avLst/>
-          </a:prstGeom>
-          <a:solidFill>
-            <a:srgbClr val="2478BE"/>
+            <a:srgbClr val="FFFFFF"/>
           </a:solidFill>
           <a:ln>
             <a:solidFill>
@@ -8542,27 +8571,27 @@
       </p:sp>
       <p:sp>
         <p:nvSpPr>
-          <p:cNvPr id="12" name="TextBox 11"/>
-          <p:cNvSpPr txBox="1"/>
-          <p:nvPr/>
-        </p:nvSpPr>
-        <p:spPr>
-          <a:xfrm>
-            <a:off x="8183879" y="2807208"/>
-            <a:ext cx="731520" cy="274320"/>
-          </a:xfrm>
-          <a:prstGeom prst="rect">
-            <a:avLst/>
-          </a:prstGeom>
-          <a:noFill/>
-        </p:spPr>
-        <p:txBody>
-          <a:bodyPr wrap="square" anchor="ctr">
-            <a:spAutoFit/>
-          </a:bodyPr>
-          <a:lstStyle/>
-          <a:p>
-            <a:pPr algn="r"/>
+          <p:cNvPr id="6" name="TextBox 5"/>
+          <p:cNvSpPr txBox="1"/>
+          <p:nvPr/>
+        </p:nvSpPr>
+        <p:spPr>
+          <a:xfrm>
+            <a:off x="841247" y="2167128"/>
+            <a:ext cx="411480" cy="274320"/>
+          </a:xfrm>
+          <a:prstGeom prst="rect">
+            <a:avLst/>
+          </a:prstGeom>
+          <a:noFill/>
+        </p:spPr>
+        <p:txBody>
+          <a:bodyPr wrap="square" anchor="ctr">
+            <a:spAutoFit/>
+          </a:bodyPr>
+          <a:lstStyle/>
+          <a:p>
+            <a:pPr algn="l"/>
             <a:r>
               <a:rPr sz="1400" b="1">
                 <a:solidFill>
@@ -8570,241 +8599,101 @@
                 </a:solidFill>
                 <a:latin typeface="Noto Sans CJK SC"/>
               </a:rPr>
-              <a:t>22/24</a:t>
-            </a:r>
-          </a:p>
-        </p:txBody>
-      </p:sp>
-      <p:sp>
-        <p:nvSpPr>
-          <p:cNvPr id="13" name="TextBox 12"/>
-          <p:cNvSpPr txBox="1"/>
-          <p:nvPr/>
-        </p:nvSpPr>
-        <p:spPr>
-          <a:xfrm>
-            <a:off x="822960" y="3794760"/>
-            <a:ext cx="2194560" cy="502920"/>
-          </a:xfrm>
-          <a:prstGeom prst="rect">
-            <a:avLst/>
-          </a:prstGeom>
-          <a:noFill/>
-        </p:spPr>
-        <p:txBody>
-          <a:bodyPr wrap="square" anchor="ctr">
-            <a:spAutoFit/>
-          </a:bodyPr>
-          <a:lstStyle/>
-          <a:p>
-            <a:pPr algn="l"/>
-            <a:r>
-              <a:rPr sz="3300" b="1">
-                <a:solidFill>
-                  <a:srgbClr val="2478BE"/>
-                </a:solidFill>
-                <a:latin typeface="Noto Sans CJK SC"/>
-              </a:rPr>
-              <a:t>174</a:t>
-            </a:r>
-          </a:p>
-        </p:txBody>
-      </p:sp>
-      <p:sp>
-        <p:nvSpPr>
-          <p:cNvPr id="14" name="TextBox 13"/>
-          <p:cNvSpPr txBox="1"/>
-          <p:nvPr/>
-        </p:nvSpPr>
-        <p:spPr>
-          <a:xfrm>
-            <a:off x="822960" y="4325112"/>
-            <a:ext cx="2286000" cy="301752"/>
-          </a:xfrm>
-          <a:prstGeom prst="rect">
-            <a:avLst/>
-          </a:prstGeom>
-          <a:noFill/>
-        </p:spPr>
-        <p:txBody>
-          <a:bodyPr wrap="square" anchor="ctr">
-            <a:spAutoFit/>
-          </a:bodyPr>
-          <a:lstStyle/>
-          <a:p>
-            <a:pPr algn="l"/>
-            <a:r>
-              <a:rPr sz="1100" b="0">
+              <a:t>01</a:t>
+            </a:r>
+          </a:p>
+        </p:txBody>
+      </p:sp>
+      <p:sp>
+        <p:nvSpPr>
+          <p:cNvPr id="7" name="TextBox 6"/>
+          <p:cNvSpPr txBox="1"/>
+          <p:nvPr/>
+        </p:nvSpPr>
+        <p:spPr>
+          <a:xfrm>
+            <a:off x="1353312" y="2130552"/>
+            <a:ext cx="2377440" cy="274320"/>
+          </a:xfrm>
+          <a:prstGeom prst="rect">
+            <a:avLst/>
+          </a:prstGeom>
+          <a:noFill/>
+        </p:spPr>
+        <p:txBody>
+          <a:bodyPr wrap="square" anchor="ctr">
+            <a:spAutoFit/>
+          </a:bodyPr>
+          <a:lstStyle/>
+          <a:p>
+            <a:pPr algn="l"/>
+            <a:r>
+              <a:rPr sz="1800" b="1">
+                <a:solidFill>
+                  <a:srgbClr val="191E26"/>
+                </a:solidFill>
+                <a:latin typeface="Noto Sans CJK SC"/>
+              </a:rPr>
+              <a:t>有效整圈</a:t>
+            </a:r>
+          </a:p>
+        </p:txBody>
+      </p:sp>
+      <p:sp>
+        <p:nvSpPr>
+          <p:cNvPr id="8" name="TextBox 7"/>
+          <p:cNvSpPr txBox="1"/>
+          <p:nvPr/>
+        </p:nvSpPr>
+        <p:spPr>
+          <a:xfrm>
+            <a:off x="868680" y="2587752"/>
+            <a:ext cx="2834640" cy="320040"/>
+          </a:xfrm>
+          <a:prstGeom prst="rect">
+            <a:avLst/>
+          </a:prstGeom>
+          <a:noFill/>
+        </p:spPr>
+        <p:txBody>
+          <a:bodyPr wrap="square" anchor="ctr">
+            <a:spAutoFit/>
+          </a:bodyPr>
+          <a:lstStyle/>
+          <a:p>
+            <a:pPr algn="l"/>
+            <a:r>
+              <a:rPr sz="1200" b="0">
                 <a:solidFill>
                   <a:srgbClr val="5D6975"/>
                 </a:solidFill>
                 <a:latin typeface="Noto Sans CJK SC"/>
               </a:rPr>
-              <a:t>已审计回合</a:t>
-            </a:r>
-          </a:p>
-        </p:txBody>
-      </p:sp>
-      <p:sp>
-        <p:nvSpPr>
-          <p:cNvPr id="15" name="TextBox 14"/>
-          <p:cNvSpPr txBox="1"/>
-          <p:nvPr/>
-        </p:nvSpPr>
-        <p:spPr>
-          <a:xfrm>
-            <a:off x="3429000" y="3794760"/>
-            <a:ext cx="2194560" cy="502920"/>
-          </a:xfrm>
-          <a:prstGeom prst="rect">
-            <a:avLst/>
-          </a:prstGeom>
-          <a:noFill/>
-        </p:spPr>
-        <p:txBody>
-          <a:bodyPr wrap="square" anchor="ctr">
-            <a:spAutoFit/>
-          </a:bodyPr>
-          <a:lstStyle/>
-          <a:p>
-            <a:pPr algn="l"/>
-            <a:r>
-              <a:rPr sz="3300" b="1">
-                <a:solidFill>
-                  <a:srgbClr val="00998E"/>
-                </a:solidFill>
-                <a:latin typeface="Noto Sans CJK SC"/>
-              </a:rPr>
-              <a:t>141</a:t>
-            </a:r>
-          </a:p>
-        </p:txBody>
-      </p:sp>
-      <p:sp>
-        <p:nvSpPr>
-          <p:cNvPr id="16" name="TextBox 15"/>
-          <p:cNvSpPr txBox="1"/>
-          <p:nvPr/>
-        </p:nvSpPr>
-        <p:spPr>
-          <a:xfrm>
-            <a:off x="3429000" y="4325112"/>
-            <a:ext cx="2286000" cy="301752"/>
-          </a:xfrm>
-          <a:prstGeom prst="rect">
-            <a:avLst/>
-          </a:prstGeom>
-          <a:noFill/>
-        </p:spPr>
-        <p:txBody>
-          <a:bodyPr wrap="square" anchor="ctr">
-            <a:spAutoFit/>
-          </a:bodyPr>
-          <a:lstStyle/>
-          <a:p>
-            <a:pPr algn="l"/>
-            <a:r>
-              <a:rPr sz="1100" b="0">
-                <a:solidFill>
-                  <a:srgbClr val="5D6975"/>
-                </a:solidFill>
-                <a:latin typeface="Noto Sans CJK SC"/>
-              </a:rPr>
-              <a:t>任务成功</a:t>
-            </a:r>
-          </a:p>
-        </p:txBody>
-      </p:sp>
-      <p:sp>
-        <p:nvSpPr>
-          <p:cNvPr id="17" name="TextBox 16"/>
-          <p:cNvSpPr txBox="1"/>
-          <p:nvPr/>
-        </p:nvSpPr>
-        <p:spPr>
-          <a:xfrm>
-            <a:off x="6035040" y="3794760"/>
-            <a:ext cx="2194560" cy="502920"/>
-          </a:xfrm>
-          <a:prstGeom prst="rect">
-            <a:avLst/>
-          </a:prstGeom>
-          <a:noFill/>
-        </p:spPr>
-        <p:txBody>
-          <a:bodyPr wrap="square" anchor="ctr">
-            <a:spAutoFit/>
-          </a:bodyPr>
-          <a:lstStyle/>
-          <a:p>
-            <a:pPr algn="l"/>
-            <a:r>
-              <a:rPr sz="3300" b="1">
-                <a:solidFill>
-                  <a:srgbClr val="D95A34"/>
-                </a:solidFill>
-                <a:latin typeface="Noto Sans CJK SC"/>
-              </a:rPr>
-              <a:t>48</a:t>
-            </a:r>
-          </a:p>
-        </p:txBody>
-      </p:sp>
-      <p:sp>
-        <p:nvSpPr>
-          <p:cNvPr id="18" name="TextBox 17"/>
-          <p:cNvSpPr txBox="1"/>
-          <p:nvPr/>
-        </p:nvSpPr>
-        <p:spPr>
-          <a:xfrm>
-            <a:off x="6035040" y="4325112"/>
-            <a:ext cx="2286000" cy="301752"/>
-          </a:xfrm>
-          <a:prstGeom prst="rect">
-            <a:avLst/>
-          </a:prstGeom>
-          <a:noFill/>
-        </p:spPr>
-        <p:txBody>
-          <a:bodyPr wrap="square" anchor="ctr">
-            <a:spAutoFit/>
-          </a:bodyPr>
-          <a:lstStyle/>
-          <a:p>
-            <a:pPr algn="l"/>
-            <a:r>
-              <a:rPr sz="1100" b="0">
-                <a:solidFill>
-                  <a:srgbClr val="5D6975"/>
-                </a:solidFill>
-                <a:latin typeface="Noto Sans CJK SC"/>
-              </a:rPr>
-              <a:t>同批双引擎录像</a:t>
-            </a:r>
-          </a:p>
-        </p:txBody>
-      </p:sp>
-      <p:sp>
-        <p:nvSpPr>
-          <p:cNvPr id="19" name="Rounded Rectangle 18"/>
+              <a:t>完整回到终点且无判定失败</a:t>
+            </a:r>
+          </a:p>
+        </p:txBody>
+      </p:sp>
+      <p:sp>
+        <p:nvSpPr>
+          <p:cNvPr id="9" name="Rounded Rectangle 8"/>
           <p:cNvSpPr/>
           <p:nvPr/>
         </p:nvSpPr>
         <p:spPr>
           <a:xfrm>
-            <a:off x="8412480" y="2057400"/>
-            <a:ext cx="2834640" cy="3154680"/>
+            <a:off x="4389120" y="1965960"/>
+            <a:ext cx="3337560" cy="1234440"/>
           </a:xfrm>
           <a:prstGeom prst="roundRect">
             <a:avLst/>
           </a:prstGeom>
           <a:solidFill>
-            <a:srgbClr val="FFF4F0"/>
+            <a:srgbClr val="FFFFFF"/>
           </a:solidFill>
           <a:ln>
             <a:solidFill>
-              <a:srgbClr val="D95A34"/>
+              <a:srgbClr val="2478BE"/>
             </a:solidFill>
           </a:ln>
         </p:spPr>
@@ -8832,140 +8721,520 @@
       </p:sp>
       <p:sp>
         <p:nvSpPr>
+          <p:cNvPr id="10" name="TextBox 9"/>
+          <p:cNvSpPr txBox="1"/>
+          <p:nvPr/>
+        </p:nvSpPr>
+        <p:spPr>
+          <a:xfrm>
+            <a:off x="4590288" y="2167128"/>
+            <a:ext cx="411480" cy="274320"/>
+          </a:xfrm>
+          <a:prstGeom prst="rect">
+            <a:avLst/>
+          </a:prstGeom>
+          <a:noFill/>
+        </p:spPr>
+        <p:txBody>
+          <a:bodyPr wrap="square" anchor="ctr">
+            <a:spAutoFit/>
+          </a:bodyPr>
+          <a:lstStyle/>
+          <a:p>
+            <a:pPr algn="l"/>
+            <a:r>
+              <a:rPr sz="1400" b="1">
+                <a:solidFill>
+                  <a:srgbClr val="2478BE"/>
+                </a:solidFill>
+                <a:latin typeface="Noto Sans CJK SC"/>
+              </a:rPr>
+              <a:t>02</a:t>
+            </a:r>
+          </a:p>
+        </p:txBody>
+      </p:sp>
+      <p:sp>
+        <p:nvSpPr>
+          <p:cNvPr id="11" name="TextBox 10"/>
+          <p:cNvSpPr txBox="1"/>
+          <p:nvPr/>
+        </p:nvSpPr>
+        <p:spPr>
+          <a:xfrm>
+            <a:off x="5102352" y="2130552"/>
+            <a:ext cx="2377440" cy="274320"/>
+          </a:xfrm>
+          <a:prstGeom prst="rect">
+            <a:avLst/>
+          </a:prstGeom>
+          <a:noFill/>
+        </p:spPr>
+        <p:txBody>
+          <a:bodyPr wrap="square" anchor="ctr">
+            <a:spAutoFit/>
+          </a:bodyPr>
+          <a:lstStyle/>
+          <a:p>
+            <a:pPr algn="l"/>
+            <a:r>
+              <a:rPr sz="1800" b="1">
+                <a:solidFill>
+                  <a:srgbClr val="191E26"/>
+                </a:solidFill>
+                <a:latin typeface="Noto Sans CJK SC"/>
+              </a:rPr>
+              <a:t>有效超车</a:t>
+            </a:r>
+          </a:p>
+        </p:txBody>
+      </p:sp>
+      <p:sp>
+        <p:nvSpPr>
+          <p:cNvPr id="12" name="TextBox 11"/>
+          <p:cNvSpPr txBox="1"/>
+          <p:nvPr/>
+        </p:nvSpPr>
+        <p:spPr>
+          <a:xfrm>
+            <a:off x="4617720" y="2587752"/>
+            <a:ext cx="2834640" cy="320040"/>
+          </a:xfrm>
+          <a:prstGeom prst="rect">
+            <a:avLst/>
+          </a:prstGeom>
+          <a:noFill/>
+        </p:spPr>
+        <p:txBody>
+          <a:bodyPr wrap="square" anchor="ctr">
+            <a:spAutoFit/>
+          </a:bodyPr>
+          <a:lstStyle/>
+          <a:p>
+            <a:pPr algn="l"/>
+            <a:r>
+              <a:rPr sz="1200" b="0">
+                <a:solidFill>
+                  <a:srgbClr val="5D6975"/>
+                </a:solidFill>
+                <a:latin typeface="Noto Sans CJK SC"/>
+              </a:rPr>
+              <a:t>完整超越，不把名次抖动算进去</a:t>
+            </a:r>
+          </a:p>
+        </p:txBody>
+      </p:sp>
+      <p:sp>
+        <p:nvSpPr>
+          <p:cNvPr id="13" name="Rounded Rectangle 12"/>
+          <p:cNvSpPr/>
+          <p:nvPr/>
+        </p:nvSpPr>
+        <p:spPr>
+          <a:xfrm>
+            <a:off x="8138159" y="1965960"/>
+            <a:ext cx="3337560" cy="1234440"/>
+          </a:xfrm>
+          <a:prstGeom prst="roundRect">
+            <a:avLst/>
+          </a:prstGeom>
+          <a:solidFill>
+            <a:srgbClr val="FFFFFF"/>
+          </a:solidFill>
+          <a:ln>
+            <a:solidFill>
+              <a:srgbClr val="2478BE"/>
+            </a:solidFill>
+          </a:ln>
+        </p:spPr>
+        <p:style>
+          <a:lnRef idx="1">
+            <a:schemeClr val="accent1"/>
+          </a:lnRef>
+          <a:fillRef idx="3">
+            <a:schemeClr val="accent1"/>
+          </a:fillRef>
+          <a:effectRef idx="2">
+            <a:schemeClr val="accent1"/>
+          </a:effectRef>
+          <a:fontRef idx="minor">
+            <a:schemeClr val="lt1"/>
+          </a:fontRef>
+        </p:style>
+        <p:txBody>
+          <a:bodyPr rtlCol="0" anchor="ctr"/>
+          <a:lstStyle/>
+          <a:p>
+            <a:pPr algn="ctr"/>
+          </a:p>
+        </p:txBody>
+      </p:sp>
+      <p:sp>
+        <p:nvSpPr>
+          <p:cNvPr id="14" name="TextBox 13"/>
+          <p:cNvSpPr txBox="1"/>
+          <p:nvPr/>
+        </p:nvSpPr>
+        <p:spPr>
+          <a:xfrm>
+            <a:off x="8339327" y="2167128"/>
+            <a:ext cx="411480" cy="274320"/>
+          </a:xfrm>
+          <a:prstGeom prst="rect">
+            <a:avLst/>
+          </a:prstGeom>
+          <a:noFill/>
+        </p:spPr>
+        <p:txBody>
+          <a:bodyPr wrap="square" anchor="ctr">
+            <a:spAutoFit/>
+          </a:bodyPr>
+          <a:lstStyle/>
+          <a:p>
+            <a:pPr algn="l"/>
+            <a:r>
+              <a:rPr sz="1400" b="1">
+                <a:solidFill>
+                  <a:srgbClr val="2478BE"/>
+                </a:solidFill>
+                <a:latin typeface="Noto Sans CJK SC"/>
+              </a:rPr>
+              <a:t>03</a:t>
+            </a:r>
+          </a:p>
+        </p:txBody>
+      </p:sp>
+      <p:sp>
+        <p:nvSpPr>
+          <p:cNvPr id="15" name="TextBox 14"/>
+          <p:cNvSpPr txBox="1"/>
+          <p:nvPr/>
+        </p:nvSpPr>
+        <p:spPr>
+          <a:xfrm>
+            <a:off x="8851391" y="2130552"/>
+            <a:ext cx="2377440" cy="274320"/>
+          </a:xfrm>
+          <a:prstGeom prst="rect">
+            <a:avLst/>
+          </a:prstGeom>
+          <a:noFill/>
+        </p:spPr>
+        <p:txBody>
+          <a:bodyPr wrap="square" anchor="ctr">
+            <a:spAutoFit/>
+          </a:bodyPr>
+          <a:lstStyle/>
+          <a:p>
+            <a:pPr algn="l"/>
+            <a:r>
+              <a:rPr sz="1800" b="1">
+                <a:solidFill>
+                  <a:srgbClr val="191E26"/>
+                </a:solidFill>
+                <a:latin typeface="Noto Sans CJK SC"/>
+              </a:rPr>
+              <a:t>连续漂移</a:t>
+            </a:r>
+          </a:p>
+        </p:txBody>
+      </p:sp>
+      <p:sp>
+        <p:nvSpPr>
+          <p:cNvPr id="16" name="TextBox 15"/>
+          <p:cNvSpPr txBox="1"/>
+          <p:nvPr/>
+        </p:nvSpPr>
+        <p:spPr>
+          <a:xfrm>
+            <a:off x="8366759" y="2587752"/>
+            <a:ext cx="2834640" cy="320040"/>
+          </a:xfrm>
+          <a:prstGeom prst="rect">
+            <a:avLst/>
+          </a:prstGeom>
+          <a:noFill/>
+        </p:spPr>
+        <p:txBody>
+          <a:bodyPr wrap="square" anchor="ctr">
+            <a:spAutoFit/>
+          </a:bodyPr>
+          <a:lstStyle/>
+          <a:p>
+            <a:pPr algn="l"/>
+            <a:r>
+              <a:rPr sz="1200" b="0">
+                <a:solidFill>
+                  <a:srgbClr val="5D6975"/>
+                </a:solidFill>
+                <a:latin typeface="Noto Sans CJK SC"/>
+              </a:rPr>
+              <a:t>侧滑角与持续时间达标</a:t>
+            </a:r>
+          </a:p>
+        </p:txBody>
+      </p:sp>
+      <p:sp>
+        <p:nvSpPr>
+          <p:cNvPr id="17" name="Rounded Rectangle 16"/>
+          <p:cNvSpPr/>
+          <p:nvPr/>
+        </p:nvSpPr>
+        <p:spPr>
+          <a:xfrm>
+            <a:off x="640080" y="3566160"/>
+            <a:ext cx="3337560" cy="1234440"/>
+          </a:xfrm>
+          <a:prstGeom prst="roundRect">
+            <a:avLst/>
+          </a:prstGeom>
+          <a:solidFill>
+            <a:srgbClr val="FFFFFF"/>
+          </a:solidFill>
+          <a:ln>
+            <a:solidFill>
+              <a:srgbClr val="2478BE"/>
+            </a:solidFill>
+          </a:ln>
+        </p:spPr>
+        <p:style>
+          <a:lnRef idx="1">
+            <a:schemeClr val="accent1"/>
+          </a:lnRef>
+          <a:fillRef idx="3">
+            <a:schemeClr val="accent1"/>
+          </a:fillRef>
+          <a:effectRef idx="2">
+            <a:schemeClr val="accent1"/>
+          </a:effectRef>
+          <a:fontRef idx="minor">
+            <a:schemeClr val="lt1"/>
+          </a:fontRef>
+        </p:style>
+        <p:txBody>
+          <a:bodyPr rtlCol="0" anchor="ctr"/>
+          <a:lstStyle/>
+          <a:p>
+            <a:pPr algn="ctr"/>
+          </a:p>
+        </p:txBody>
+      </p:sp>
+      <p:sp>
+        <p:nvSpPr>
+          <p:cNvPr id="18" name="TextBox 17"/>
+          <p:cNvSpPr txBox="1"/>
+          <p:nvPr/>
+        </p:nvSpPr>
+        <p:spPr>
+          <a:xfrm>
+            <a:off x="841247" y="3767328"/>
+            <a:ext cx="411480" cy="274320"/>
+          </a:xfrm>
+          <a:prstGeom prst="rect">
+            <a:avLst/>
+          </a:prstGeom>
+          <a:noFill/>
+        </p:spPr>
+        <p:txBody>
+          <a:bodyPr wrap="square" anchor="ctr">
+            <a:spAutoFit/>
+          </a:bodyPr>
+          <a:lstStyle/>
+          <a:p>
+            <a:pPr algn="l"/>
+            <a:r>
+              <a:rPr sz="1400" b="1">
+                <a:solidFill>
+                  <a:srgbClr val="2478BE"/>
+                </a:solidFill>
+                <a:latin typeface="Noto Sans CJK SC"/>
+              </a:rPr>
+              <a:t>04</a:t>
+            </a:r>
+          </a:p>
+        </p:txBody>
+      </p:sp>
+      <p:sp>
+        <p:nvSpPr>
+          <p:cNvPr id="19" name="TextBox 18"/>
+          <p:cNvSpPr txBox="1"/>
+          <p:nvPr/>
+        </p:nvSpPr>
+        <p:spPr>
+          <a:xfrm>
+            <a:off x="1353312" y="3730752"/>
+            <a:ext cx="2377440" cy="274320"/>
+          </a:xfrm>
+          <a:prstGeom prst="rect">
+            <a:avLst/>
+          </a:prstGeom>
+          <a:noFill/>
+        </p:spPr>
+        <p:txBody>
+          <a:bodyPr wrap="square" anchor="ctr">
+            <a:spAutoFit/>
+          </a:bodyPr>
+          <a:lstStyle/>
+          <a:p>
+            <a:pPr algn="l"/>
+            <a:r>
+              <a:rPr sz="1800" b="1">
+                <a:solidFill>
+                  <a:srgbClr val="191E26"/>
+                </a:solidFill>
+                <a:latin typeface="Noto Sans CJK SC"/>
+              </a:rPr>
+              <a:t>轨迹审计</a:t>
+            </a:r>
+          </a:p>
+        </p:txBody>
+      </p:sp>
+      <p:sp>
+        <p:nvSpPr>
           <p:cNvPr id="20" name="TextBox 19"/>
           <p:cNvSpPr txBox="1"/>
           <p:nvPr/>
         </p:nvSpPr>
         <p:spPr>
           <a:xfrm>
-            <a:off x="8641080" y="2359152"/>
-            <a:ext cx="2286000" cy="274320"/>
-          </a:xfrm>
-          <a:prstGeom prst="rect">
-            <a:avLst/>
-          </a:prstGeom>
-          <a:noFill/>
-        </p:spPr>
-        <p:txBody>
-          <a:bodyPr wrap="square" anchor="ctr">
-            <a:spAutoFit/>
-          </a:bodyPr>
-          <a:lstStyle/>
-          <a:p>
-            <a:pPr algn="l"/>
-            <a:r>
-              <a:rPr sz="1700" b="1">
-                <a:solidFill>
-                  <a:srgbClr val="D95A34"/>
-                </a:solidFill>
-                <a:latin typeface="Noto Sans CJK SC"/>
-              </a:rPr>
-              <a:t>Isaac 的两条失败</a:t>
-            </a:r>
-          </a:p>
-        </p:txBody>
-      </p:sp>
-      <p:sp>
-        <p:nvSpPr>
-          <p:cNvPr id="21" name="TextBox 20"/>
-          <p:cNvSpPr txBox="1"/>
-          <p:nvPr/>
-        </p:nvSpPr>
-        <p:spPr>
-          <a:xfrm>
-            <a:off x="8613648" y="2880360"/>
-            <a:ext cx="201168" cy="256032"/>
-          </a:xfrm>
-          <a:prstGeom prst="rect">
-            <a:avLst/>
-          </a:prstGeom>
-          <a:noFill/>
-        </p:spPr>
-        <p:txBody>
-          <a:bodyPr wrap="square" anchor="ctr">
-            <a:spAutoFit/>
-          </a:bodyPr>
-          <a:lstStyle/>
-          <a:p>
-            <a:pPr algn="l"/>
-            <a:r>
-              <a:rPr sz="1700" b="1">
+            <a:off x="868680" y="4187952"/>
+            <a:ext cx="2834640" cy="320040"/>
+          </a:xfrm>
+          <a:prstGeom prst="rect">
+            <a:avLst/>
+          </a:prstGeom>
+          <a:noFill/>
+        </p:spPr>
+        <p:txBody>
+          <a:bodyPr wrap="square" anchor="ctr">
+            <a:spAutoFit/>
+          </a:bodyPr>
+          <a:lstStyle/>
+          <a:p>
+            <a:pPr algn="l"/>
+            <a:r>
+              <a:rPr sz="1200" b="0">
+                <a:solidFill>
+                  <a:srgbClr val="5D6975"/>
+                </a:solidFill>
+                <a:latin typeface="Noto Sans CJK SC"/>
+              </a:rPr>
+              <a:t>独立校验每回合状态与统计</a:t>
+            </a:r>
+          </a:p>
+        </p:txBody>
+      </p:sp>
+      <p:sp>
+        <p:nvSpPr>
+          <p:cNvPr id="21" name="Rounded Rectangle 20"/>
+          <p:cNvSpPr/>
+          <p:nvPr/>
+        </p:nvSpPr>
+        <p:spPr>
+          <a:xfrm>
+            <a:off x="4389120" y="3566160"/>
+            <a:ext cx="3337560" cy="1234440"/>
+          </a:xfrm>
+          <a:prstGeom prst="roundRect">
+            <a:avLst/>
+          </a:prstGeom>
+          <a:solidFill>
+            <a:srgbClr val="FFFFFF"/>
+          </a:solidFill>
+          <a:ln>
+            <a:solidFill>
+              <a:srgbClr val="2478BE"/>
+            </a:solidFill>
+          </a:ln>
+        </p:spPr>
+        <p:style>
+          <a:lnRef idx="1">
+            <a:schemeClr val="accent1"/>
+          </a:lnRef>
+          <a:fillRef idx="3">
+            <a:schemeClr val="accent1"/>
+          </a:fillRef>
+          <a:effectRef idx="2">
+            <a:schemeClr val="accent1"/>
+          </a:effectRef>
+          <a:fontRef idx="minor">
+            <a:schemeClr val="lt1"/>
+          </a:fontRef>
+        </p:style>
+        <p:txBody>
+          <a:bodyPr rtlCol="0" anchor="ctr"/>
+          <a:lstStyle/>
+          <a:p>
+            <a:pPr algn="ctr"/>
+          </a:p>
+        </p:txBody>
+      </p:sp>
+      <p:sp>
+        <p:nvSpPr>
+          <p:cNvPr id="22" name="TextBox 21"/>
+          <p:cNvSpPr txBox="1"/>
+          <p:nvPr/>
+        </p:nvSpPr>
+        <p:spPr>
+          <a:xfrm>
+            <a:off x="4590288" y="3767328"/>
+            <a:ext cx="411480" cy="274320"/>
+          </a:xfrm>
+          <a:prstGeom prst="rect">
+            <a:avLst/>
+          </a:prstGeom>
+          <a:noFill/>
+        </p:spPr>
+        <p:txBody>
+          <a:bodyPr wrap="square" anchor="ctr">
+            <a:spAutoFit/>
+          </a:bodyPr>
+          <a:lstStyle/>
+          <a:p>
+            <a:pPr algn="l"/>
+            <a:r>
+              <a:rPr sz="1400" b="1">
                 <a:solidFill>
                   <a:srgbClr val="2478BE"/>
                 </a:solidFill>
                 <a:latin typeface="Noto Sans CJK SC"/>
               </a:rPr>
-              <a:t>•</a:t>
-            </a:r>
-          </a:p>
-        </p:txBody>
-      </p:sp>
-      <p:sp>
-        <p:nvSpPr>
-          <p:cNvPr id="22" name="TextBox 21"/>
-          <p:cNvSpPr txBox="1"/>
-          <p:nvPr/>
-        </p:nvSpPr>
-        <p:spPr>
-          <a:xfrm>
-            <a:off x="8851392" y="2862072"/>
-            <a:ext cx="2048256" cy="411480"/>
-          </a:xfrm>
-          <a:prstGeom prst="rect">
-            <a:avLst/>
-          </a:prstGeom>
-          <a:noFill/>
-        </p:spPr>
-        <p:txBody>
-          <a:bodyPr wrap="square" anchor="ctr">
-            <a:spAutoFit/>
-          </a:bodyPr>
-          <a:lstStyle/>
-          <a:p>
-            <a:pPr algn="l"/>
-            <a:r>
-              <a:rPr sz="1400" b="0">
+              <a:t>05</a:t>
+            </a:r>
+          </a:p>
+        </p:txBody>
+      </p:sp>
+      <p:sp>
+        <p:nvSpPr>
+          <p:cNvPr id="23" name="TextBox 22"/>
+          <p:cNvSpPr txBox="1"/>
+          <p:nvPr/>
+        </p:nvSpPr>
+        <p:spPr>
+          <a:xfrm>
+            <a:off x="5102352" y="3730752"/>
+            <a:ext cx="2377440" cy="274320"/>
+          </a:xfrm>
+          <a:prstGeom prst="rect">
+            <a:avLst/>
+          </a:prstGeom>
+          <a:noFill/>
+        </p:spPr>
+        <p:txBody>
+          <a:bodyPr wrap="square" anchor="ctr">
+            <a:spAutoFit/>
+          </a:bodyPr>
+          <a:lstStyle/>
+          <a:p>
+            <a:pPr algn="l"/>
+            <a:r>
+              <a:rPr sz="1800" b="1">
                 <a:solidFill>
                   <a:srgbClr val="191E26"/>
                 </a:solidFill>
                 <a:latin typeface="Noto Sans CJK SC"/>
               </a:rPr>
-              <a:t>Spa：起步车车接触</a:t>
-            </a:r>
-          </a:p>
-        </p:txBody>
-      </p:sp>
-      <p:sp>
-        <p:nvSpPr>
-          <p:cNvPr id="23" name="TextBox 22"/>
-          <p:cNvSpPr txBox="1"/>
-          <p:nvPr/>
-        </p:nvSpPr>
-        <p:spPr>
-          <a:xfrm>
-            <a:off x="8613648" y="3493008"/>
-            <a:ext cx="201168" cy="256032"/>
-          </a:xfrm>
-          <a:prstGeom prst="rect">
-            <a:avLst/>
-          </a:prstGeom>
-          <a:noFill/>
-        </p:spPr>
-        <p:txBody>
-          <a:bodyPr wrap="square" anchor="ctr">
-            <a:spAutoFit/>
-          </a:bodyPr>
-          <a:lstStyle/>
-          <a:p>
-            <a:pPr algn="l"/>
-            <a:r>
-              <a:rPr sz="1700" b="1">
-                <a:solidFill>
-                  <a:srgbClr val="2478BE"/>
-                </a:solidFill>
-                <a:latin typeface="Noto Sans CJK SC"/>
-              </a:rPr>
-              <a:t>•</a:t>
+              <a:t>原生录像</a:t>
             </a:r>
           </a:p>
         </p:txBody>
@@ -8978,29 +9247,29 @@
         </p:nvSpPr>
         <p:spPr>
           <a:xfrm>
-            <a:off x="8851392" y="3474720"/>
-            <a:ext cx="2048256" cy="411480"/>
-          </a:xfrm>
-          <a:prstGeom prst="rect">
-            <a:avLst/>
-          </a:prstGeom>
-          <a:noFill/>
-        </p:spPr>
-        <p:txBody>
-          <a:bodyPr wrap="square" anchor="ctr">
-            <a:spAutoFit/>
-          </a:bodyPr>
-          <a:lstStyle/>
-          <a:p>
-            <a:pPr algn="l"/>
-            <a:r>
-              <a:rPr sz="1400" b="0">
-                <a:solidFill>
-                  <a:srgbClr val="191E26"/>
-                </a:solidFill>
-                <a:latin typeface="Noto Sans CJK SC"/>
-              </a:rPr>
-              <a:t>Suzuka：桥面段车身失稳</a:t>
+            <a:off x="4617720" y="4187952"/>
+            <a:ext cx="2834640" cy="320040"/>
+          </a:xfrm>
+          <a:prstGeom prst="rect">
+            <a:avLst/>
+          </a:prstGeom>
+          <a:noFill/>
+        </p:spPr>
+        <p:txBody>
+          <a:bodyPr wrap="square" anchor="ctr">
+            <a:spAutoFit/>
+          </a:bodyPr>
+          <a:lstStyle/>
+          <a:p>
+            <a:pPr algn="l"/>
+            <a:r>
+              <a:rPr sz="1200" b="0">
+                <a:solidFill>
+                  <a:srgbClr val="5D6975"/>
+                </a:solidFill>
+                <a:latin typeface="Noto Sans CJK SC"/>
+              </a:rPr>
+              <a:t>同一标签下可解码、可回放</a:t>
             </a:r>
           </a:p>
         </p:txBody>
@@ -9013,29 +9282,29 @@
         </p:nvSpPr>
         <p:spPr>
           <a:xfrm>
-            <a:off x="8641080" y="4343400"/>
-            <a:ext cx="2148840" cy="411480"/>
-          </a:xfrm>
-          <a:prstGeom prst="rect">
-            <a:avLst/>
-          </a:prstGeom>
-          <a:noFill/>
-        </p:spPr>
-        <p:txBody>
-          <a:bodyPr wrap="square" anchor="ctr">
-            <a:spAutoFit/>
-          </a:bodyPr>
-          <a:lstStyle/>
-          <a:p>
-            <a:pPr algn="l"/>
-            <a:r>
-              <a:rPr sz="1300" b="1">
+            <a:off x="640080" y="5532120"/>
+            <a:ext cx="10332720" cy="320040"/>
+          </a:xfrm>
+          <a:prstGeom prst="rect">
+            <a:avLst/>
+          </a:prstGeom>
+          <a:noFill/>
+        </p:spPr>
+        <p:txBody>
+          <a:bodyPr wrap="square" anchor="ctr">
+            <a:spAutoFit/>
+          </a:bodyPr>
+          <a:lstStyle/>
+          <a:p>
+            <a:pPr algn="l"/>
+            <a:r>
+              <a:rPr sz="1800" b="1">
                 <a:solidFill>
                   <a:srgbClr val="BE343A"/>
                 </a:solidFill>
                 <a:latin typeface="Noto Sans CJK SC"/>
               </a:rPr>
-              <a:t>所以不能称 Isaac 全赛道完成。</a:t>
+              <a:t>“加载模型”“单个成功视频”或“测试通过”都不能替代整圈资格。</a:t>
             </a:r>
           </a:p>
         </p:txBody>
@@ -9131,7 +9400,7 @@
                 </a:solidFill>
                 <a:latin typeface="Noto Sans CJK SC"/>
               </a:rPr>
-              <a:t>LAP TIME</a:t>
+              <a:t>RACING RESULTS</a:t>
             </a:r>
           </a:p>
         </p:txBody>
@@ -9166,7 +9435,7 @@
                 </a:solidFill>
                 <a:latin typeface="Noto Sans CJK SC"/>
               </a:rPr>
-              <a:t>9.0 m/s 刷新最快圈速，但 Isaac 的稳定性付出了代价</a:t>
+              <a:t>冻结 v10c：MuJoCo 24/24，Isaac 22/24；差异被保留</a:t>
             </a:r>
           </a:p>
         </p:txBody>
@@ -9224,7 +9493,7 @@
         </p:nvSpPr>
         <p:spPr>
           <a:xfrm>
-            <a:off x="777240" y="2057400"/>
+            <a:off x="777240" y="2148840"/>
             <a:ext cx="2194560" cy="274320"/>
           </a:xfrm>
           <a:prstGeom prst="rect">
@@ -9246,7 +9515,7 @@
                 </a:solidFill>
                 <a:latin typeface="Noto Sans CJK SC"/>
               </a:rPr>
-              <a:t>MuJoCo · 9.0 m/s</a:t>
+              <a:t>MuJoCo · 7.25 m/s · 24 赛道</a:t>
             </a:r>
           </a:p>
         </p:txBody>
@@ -9259,7 +9528,7 @@
         </p:nvSpPr>
         <p:spPr>
           <a:xfrm>
-            <a:off x="3017520" y="2075688"/>
+            <a:off x="3017520" y="2167128"/>
             <a:ext cx="5029200" cy="201168"/>
           </a:xfrm>
           <a:prstGeom prst="rect">
@@ -9304,7 +9573,7 @@
         </p:nvSpPr>
         <p:spPr>
           <a:xfrm>
-            <a:off x="3017520" y="2075688"/>
+            <a:off x="3017520" y="2167128"/>
             <a:ext cx="5029200" cy="201168"/>
           </a:xfrm>
           <a:prstGeom prst="rect">
@@ -9349,7 +9618,7 @@
         </p:nvSpPr>
         <p:spPr>
           <a:xfrm>
-            <a:off x="8183879" y="2029968"/>
+            <a:off x="8183879" y="2121408"/>
             <a:ext cx="731520" cy="274320"/>
           </a:xfrm>
           <a:prstGeom prst="rect">
@@ -9384,7 +9653,7 @@
         </p:nvSpPr>
         <p:spPr>
           <a:xfrm>
-            <a:off x="777240" y="2697480"/>
+            <a:off x="777240" y="2834640"/>
             <a:ext cx="2194560" cy="274320"/>
           </a:xfrm>
           <a:prstGeom prst="rect">
@@ -9406,7 +9675,7 @@
                 </a:solidFill>
                 <a:latin typeface="Noto Sans CJK SC"/>
               </a:rPr>
-              <a:t>Isaac · 9.0 m/s</a:t>
+              <a:t>Isaac · 7.25 m/s · 24 赛道</a:t>
             </a:r>
           </a:p>
         </p:txBody>
@@ -9419,7 +9688,7 @@
         </p:nvSpPr>
         <p:spPr>
           <a:xfrm>
-            <a:off x="3017520" y="2715768"/>
+            <a:off x="3017520" y="2852928"/>
             <a:ext cx="5029200" cy="201168"/>
           </a:xfrm>
           <a:prstGeom prst="rect">
@@ -9464,8 +9733,8 @@
         </p:nvSpPr>
         <p:spPr>
           <a:xfrm>
-            <a:off x="3017520" y="2715768"/>
-            <a:ext cx="4190999" cy="201168"/>
+            <a:off x="3017520" y="2852928"/>
+            <a:ext cx="4610100" cy="201168"/>
           </a:xfrm>
           <a:prstGeom prst="rect">
             <a:avLst/>
@@ -9509,7 +9778,7 @@
         </p:nvSpPr>
         <p:spPr>
           <a:xfrm>
-            <a:off x="8183879" y="2670048"/>
+            <a:off x="8183879" y="2807208"/>
             <a:ext cx="731520" cy="274320"/>
           </a:xfrm>
           <a:prstGeom prst="rect">
@@ -9531,7 +9800,7 @@
                 </a:solidFill>
                 <a:latin typeface="Noto Sans CJK SC"/>
               </a:rPr>
-              <a:t>20/24</a:t>
+              <a:t>22/24</a:t>
             </a:r>
           </a:p>
         </p:txBody>
@@ -9544,7 +9813,7 @@
         </p:nvSpPr>
         <p:spPr>
           <a:xfrm>
-            <a:off x="777240" y="3703320"/>
+            <a:off x="822960" y="3794760"/>
             <a:ext cx="2194560" cy="502920"/>
           </a:xfrm>
           <a:prstGeom prst="rect">
@@ -9562,24 +9831,94 @@
             <a:r>
               <a:rPr sz="3300" b="1">
                 <a:solidFill>
+                  <a:srgbClr val="2478BE"/>
+                </a:solidFill>
+                <a:latin typeface="Noto Sans CJK SC"/>
+              </a:rPr>
+              <a:t>174</a:t>
+            </a:r>
+          </a:p>
+        </p:txBody>
+      </p:sp>
+      <p:sp>
+        <p:nvSpPr>
+          <p:cNvPr id="14" name="TextBox 13"/>
+          <p:cNvSpPr txBox="1"/>
+          <p:nvPr/>
+        </p:nvSpPr>
+        <p:spPr>
+          <a:xfrm>
+            <a:off x="822960" y="4325112"/>
+            <a:ext cx="2286000" cy="301752"/>
+          </a:xfrm>
+          <a:prstGeom prst="rect">
+            <a:avLst/>
+          </a:prstGeom>
+          <a:noFill/>
+        </p:spPr>
+        <p:txBody>
+          <a:bodyPr wrap="square" anchor="ctr">
+            <a:spAutoFit/>
+          </a:bodyPr>
+          <a:lstStyle/>
+          <a:p>
+            <a:pPr algn="l"/>
+            <a:r>
+              <a:rPr sz="1100" b="0">
+                <a:solidFill>
+                  <a:srgbClr val="5D6975"/>
+                </a:solidFill>
+                <a:latin typeface="Noto Sans CJK SC"/>
+              </a:rPr>
+              <a:t>已审计回合</a:t>
+            </a:r>
+          </a:p>
+        </p:txBody>
+      </p:sp>
+      <p:sp>
+        <p:nvSpPr>
+          <p:cNvPr id="15" name="TextBox 14"/>
+          <p:cNvSpPr txBox="1"/>
+          <p:nvPr/>
+        </p:nvSpPr>
+        <p:spPr>
+          <a:xfrm>
+            <a:off x="3429000" y="3794760"/>
+            <a:ext cx="2194560" cy="502920"/>
+          </a:xfrm>
+          <a:prstGeom prst="rect">
+            <a:avLst/>
+          </a:prstGeom>
+          <a:noFill/>
+        </p:spPr>
+        <p:txBody>
+          <a:bodyPr wrap="square" anchor="ctr">
+            <a:spAutoFit/>
+          </a:bodyPr>
+          <a:lstStyle/>
+          <a:p>
+            <a:pPr algn="l"/>
+            <a:r>
+              <a:rPr sz="3300" b="1">
+                <a:solidFill>
                   <a:srgbClr val="00998E"/>
                 </a:solidFill>
                 <a:latin typeface="Noto Sans CJK SC"/>
               </a:rPr>
-              <a:t>8.97</a:t>
-            </a:r>
-          </a:p>
-        </p:txBody>
-      </p:sp>
-      <p:sp>
-        <p:nvSpPr>
-          <p:cNvPr id="14" name="TextBox 13"/>
-          <p:cNvSpPr txBox="1"/>
-          <p:nvPr/>
-        </p:nvSpPr>
-        <p:spPr>
-          <a:xfrm>
-            <a:off x="777240" y="4233672"/>
+              <a:t>141</a:t>
+            </a:r>
+          </a:p>
+        </p:txBody>
+      </p:sp>
+      <p:sp>
+        <p:nvSpPr>
+          <p:cNvPr id="16" name="TextBox 15"/>
+          <p:cNvSpPr txBox="1"/>
+          <p:nvPr/>
+        </p:nvSpPr>
+        <p:spPr>
+          <a:xfrm>
+            <a:off x="3429000" y="4325112"/>
             <a:ext cx="2286000" cy="301752"/>
           </a:xfrm>
           <a:prstGeom prst="rect">
@@ -9601,20 +9940,20 @@
                 </a:solidFill>
                 <a:latin typeface="Noto Sans CJK SC"/>
               </a:rPr>
-              <a:t>Mu 峰值 m/s</a:t>
-            </a:r>
-          </a:p>
-        </p:txBody>
-      </p:sp>
-      <p:sp>
-        <p:nvSpPr>
-          <p:cNvPr id="15" name="TextBox 14"/>
-          <p:cNvSpPr txBox="1"/>
-          <p:nvPr/>
-        </p:nvSpPr>
-        <p:spPr>
-          <a:xfrm>
-            <a:off x="3657600" y="3703320"/>
+              <a:t>任务成功</a:t>
+            </a:r>
+          </a:p>
+        </p:txBody>
+      </p:sp>
+      <p:sp>
+        <p:nvSpPr>
+          <p:cNvPr id="17" name="TextBox 16"/>
+          <p:cNvSpPr txBox="1"/>
+          <p:nvPr/>
+        </p:nvSpPr>
+        <p:spPr>
+          <a:xfrm>
+            <a:off x="6035040" y="3794760"/>
             <a:ext cx="2194560" cy="502920"/>
           </a:xfrm>
           <a:prstGeom prst="rect">
@@ -9632,193 +9971,308 @@
             <a:r>
               <a:rPr sz="3300" b="1">
                 <a:solidFill>
+                  <a:srgbClr val="D95A34"/>
+                </a:solidFill>
+                <a:latin typeface="Noto Sans CJK SC"/>
+              </a:rPr>
+              <a:t>48</a:t>
+            </a:r>
+          </a:p>
+        </p:txBody>
+      </p:sp>
+      <p:sp>
+        <p:nvSpPr>
+          <p:cNvPr id="18" name="TextBox 17"/>
+          <p:cNvSpPr txBox="1"/>
+          <p:nvPr/>
+        </p:nvSpPr>
+        <p:spPr>
+          <a:xfrm>
+            <a:off x="6035040" y="4325112"/>
+            <a:ext cx="2286000" cy="301752"/>
+          </a:xfrm>
+          <a:prstGeom prst="rect">
+            <a:avLst/>
+          </a:prstGeom>
+          <a:noFill/>
+        </p:spPr>
+        <p:txBody>
+          <a:bodyPr wrap="square" anchor="ctr">
+            <a:spAutoFit/>
+          </a:bodyPr>
+          <a:lstStyle/>
+          <a:p>
+            <a:pPr algn="l"/>
+            <a:r>
+              <a:rPr sz="1100" b="0">
+                <a:solidFill>
+                  <a:srgbClr val="5D6975"/>
+                </a:solidFill>
+                <a:latin typeface="Noto Sans CJK SC"/>
+              </a:rPr>
+              <a:t>同批双引擎录像</a:t>
+            </a:r>
+          </a:p>
+        </p:txBody>
+      </p:sp>
+      <p:sp>
+        <p:nvSpPr>
+          <p:cNvPr id="19" name="Rounded Rectangle 18"/>
+          <p:cNvSpPr/>
+          <p:nvPr/>
+        </p:nvSpPr>
+        <p:spPr>
+          <a:xfrm>
+            <a:off x="8412480" y="2057400"/>
+            <a:ext cx="2834640" cy="3154680"/>
+          </a:xfrm>
+          <a:prstGeom prst="roundRect">
+            <a:avLst/>
+          </a:prstGeom>
+          <a:solidFill>
+            <a:srgbClr val="FFF4F0"/>
+          </a:solidFill>
+          <a:ln>
+            <a:solidFill>
+              <a:srgbClr val="D95A34"/>
+            </a:solidFill>
+          </a:ln>
+        </p:spPr>
+        <p:style>
+          <a:lnRef idx="1">
+            <a:schemeClr val="accent1"/>
+          </a:lnRef>
+          <a:fillRef idx="3">
+            <a:schemeClr val="accent1"/>
+          </a:fillRef>
+          <a:effectRef idx="2">
+            <a:schemeClr val="accent1"/>
+          </a:effectRef>
+          <a:fontRef idx="minor">
+            <a:schemeClr val="lt1"/>
+          </a:fontRef>
+        </p:style>
+        <p:txBody>
+          <a:bodyPr rtlCol="0" anchor="ctr"/>
+          <a:lstStyle/>
+          <a:p>
+            <a:pPr algn="ctr"/>
+          </a:p>
+        </p:txBody>
+      </p:sp>
+      <p:sp>
+        <p:nvSpPr>
+          <p:cNvPr id="20" name="TextBox 19"/>
+          <p:cNvSpPr txBox="1"/>
+          <p:nvPr/>
+        </p:nvSpPr>
+        <p:spPr>
+          <a:xfrm>
+            <a:off x="8641080" y="2359152"/>
+            <a:ext cx="2286000" cy="274320"/>
+          </a:xfrm>
+          <a:prstGeom prst="rect">
+            <a:avLst/>
+          </a:prstGeom>
+          <a:noFill/>
+        </p:spPr>
+        <p:txBody>
+          <a:bodyPr wrap="square" anchor="ctr">
+            <a:spAutoFit/>
+          </a:bodyPr>
+          <a:lstStyle/>
+          <a:p>
+            <a:pPr algn="l"/>
+            <a:r>
+              <a:rPr sz="1700" b="1">
+                <a:solidFill>
+                  <a:srgbClr val="D95A34"/>
+                </a:solidFill>
+                <a:latin typeface="Noto Sans CJK SC"/>
+              </a:rPr>
+              <a:t>Isaac 的两条失败</a:t>
+            </a:r>
+          </a:p>
+        </p:txBody>
+      </p:sp>
+      <p:sp>
+        <p:nvSpPr>
+          <p:cNvPr id="21" name="TextBox 20"/>
+          <p:cNvSpPr txBox="1"/>
+          <p:nvPr/>
+        </p:nvSpPr>
+        <p:spPr>
+          <a:xfrm>
+            <a:off x="8613648" y="2880360"/>
+            <a:ext cx="201168" cy="256032"/>
+          </a:xfrm>
+          <a:prstGeom prst="rect">
+            <a:avLst/>
+          </a:prstGeom>
+          <a:noFill/>
+        </p:spPr>
+        <p:txBody>
+          <a:bodyPr wrap="square" anchor="ctr">
+            <a:spAutoFit/>
+          </a:bodyPr>
+          <a:lstStyle/>
+          <a:p>
+            <a:pPr algn="l"/>
+            <a:r>
+              <a:rPr sz="1700" b="1">
+                <a:solidFill>
                   <a:srgbClr val="2478BE"/>
                 </a:solidFill>
                 <a:latin typeface="Noto Sans CJK SC"/>
               </a:rPr>
-              <a:t>9.00–9.04</a:t>
-            </a:r>
-          </a:p>
-        </p:txBody>
-      </p:sp>
-      <p:sp>
-        <p:nvSpPr>
-          <p:cNvPr id="16" name="TextBox 15"/>
-          <p:cNvSpPr txBox="1"/>
-          <p:nvPr/>
-        </p:nvSpPr>
-        <p:spPr>
-          <a:xfrm>
-            <a:off x="3657600" y="4233672"/>
-            <a:ext cx="2286000" cy="301752"/>
-          </a:xfrm>
-          <a:prstGeom prst="rect">
-            <a:avLst/>
-          </a:prstGeom>
-          <a:noFill/>
-        </p:spPr>
-        <p:txBody>
-          <a:bodyPr wrap="square" anchor="ctr">
-            <a:spAutoFit/>
-          </a:bodyPr>
-          <a:lstStyle/>
-          <a:p>
-            <a:pPr algn="l"/>
-            <a:r>
-              <a:rPr sz="1100" b="0">
-                <a:solidFill>
-                  <a:srgbClr val="5D6975"/>
-                </a:solidFill>
-                <a:latin typeface="Noto Sans CJK SC"/>
-              </a:rPr>
-              <a:t>Isaac 峰值 m/s</a:t>
-            </a:r>
-          </a:p>
-        </p:txBody>
-      </p:sp>
-      <p:sp>
-        <p:nvSpPr>
-          <p:cNvPr id="17" name="TextBox 16"/>
-          <p:cNvSpPr txBox="1"/>
-          <p:nvPr/>
-        </p:nvSpPr>
-        <p:spPr>
-          <a:xfrm>
-            <a:off x="7589520" y="3703320"/>
-            <a:ext cx="2194560" cy="502920"/>
-          </a:xfrm>
-          <a:prstGeom prst="rect">
-            <a:avLst/>
-          </a:prstGeom>
-          <a:noFill/>
-        </p:spPr>
-        <p:txBody>
-          <a:bodyPr wrap="square" anchor="ctr">
-            <a:spAutoFit/>
-          </a:bodyPr>
-          <a:lstStyle/>
-          <a:p>
-            <a:pPr algn="l"/>
-            <a:r>
-              <a:rPr sz="3300" b="1">
-                <a:solidFill>
-                  <a:srgbClr val="D95A34"/>
-                </a:solidFill>
-                <a:latin typeface="Noto Sans CJK SC"/>
-              </a:rPr>
-              <a:t>1.5–10.4%</a:t>
-            </a:r>
-          </a:p>
-        </p:txBody>
-      </p:sp>
-      <p:sp>
-        <p:nvSpPr>
-          <p:cNvPr id="18" name="TextBox 17"/>
-          <p:cNvSpPr txBox="1"/>
-          <p:nvPr/>
-        </p:nvSpPr>
-        <p:spPr>
-          <a:xfrm>
-            <a:off x="7589520" y="4233672"/>
-            <a:ext cx="2286000" cy="301752"/>
-          </a:xfrm>
-          <a:prstGeom prst="rect">
-            <a:avLst/>
-          </a:prstGeom>
-          <a:noFill/>
-        </p:spPr>
-        <p:txBody>
-          <a:bodyPr wrap="square" anchor="ctr">
-            <a:spAutoFit/>
-          </a:bodyPr>
-          <a:lstStyle/>
-          <a:p>
-            <a:pPr algn="l"/>
-            <a:r>
-              <a:rPr sz="1100" b="0">
-                <a:solidFill>
-                  <a:srgbClr val="5D6975"/>
-                </a:solidFill>
-                <a:latin typeface="Noto Sans CJK SC"/>
-              </a:rPr>
-              <a:t>Mu 单圈加速</a:t>
-            </a:r>
-          </a:p>
-        </p:txBody>
-      </p:sp>
-      <p:sp>
-        <p:nvSpPr>
-          <p:cNvPr id="19" name="TextBox 18"/>
-          <p:cNvSpPr txBox="1"/>
-          <p:nvPr/>
-        </p:nvSpPr>
-        <p:spPr>
-          <a:xfrm>
-            <a:off x="777240" y="5074920"/>
-            <a:ext cx="10378440" cy="548640"/>
-          </a:xfrm>
-          <a:prstGeom prst="rect">
-            <a:avLst/>
-          </a:prstGeom>
-          <a:noFill/>
-        </p:spPr>
-        <p:txBody>
-          <a:bodyPr wrap="square" anchor="ctr">
-            <a:spAutoFit/>
-          </a:bodyPr>
-          <a:lstStyle/>
-          <a:p>
-            <a:pPr algn="l"/>
-            <a:r>
-              <a:rPr sz="1600" b="0">
+              <a:t>•</a:t>
+            </a:r>
+          </a:p>
+        </p:txBody>
+      </p:sp>
+      <p:sp>
+        <p:nvSpPr>
+          <p:cNvPr id="22" name="TextBox 21"/>
+          <p:cNvSpPr txBox="1"/>
+          <p:nvPr/>
+        </p:nvSpPr>
+        <p:spPr>
+          <a:xfrm>
+            <a:off x="8851392" y="2862072"/>
+            <a:ext cx="2048256" cy="411480"/>
+          </a:xfrm>
+          <a:prstGeom prst="rect">
+            <a:avLst/>
+          </a:prstGeom>
+          <a:noFill/>
+        </p:spPr>
+        <p:txBody>
+          <a:bodyPr wrap="square" anchor="ctr">
+            <a:spAutoFit/>
+          </a:bodyPr>
+          <a:lstStyle/>
+          <a:p>
+            <a:pPr algn="l"/>
+            <a:r>
+              <a:rPr sz="1400" b="0">
                 <a:solidFill>
                   <a:srgbClr val="191E26"/>
                 </a:solidFill>
                 <a:latin typeface="Noto Sans CJK SC"/>
               </a:rPr>
-              <a:t>MuJoCo：24 条赛道均快于 7.25 m/s 基线。Isaac：20 条可比赛道均更快，但新增 Austin、Las Vegas 停滞，Spa/Suzuka 仍失败。</a:t>
-            </a:r>
-          </a:p>
-        </p:txBody>
-      </p:sp>
-      <p:sp>
-        <p:nvSpPr>
-          <p:cNvPr id="20" name="TextBox 19"/>
-          <p:cNvSpPr txBox="1"/>
-          <p:nvPr/>
-        </p:nvSpPr>
-        <p:spPr>
-          <a:xfrm>
-            <a:off x="777240" y="5715000"/>
-            <a:ext cx="10378440" cy="320040"/>
-          </a:xfrm>
-          <a:prstGeom prst="rect">
-            <a:avLst/>
-          </a:prstGeom>
-          <a:noFill/>
-        </p:spPr>
-        <p:txBody>
-          <a:bodyPr wrap="square" anchor="ctr">
-            <a:spAutoFit/>
-          </a:bodyPr>
-          <a:lstStyle/>
-          <a:p>
-            <a:pPr algn="l"/>
-            <a:r>
-              <a:rPr sz="1600" b="1">
+              <a:t>Spa：起步车车接触</a:t>
+            </a:r>
+          </a:p>
+        </p:txBody>
+      </p:sp>
+      <p:sp>
+        <p:nvSpPr>
+          <p:cNvPr id="23" name="TextBox 22"/>
+          <p:cNvSpPr txBox="1"/>
+          <p:nvPr/>
+        </p:nvSpPr>
+        <p:spPr>
+          <a:xfrm>
+            <a:off x="8613648" y="3493008"/>
+            <a:ext cx="201168" cy="256032"/>
+          </a:xfrm>
+          <a:prstGeom prst="rect">
+            <a:avLst/>
+          </a:prstGeom>
+          <a:noFill/>
+        </p:spPr>
+        <p:txBody>
+          <a:bodyPr wrap="square" anchor="ctr">
+            <a:spAutoFit/>
+          </a:bodyPr>
+          <a:lstStyle/>
+          <a:p>
+            <a:pPr algn="l"/>
+            <a:r>
+              <a:rPr sz="1700" b="1">
+                <a:solidFill>
+                  <a:srgbClr val="2478BE"/>
+                </a:solidFill>
+                <a:latin typeface="Noto Sans CJK SC"/>
+              </a:rPr>
+              <a:t>•</a:t>
+            </a:r>
+          </a:p>
+        </p:txBody>
+      </p:sp>
+      <p:sp>
+        <p:nvSpPr>
+          <p:cNvPr id="24" name="TextBox 23"/>
+          <p:cNvSpPr txBox="1"/>
+          <p:nvPr/>
+        </p:nvSpPr>
+        <p:spPr>
+          <a:xfrm>
+            <a:off x="8851392" y="3474720"/>
+            <a:ext cx="2048256" cy="411480"/>
+          </a:xfrm>
+          <a:prstGeom prst="rect">
+            <a:avLst/>
+          </a:prstGeom>
+          <a:noFill/>
+        </p:spPr>
+        <p:txBody>
+          <a:bodyPr wrap="square" anchor="ctr">
+            <a:spAutoFit/>
+          </a:bodyPr>
+          <a:lstStyle/>
+          <a:p>
+            <a:pPr algn="l"/>
+            <a:r>
+              <a:rPr sz="1400" b="0">
+                <a:solidFill>
+                  <a:srgbClr val="191E26"/>
+                </a:solidFill>
+                <a:latin typeface="Noto Sans CJK SC"/>
+              </a:rPr>
+              <a:t>Suzuka：桥面段车身失稳</a:t>
+            </a:r>
+          </a:p>
+        </p:txBody>
+      </p:sp>
+      <p:sp>
+        <p:nvSpPr>
+          <p:cNvPr id="25" name="TextBox 24"/>
+          <p:cNvSpPr txBox="1"/>
+          <p:nvPr/>
+        </p:nvSpPr>
+        <p:spPr>
+          <a:xfrm>
+            <a:off x="8641080" y="4343400"/>
+            <a:ext cx="2148840" cy="411480"/>
+          </a:xfrm>
+          <a:prstGeom prst="rect">
+            <a:avLst/>
+          </a:prstGeom>
+          <a:noFill/>
+        </p:spPr>
+        <p:txBody>
+          <a:bodyPr wrap="square" anchor="ctr">
+            <a:spAutoFit/>
+          </a:bodyPr>
+          <a:lstStyle/>
+          <a:p>
+            <a:pPr algn="l"/>
+            <a:r>
+              <a:rPr sz="1300" b="1">
                 <a:solidFill>
                   <a:srgbClr val="BE343A"/>
                 </a:solidFill>
                 <a:latin typeface="Noto Sans CJK SC"/>
               </a:rPr>
-              <a:t>工程结论：共享冻结配置维持 7.25 m/s；9.0 m/s 是 MuJoCo 速度榜，不是跨引擎稳定配置。</a:t>
-            </a:r>
-          </a:p>
-        </p:txBody>
-      </p:sp>
-      <p:sp>
-        <p:nvSpPr>
-          <p:cNvPr id="21" name="TextBox 20"/>
+              <a:t>所以不能称 Isaac 全赛道完成。</a:t>
+            </a:r>
+          </a:p>
+        </p:txBody>
+      </p:sp>
+      <p:sp>
+        <p:nvSpPr>
+          <p:cNvPr id="26" name="TextBox 25"/>
           <p:cNvSpPr txBox="1"/>
           <p:nvPr/>
         </p:nvSpPr>
@@ -9907,7 +10361,7 @@
                 </a:solidFill>
                 <a:latin typeface="Noto Sans CJK SC"/>
               </a:rPr>
-              <a:t>OVERTAKE</a:t>
+              <a:t>LAP TIME</a:t>
             </a:r>
           </a:p>
         </p:txBody>
@@ -9942,7 +10396,7 @@
                 </a:solidFill>
                 <a:latin typeface="Noto Sans CJK SC"/>
               </a:rPr>
-              <a:t>主动超车已计入整圈资格，但只在明确的对手条件下成立</a:t>
+              <a:t>9.0 m/s 刷新最快圈速，但 Isaac 的稳定性付出了代价</a:t>
             </a:r>
           </a:p>
         </p:txBody>
@@ -9992,77 +10446,154 @@
           </a:p>
         </p:txBody>
       </p:sp>
-      <p:pic>
-        <p:nvPicPr>
-          <p:cNvPr id="5" name="Picture 4" descr="bahrain_c03v10c_dev24_seed0.png"/>
-          <p:cNvPicPr>
-            <a:picLocks noChangeAspect="1"/>
-          </p:cNvPicPr>
-          <p:nvPr/>
-        </p:nvPicPr>
-        <p:blipFill>
-          <a:blip r:embed="rId2"/>
-          <a:stretch>
-            <a:fillRect/>
-          </a:stretch>
-        </p:blipFill>
-        <p:spPr>
-          <a:xfrm>
-            <a:off x="640080" y="1874519"/>
-            <a:ext cx="5394960" cy="3154680"/>
-          </a:xfrm>
-          <a:prstGeom prst="rect">
-            <a:avLst/>
-          </a:prstGeom>
-        </p:spPr>
-      </p:pic>
-      <p:pic>
-        <p:nvPicPr>
-          <p:cNvPr id="6" name="Picture 5" descr="bahrain_c03v10c_dev24_seed0.png"/>
-          <p:cNvPicPr>
-            <a:picLocks noChangeAspect="1"/>
-          </p:cNvPicPr>
-          <p:nvPr/>
-        </p:nvPicPr>
-        <p:blipFill>
-          <a:blip r:embed="rId3"/>
-          <a:stretch>
-            <a:fillRect/>
-          </a:stretch>
-        </p:blipFill>
-        <p:spPr>
-          <a:xfrm>
-            <a:off x="6190488" y="1874519"/>
-            <a:ext cx="5349240" cy="3154680"/>
-          </a:xfrm>
-          <a:prstGeom prst="rect">
-            <a:avLst/>
-          </a:prstGeom>
-        </p:spPr>
-      </p:pic>
-      <p:sp>
-        <p:nvSpPr>
-          <p:cNvPr id="7" name="TextBox 6"/>
-          <p:cNvSpPr txBox="1"/>
-          <p:nvPr/>
-        </p:nvSpPr>
-        <p:spPr>
-          <a:xfrm>
-            <a:off x="685800" y="5138928"/>
-            <a:ext cx="3657600" cy="228600"/>
-          </a:xfrm>
-          <a:prstGeom prst="rect">
-            <a:avLst/>
-          </a:prstGeom>
-          <a:noFill/>
-        </p:spPr>
-        <p:txBody>
-          <a:bodyPr wrap="square" anchor="ctr">
-            <a:spAutoFit/>
-          </a:bodyPr>
-          <a:lstStyle/>
-          <a:p>
-            <a:pPr algn="l"/>
+      <p:sp>
+        <p:nvSpPr>
+          <p:cNvPr id="5" name="TextBox 4"/>
+          <p:cNvSpPr txBox="1"/>
+          <p:nvPr/>
+        </p:nvSpPr>
+        <p:spPr>
+          <a:xfrm>
+            <a:off x="777240" y="2057400"/>
+            <a:ext cx="2194560" cy="274320"/>
+          </a:xfrm>
+          <a:prstGeom prst="rect">
+            <a:avLst/>
+          </a:prstGeom>
+          <a:noFill/>
+        </p:spPr>
+        <p:txBody>
+          <a:bodyPr wrap="square" anchor="ctr">
+            <a:spAutoFit/>
+          </a:bodyPr>
+          <a:lstStyle/>
+          <a:p>
+            <a:pPr algn="l"/>
+            <a:r>
+              <a:rPr sz="1300" b="1">
+                <a:solidFill>
+                  <a:srgbClr val="191E26"/>
+                </a:solidFill>
+                <a:latin typeface="Noto Sans CJK SC"/>
+              </a:rPr>
+              <a:t>MuJoCo · 9.0 m/s</a:t>
+            </a:r>
+          </a:p>
+        </p:txBody>
+      </p:sp>
+      <p:sp>
+        <p:nvSpPr>
+          <p:cNvPr id="6" name="Rectangle 5"/>
+          <p:cNvSpPr/>
+          <p:nvPr/>
+        </p:nvSpPr>
+        <p:spPr>
+          <a:xfrm>
+            <a:off x="3017520" y="2075688"/>
+            <a:ext cx="5029200" cy="201168"/>
+          </a:xfrm>
+          <a:prstGeom prst="rect">
+            <a:avLst/>
+          </a:prstGeom>
+          <a:solidFill>
+            <a:srgbClr val="E2E7EC"/>
+          </a:solidFill>
+          <a:ln>
+            <a:solidFill>
+              <a:srgbClr val="E2E7EC"/>
+            </a:solidFill>
+          </a:ln>
+        </p:spPr>
+        <p:style>
+          <a:lnRef idx="1">
+            <a:schemeClr val="accent1"/>
+          </a:lnRef>
+          <a:fillRef idx="3">
+            <a:schemeClr val="accent1"/>
+          </a:fillRef>
+          <a:effectRef idx="2">
+            <a:schemeClr val="accent1"/>
+          </a:effectRef>
+          <a:fontRef idx="minor">
+            <a:schemeClr val="lt1"/>
+          </a:fontRef>
+        </p:style>
+        <p:txBody>
+          <a:bodyPr rtlCol="0" anchor="ctr"/>
+          <a:lstStyle/>
+          <a:p>
+            <a:pPr algn="ctr"/>
+          </a:p>
+        </p:txBody>
+      </p:sp>
+      <p:sp>
+        <p:nvSpPr>
+          <p:cNvPr id="7" name="Rectangle 6"/>
+          <p:cNvSpPr/>
+          <p:nvPr/>
+        </p:nvSpPr>
+        <p:spPr>
+          <a:xfrm>
+            <a:off x="3017520" y="2075688"/>
+            <a:ext cx="5029200" cy="201168"/>
+          </a:xfrm>
+          <a:prstGeom prst="rect">
+            <a:avLst/>
+          </a:prstGeom>
+          <a:solidFill>
+            <a:srgbClr val="00998E"/>
+          </a:solidFill>
+          <a:ln>
+            <a:solidFill>
+              <a:srgbClr val="00998E"/>
+            </a:solidFill>
+          </a:ln>
+        </p:spPr>
+        <p:style>
+          <a:lnRef idx="1">
+            <a:schemeClr val="accent1"/>
+          </a:lnRef>
+          <a:fillRef idx="3">
+            <a:schemeClr val="accent1"/>
+          </a:fillRef>
+          <a:effectRef idx="2">
+            <a:schemeClr val="accent1"/>
+          </a:effectRef>
+          <a:fontRef idx="minor">
+            <a:schemeClr val="lt1"/>
+          </a:fontRef>
+        </p:style>
+        <p:txBody>
+          <a:bodyPr rtlCol="0" anchor="ctr"/>
+          <a:lstStyle/>
+          <a:p>
+            <a:pPr algn="ctr"/>
+          </a:p>
+        </p:txBody>
+      </p:sp>
+      <p:sp>
+        <p:nvSpPr>
+          <p:cNvPr id="8" name="TextBox 7"/>
+          <p:cNvSpPr txBox="1"/>
+          <p:nvPr/>
+        </p:nvSpPr>
+        <p:spPr>
+          <a:xfrm>
+            <a:off x="8183879" y="2029968"/>
+            <a:ext cx="731520" cy="274320"/>
+          </a:xfrm>
+          <a:prstGeom prst="rect">
+            <a:avLst/>
+          </a:prstGeom>
+          <a:noFill/>
+        </p:spPr>
+        <p:txBody>
+          <a:bodyPr wrap="square" anchor="ctr">
+            <a:spAutoFit/>
+          </a:bodyPr>
+          <a:lstStyle/>
+          <a:p>
+            <a:pPr algn="r"/>
             <a:r>
               <a:rPr sz="1400" b="1">
                 <a:solidFill>
@@ -10070,34 +10601,159 @@
                 </a:solidFill>
                 <a:latin typeface="Noto Sans CJK SC"/>
               </a:rPr>
-              <a:t>MuJoCo Bahrain：代表样例</a:t>
-            </a:r>
-          </a:p>
-        </p:txBody>
-      </p:sp>
-      <p:sp>
-        <p:nvSpPr>
-          <p:cNvPr id="8" name="TextBox 7"/>
-          <p:cNvSpPr txBox="1"/>
-          <p:nvPr/>
-        </p:nvSpPr>
-        <p:spPr>
-          <a:xfrm>
-            <a:off x="6217920" y="5138928"/>
-            <a:ext cx="3657600" cy="228600"/>
-          </a:xfrm>
-          <a:prstGeom prst="rect">
-            <a:avLst/>
-          </a:prstGeom>
-          <a:noFill/>
-        </p:spPr>
-        <p:txBody>
-          <a:bodyPr wrap="square" anchor="ctr">
-            <a:spAutoFit/>
-          </a:bodyPr>
-          <a:lstStyle/>
-          <a:p>
-            <a:pPr algn="l"/>
+              <a:t>24/24</a:t>
+            </a:r>
+          </a:p>
+        </p:txBody>
+      </p:sp>
+      <p:sp>
+        <p:nvSpPr>
+          <p:cNvPr id="9" name="TextBox 8"/>
+          <p:cNvSpPr txBox="1"/>
+          <p:nvPr/>
+        </p:nvSpPr>
+        <p:spPr>
+          <a:xfrm>
+            <a:off x="777240" y="2697480"/>
+            <a:ext cx="2194560" cy="274320"/>
+          </a:xfrm>
+          <a:prstGeom prst="rect">
+            <a:avLst/>
+          </a:prstGeom>
+          <a:noFill/>
+        </p:spPr>
+        <p:txBody>
+          <a:bodyPr wrap="square" anchor="ctr">
+            <a:spAutoFit/>
+          </a:bodyPr>
+          <a:lstStyle/>
+          <a:p>
+            <a:pPr algn="l"/>
+            <a:r>
+              <a:rPr sz="1300" b="1">
+                <a:solidFill>
+                  <a:srgbClr val="191E26"/>
+                </a:solidFill>
+                <a:latin typeface="Noto Sans CJK SC"/>
+              </a:rPr>
+              <a:t>Isaac · 9.0 m/s</a:t>
+            </a:r>
+          </a:p>
+        </p:txBody>
+      </p:sp>
+      <p:sp>
+        <p:nvSpPr>
+          <p:cNvPr id="10" name="Rectangle 9"/>
+          <p:cNvSpPr/>
+          <p:nvPr/>
+        </p:nvSpPr>
+        <p:spPr>
+          <a:xfrm>
+            <a:off x="3017520" y="2715768"/>
+            <a:ext cx="5029200" cy="201168"/>
+          </a:xfrm>
+          <a:prstGeom prst="rect">
+            <a:avLst/>
+          </a:prstGeom>
+          <a:solidFill>
+            <a:srgbClr val="E2E7EC"/>
+          </a:solidFill>
+          <a:ln>
+            <a:solidFill>
+              <a:srgbClr val="E2E7EC"/>
+            </a:solidFill>
+          </a:ln>
+        </p:spPr>
+        <p:style>
+          <a:lnRef idx="1">
+            <a:schemeClr val="accent1"/>
+          </a:lnRef>
+          <a:fillRef idx="3">
+            <a:schemeClr val="accent1"/>
+          </a:fillRef>
+          <a:effectRef idx="2">
+            <a:schemeClr val="accent1"/>
+          </a:effectRef>
+          <a:fontRef idx="minor">
+            <a:schemeClr val="lt1"/>
+          </a:fontRef>
+        </p:style>
+        <p:txBody>
+          <a:bodyPr rtlCol="0" anchor="ctr"/>
+          <a:lstStyle/>
+          <a:p>
+            <a:pPr algn="ctr"/>
+          </a:p>
+        </p:txBody>
+      </p:sp>
+      <p:sp>
+        <p:nvSpPr>
+          <p:cNvPr id="11" name="Rectangle 10"/>
+          <p:cNvSpPr/>
+          <p:nvPr/>
+        </p:nvSpPr>
+        <p:spPr>
+          <a:xfrm>
+            <a:off x="3017520" y="2715768"/>
+            <a:ext cx="4190999" cy="201168"/>
+          </a:xfrm>
+          <a:prstGeom prst="rect">
+            <a:avLst/>
+          </a:prstGeom>
+          <a:solidFill>
+            <a:srgbClr val="2478BE"/>
+          </a:solidFill>
+          <a:ln>
+            <a:solidFill>
+              <a:srgbClr val="2478BE"/>
+            </a:solidFill>
+          </a:ln>
+        </p:spPr>
+        <p:style>
+          <a:lnRef idx="1">
+            <a:schemeClr val="accent1"/>
+          </a:lnRef>
+          <a:fillRef idx="3">
+            <a:schemeClr val="accent1"/>
+          </a:fillRef>
+          <a:effectRef idx="2">
+            <a:schemeClr val="accent1"/>
+          </a:effectRef>
+          <a:fontRef idx="minor">
+            <a:schemeClr val="lt1"/>
+          </a:fontRef>
+        </p:style>
+        <p:txBody>
+          <a:bodyPr rtlCol="0" anchor="ctr"/>
+          <a:lstStyle/>
+          <a:p>
+            <a:pPr algn="ctr"/>
+          </a:p>
+        </p:txBody>
+      </p:sp>
+      <p:sp>
+        <p:nvSpPr>
+          <p:cNvPr id="12" name="TextBox 11"/>
+          <p:cNvSpPr txBox="1"/>
+          <p:nvPr/>
+        </p:nvSpPr>
+        <p:spPr>
+          <a:xfrm>
+            <a:off x="8183879" y="2670048"/>
+            <a:ext cx="731520" cy="274320"/>
+          </a:xfrm>
+          <a:prstGeom prst="rect">
+            <a:avLst/>
+          </a:prstGeom>
+          <a:noFill/>
+        </p:spPr>
+        <p:txBody>
+          <a:bodyPr wrap="square" anchor="ctr">
+            <a:spAutoFit/>
+          </a:bodyPr>
+          <a:lstStyle/>
+          <a:p>
+            <a:pPr algn="r"/>
             <a:r>
               <a:rPr sz="1400" b="1">
                 <a:solidFill>
@@ -10105,49 +10761,294 @@
                 </a:solidFill>
                 <a:latin typeface="Noto Sans CJK SC"/>
               </a:rPr>
-              <a:t>Isaac Bahrain：代表样例</a:t>
-            </a:r>
-          </a:p>
-        </p:txBody>
-      </p:sp>
-      <p:sp>
-        <p:nvSpPr>
-          <p:cNvPr id="9" name="TextBox 8"/>
-          <p:cNvSpPr txBox="1"/>
-          <p:nvPr/>
-        </p:nvSpPr>
-        <p:spPr>
-          <a:xfrm>
-            <a:off x="685800" y="5596128"/>
-            <a:ext cx="10652760" cy="457200"/>
-          </a:xfrm>
-          <a:prstGeom prst="rect">
-            <a:avLst/>
-          </a:prstGeom>
-          <a:noFill/>
-        </p:spPr>
-        <p:txBody>
-          <a:bodyPr wrap="square" anchor="ctr">
-            <a:spAutoFit/>
-          </a:bodyPr>
-          <a:lstStyle/>
-          <a:p>
-            <a:pPr algn="l"/>
-            <a:r>
-              <a:rPr sz="1400" b="0">
+              <a:t>20/24</a:t>
+            </a:r>
+          </a:p>
+        </p:txBody>
+      </p:sp>
+      <p:sp>
+        <p:nvSpPr>
+          <p:cNvPr id="13" name="TextBox 12"/>
+          <p:cNvSpPr txBox="1"/>
+          <p:nvPr/>
+        </p:nvSpPr>
+        <p:spPr>
+          <a:xfrm>
+            <a:off x="777240" y="3703320"/>
+            <a:ext cx="2194560" cy="502920"/>
+          </a:xfrm>
+          <a:prstGeom prst="rect">
+            <a:avLst/>
+          </a:prstGeom>
+          <a:noFill/>
+        </p:spPr>
+        <p:txBody>
+          <a:bodyPr wrap="square" anchor="ctr">
+            <a:spAutoFit/>
+          </a:bodyPr>
+          <a:lstStyle/>
+          <a:p>
+            <a:pPr algn="l"/>
+            <a:r>
+              <a:rPr sz="3300" b="1">
+                <a:solidFill>
+                  <a:srgbClr val="00998E"/>
+                </a:solidFill>
+                <a:latin typeface="Noto Sans CJK SC"/>
+              </a:rPr>
+              <a:t>8.97</a:t>
+            </a:r>
+          </a:p>
+        </p:txBody>
+      </p:sp>
+      <p:sp>
+        <p:nvSpPr>
+          <p:cNvPr id="14" name="TextBox 13"/>
+          <p:cNvSpPr txBox="1"/>
+          <p:nvPr/>
+        </p:nvSpPr>
+        <p:spPr>
+          <a:xfrm>
+            <a:off x="777240" y="4233672"/>
+            <a:ext cx="2286000" cy="301752"/>
+          </a:xfrm>
+          <a:prstGeom prst="rect">
+            <a:avLst/>
+          </a:prstGeom>
+          <a:noFill/>
+        </p:spPr>
+        <p:txBody>
+          <a:bodyPr wrap="square" anchor="ctr">
+            <a:spAutoFit/>
+          </a:bodyPr>
+          <a:lstStyle/>
+          <a:p>
+            <a:pPr algn="l"/>
+            <a:r>
+              <a:rPr sz="1100" b="0">
+                <a:solidFill>
+                  <a:srgbClr val="5D6975"/>
+                </a:solidFill>
+                <a:latin typeface="Noto Sans CJK SC"/>
+              </a:rPr>
+              <a:t>Mu 峰值 m/s</a:t>
+            </a:r>
+          </a:p>
+        </p:txBody>
+      </p:sp>
+      <p:sp>
+        <p:nvSpPr>
+          <p:cNvPr id="15" name="TextBox 14"/>
+          <p:cNvSpPr txBox="1"/>
+          <p:nvPr/>
+        </p:nvSpPr>
+        <p:spPr>
+          <a:xfrm>
+            <a:off x="3657600" y="3703320"/>
+            <a:ext cx="2194560" cy="502920"/>
+          </a:xfrm>
+          <a:prstGeom prst="rect">
+            <a:avLst/>
+          </a:prstGeom>
+          <a:noFill/>
+        </p:spPr>
+        <p:txBody>
+          <a:bodyPr wrap="square" anchor="ctr">
+            <a:spAutoFit/>
+          </a:bodyPr>
+          <a:lstStyle/>
+          <a:p>
+            <a:pPr algn="l"/>
+            <a:r>
+              <a:rPr sz="3300" b="1">
+                <a:solidFill>
+                  <a:srgbClr val="2478BE"/>
+                </a:solidFill>
+                <a:latin typeface="Noto Sans CJK SC"/>
+              </a:rPr>
+              <a:t>9.00–9.04</a:t>
+            </a:r>
+          </a:p>
+        </p:txBody>
+      </p:sp>
+      <p:sp>
+        <p:nvSpPr>
+          <p:cNvPr id="16" name="TextBox 15"/>
+          <p:cNvSpPr txBox="1"/>
+          <p:nvPr/>
+        </p:nvSpPr>
+        <p:spPr>
+          <a:xfrm>
+            <a:off x="3657600" y="4233672"/>
+            <a:ext cx="2286000" cy="301752"/>
+          </a:xfrm>
+          <a:prstGeom prst="rect">
+            <a:avLst/>
+          </a:prstGeom>
+          <a:noFill/>
+        </p:spPr>
+        <p:txBody>
+          <a:bodyPr wrap="square" anchor="ctr">
+            <a:spAutoFit/>
+          </a:bodyPr>
+          <a:lstStyle/>
+          <a:p>
+            <a:pPr algn="l"/>
+            <a:r>
+              <a:rPr sz="1100" b="0">
+                <a:solidFill>
+                  <a:srgbClr val="5D6975"/>
+                </a:solidFill>
+                <a:latin typeface="Noto Sans CJK SC"/>
+              </a:rPr>
+              <a:t>Isaac 峰值 m/s</a:t>
+            </a:r>
+          </a:p>
+        </p:txBody>
+      </p:sp>
+      <p:sp>
+        <p:nvSpPr>
+          <p:cNvPr id="17" name="TextBox 16"/>
+          <p:cNvSpPr txBox="1"/>
+          <p:nvPr/>
+        </p:nvSpPr>
+        <p:spPr>
+          <a:xfrm>
+            <a:off x="7589520" y="3703320"/>
+            <a:ext cx="2194560" cy="502920"/>
+          </a:xfrm>
+          <a:prstGeom prst="rect">
+            <a:avLst/>
+          </a:prstGeom>
+          <a:noFill/>
+        </p:spPr>
+        <p:txBody>
+          <a:bodyPr wrap="square" anchor="ctr">
+            <a:spAutoFit/>
+          </a:bodyPr>
+          <a:lstStyle/>
+          <a:p>
+            <a:pPr algn="l"/>
+            <a:r>
+              <a:rPr sz="3300" b="1">
+                <a:solidFill>
+                  <a:srgbClr val="D95A34"/>
+                </a:solidFill>
+                <a:latin typeface="Noto Sans CJK SC"/>
+              </a:rPr>
+              <a:t>1.5–10.4%</a:t>
+            </a:r>
+          </a:p>
+        </p:txBody>
+      </p:sp>
+      <p:sp>
+        <p:nvSpPr>
+          <p:cNvPr id="18" name="TextBox 17"/>
+          <p:cNvSpPr txBox="1"/>
+          <p:nvPr/>
+        </p:nvSpPr>
+        <p:spPr>
+          <a:xfrm>
+            <a:off x="7589520" y="4233672"/>
+            <a:ext cx="2286000" cy="301752"/>
+          </a:xfrm>
+          <a:prstGeom prst="rect">
+            <a:avLst/>
+          </a:prstGeom>
+          <a:noFill/>
+        </p:spPr>
+        <p:txBody>
+          <a:bodyPr wrap="square" anchor="ctr">
+            <a:spAutoFit/>
+          </a:bodyPr>
+          <a:lstStyle/>
+          <a:p>
+            <a:pPr algn="l"/>
+            <a:r>
+              <a:rPr sz="1100" b="0">
+                <a:solidFill>
+                  <a:srgbClr val="5D6975"/>
+                </a:solidFill>
+                <a:latin typeface="Noto Sans CJK SC"/>
+              </a:rPr>
+              <a:t>Mu 单圈加速</a:t>
+            </a:r>
+          </a:p>
+        </p:txBody>
+      </p:sp>
+      <p:sp>
+        <p:nvSpPr>
+          <p:cNvPr id="19" name="TextBox 18"/>
+          <p:cNvSpPr txBox="1"/>
+          <p:nvPr/>
+        </p:nvSpPr>
+        <p:spPr>
+          <a:xfrm>
+            <a:off x="777240" y="5074920"/>
+            <a:ext cx="10378440" cy="548640"/>
+          </a:xfrm>
+          <a:prstGeom prst="rect">
+            <a:avLst/>
+          </a:prstGeom>
+          <a:noFill/>
+        </p:spPr>
+        <p:txBody>
+          <a:bodyPr wrap="square" anchor="ctr">
+            <a:spAutoFit/>
+          </a:bodyPr>
+          <a:lstStyle/>
+          <a:p>
+            <a:pPr algn="l"/>
+            <a:r>
+              <a:rPr sz="1600" b="0">
                 <a:solidFill>
                   <a:srgbClr val="191E26"/>
                 </a:solidFill>
                 <a:latin typeface="Noto Sans CJK SC"/>
               </a:rPr>
-              <a:t>默认对手：同类传感器策略、巡航 2.8 m/s、发车领先 3 m。每条有效圈的“1 次”是完整超越，不代表对高速对手或任意初始位置的能力。</a:t>
-            </a:r>
-          </a:p>
-        </p:txBody>
-      </p:sp>
-      <p:sp>
-        <p:nvSpPr>
-          <p:cNvPr id="10" name="TextBox 9"/>
+              <a:t>MuJoCo：24 条赛道均快于 7.25 m/s 基线。Isaac：20 条可比赛道均更快，但新增 Austin、Las Vegas 停滞，Spa/Suzuka 仍失败。</a:t>
+            </a:r>
+          </a:p>
+        </p:txBody>
+      </p:sp>
+      <p:sp>
+        <p:nvSpPr>
+          <p:cNvPr id="20" name="TextBox 19"/>
+          <p:cNvSpPr txBox="1"/>
+          <p:nvPr/>
+        </p:nvSpPr>
+        <p:spPr>
+          <a:xfrm>
+            <a:off x="777240" y="5715000"/>
+            <a:ext cx="10378440" cy="320040"/>
+          </a:xfrm>
+          <a:prstGeom prst="rect">
+            <a:avLst/>
+          </a:prstGeom>
+          <a:noFill/>
+        </p:spPr>
+        <p:txBody>
+          <a:bodyPr wrap="square" anchor="ctr">
+            <a:spAutoFit/>
+          </a:bodyPr>
+          <a:lstStyle/>
+          <a:p>
+            <a:pPr algn="l"/>
+            <a:r>
+              <a:rPr sz="1600" b="1">
+                <a:solidFill>
+                  <a:srgbClr val="BE343A"/>
+                </a:solidFill>
+                <a:latin typeface="Noto Sans CJK SC"/>
+              </a:rPr>
+              <a:t>工程结论：共享冻结配置维持 7.25 m/s；9.0 m/s 是 MuJoCo 速度榜，不是跨引擎稳定配置。</a:t>
+            </a:r>
+          </a:p>
+        </p:txBody>
+      </p:sp>
+      <p:sp>
+        <p:nvSpPr>
+          <p:cNvPr id="21" name="TextBox 20"/>
           <p:cNvSpPr txBox="1"/>
           <p:nvPr/>
         </p:nvSpPr>
@@ -10236,7 +11137,7 @@
                 </a:solidFill>
                 <a:latin typeface="Noto Sans CJK SC"/>
               </a:rPr>
-              <a:t>DRIFT</a:t>
+              <a:t>OVERTAKE</a:t>
             </a:r>
           </a:p>
         </p:txBody>
@@ -10271,7 +11172,7 @@
                 </a:solidFill>
                 <a:latin typeface="Noto Sans CJK SC"/>
               </a:rPr>
-              <a:t>180° 回头弯：仿真有漂移样例，但当前实车等效动作空间不支持它</a:t>
+              <a:t>主动超车已计入整圈资格，但只在明确的对手条件下成立</a:t>
             </a:r>
           </a:p>
         </p:txBody>
@@ -10323,7 +11224,7 @@
       </p:sp>
       <p:pic>
         <p:nvPicPr>
-          <p:cNvPr id="5" name="Picture 4" descr="mujoco_fast_peak_slip.png"/>
+          <p:cNvPr id="5" name="Picture 4" descr="mujoco-race.png"/>
           <p:cNvPicPr>
             <a:picLocks noChangeAspect="1"/>
           </p:cNvPicPr>
@@ -10337,80 +11238,69 @@
         </p:blipFill>
         <p:spPr>
           <a:xfrm>
-            <a:off x="685800" y="1828800"/>
-            <a:ext cx="5257800" cy="3246120"/>
+            <a:off x="640080" y="1874519"/>
+            <a:ext cx="5394960" cy="3154680"/>
           </a:xfrm>
           <a:prstGeom prst="rect">
             <a:avLst/>
           </a:prstGeom>
         </p:spPr>
       </p:pic>
-      <p:sp>
-        <p:nvSpPr>
-          <p:cNvPr id="6" name="TextBox 5"/>
-          <p:cNvSpPr txBox="1"/>
-          <p:nvPr/>
-        </p:nvSpPr>
-        <p:spPr>
-          <a:xfrm>
-            <a:off x="6492240" y="2148840"/>
-            <a:ext cx="2194560" cy="502920"/>
-          </a:xfrm>
-          <a:prstGeom prst="rect">
-            <a:avLst/>
-          </a:prstGeom>
-          <a:noFill/>
-        </p:spPr>
-        <p:txBody>
-          <a:bodyPr wrap="square" anchor="ctr">
-            <a:spAutoFit/>
-          </a:bodyPr>
-          <a:lstStyle/>
-          <a:p>
-            <a:pPr algn="l"/>
-            <a:r>
-              <a:rPr sz="3300" b="1">
+      <p:pic>
+        <p:nvPicPr>
+          <p:cNvPr id="6" name="Picture 5" descr="isaac-race.png"/>
+          <p:cNvPicPr>
+            <a:picLocks noChangeAspect="1"/>
+          </p:cNvPicPr>
+          <p:nvPr/>
+        </p:nvPicPr>
+        <p:blipFill>
+          <a:blip r:embed="rId3"/>
+          <a:stretch>
+            <a:fillRect/>
+          </a:stretch>
+        </p:blipFill>
+        <p:spPr>
+          <a:xfrm>
+            <a:off x="6190488" y="1874519"/>
+            <a:ext cx="5349240" cy="3154680"/>
+          </a:xfrm>
+          <a:prstGeom prst="rect">
+            <a:avLst/>
+          </a:prstGeom>
+        </p:spPr>
+      </p:pic>
+      <p:sp>
+        <p:nvSpPr>
+          <p:cNvPr id="7" name="TextBox 6"/>
+          <p:cNvSpPr txBox="1"/>
+          <p:nvPr/>
+        </p:nvSpPr>
+        <p:spPr>
+          <a:xfrm>
+            <a:off x="685800" y="5138928"/>
+            <a:ext cx="3657600" cy="228600"/>
+          </a:xfrm>
+          <a:prstGeom prst="rect">
+            <a:avLst/>
+          </a:prstGeom>
+          <a:noFill/>
+        </p:spPr>
+        <p:txBody>
+          <a:bodyPr wrap="square" anchor="ctr">
+            <a:spAutoFit/>
+          </a:bodyPr>
+          <a:lstStyle/>
+          <a:p>
+            <a:pPr algn="l"/>
+            <a:r>
+              <a:rPr sz="1400" b="1">
                 <a:solidFill>
                   <a:srgbClr val="00998E"/>
                 </a:solidFill>
                 <a:latin typeface="Noto Sans CJK SC"/>
               </a:rPr>
-              <a:t>27.0°</a:t>
-            </a:r>
-          </a:p>
-        </p:txBody>
-      </p:sp>
-      <p:sp>
-        <p:nvSpPr>
-          <p:cNvPr id="7" name="TextBox 6"/>
-          <p:cNvSpPr txBox="1"/>
-          <p:nvPr/>
-        </p:nvSpPr>
-        <p:spPr>
-          <a:xfrm>
-            <a:off x="6492240" y="2679192"/>
-            <a:ext cx="2286000" cy="301752"/>
-          </a:xfrm>
-          <a:prstGeom prst="rect">
-            <a:avLst/>
-          </a:prstGeom>
-          <a:noFill/>
-        </p:spPr>
-        <p:txBody>
-          <a:bodyPr wrap="square" anchor="ctr">
-            <a:spAutoFit/>
-          </a:bodyPr>
-          <a:lstStyle/>
-          <a:p>
-            <a:pPr algn="l"/>
-            <a:r>
-              <a:rPr sz="1100" b="0">
-                <a:solidFill>
-                  <a:srgbClr val="5D6975"/>
-                </a:solidFill>
-                <a:latin typeface="Noto Sans CJK SC"/>
-              </a:rPr>
-              <a:t>后轮增速 3.5：最大侧滑</a:t>
+              <a:t>MuJoCo Bahrain：代表样例</a:t>
             </a:r>
           </a:p>
         </p:txBody>
@@ -10423,29 +11313,29 @@
         </p:nvSpPr>
         <p:spPr>
           <a:xfrm>
-            <a:off x="8961120" y="2148840"/>
-            <a:ext cx="2194560" cy="502920"/>
-          </a:xfrm>
-          <a:prstGeom prst="rect">
-            <a:avLst/>
-          </a:prstGeom>
-          <a:noFill/>
-        </p:spPr>
-        <p:txBody>
-          <a:bodyPr wrap="square" anchor="ctr">
-            <a:spAutoFit/>
-          </a:bodyPr>
-          <a:lstStyle/>
-          <a:p>
-            <a:pPr algn="l"/>
-            <a:r>
-              <a:rPr sz="3300" b="1">
-                <a:solidFill>
-                  <a:srgbClr val="BE343A"/>
-                </a:solidFill>
-                <a:latin typeface="Noto Sans CJK SC"/>
-              </a:rPr>
-              <a:t>4.36°</a:t>
+            <a:off x="6217920" y="5138928"/>
+            <a:ext cx="3657600" cy="228600"/>
+          </a:xfrm>
+          <a:prstGeom prst="rect">
+            <a:avLst/>
+          </a:prstGeom>
+          <a:noFill/>
+        </p:spPr>
+        <p:txBody>
+          <a:bodyPr wrap="square" anchor="ctr">
+            <a:spAutoFit/>
+          </a:bodyPr>
+          <a:lstStyle/>
+          <a:p>
+            <a:pPr algn="l"/>
+            <a:r>
+              <a:rPr sz="1400" b="1">
+                <a:solidFill>
+                  <a:srgbClr val="2478BE"/>
+                </a:solidFill>
+                <a:latin typeface="Noto Sans CJK SC"/>
+              </a:rPr>
+              <a:t>Isaac Bahrain：代表样例</a:t>
             </a:r>
           </a:p>
         </p:txBody>
@@ -10458,29 +11348,29 @@
         </p:nvSpPr>
         <p:spPr>
           <a:xfrm>
-            <a:off x="8961120" y="2679192"/>
-            <a:ext cx="2286000" cy="301752"/>
-          </a:xfrm>
-          <a:prstGeom prst="rect">
-            <a:avLst/>
-          </a:prstGeom>
-          <a:noFill/>
-        </p:spPr>
-        <p:txBody>
-          <a:bodyPr wrap="square" anchor="ctr">
-            <a:spAutoFit/>
-          </a:bodyPr>
-          <a:lstStyle/>
-          <a:p>
-            <a:pPr algn="l"/>
-            <a:r>
-              <a:rPr sz="1100" b="0">
-                <a:solidFill>
-                  <a:srgbClr val="5D6975"/>
-                </a:solidFill>
-                <a:latin typeface="Noto Sans CJK SC"/>
-              </a:rPr>
-              <a:t>后轮增速 0：最大侧滑</a:t>
+            <a:off x="685800" y="5596128"/>
+            <a:ext cx="10652760" cy="457200"/>
+          </a:xfrm>
+          <a:prstGeom prst="rect">
+            <a:avLst/>
+          </a:prstGeom>
+          <a:noFill/>
+        </p:spPr>
+        <p:txBody>
+          <a:bodyPr wrap="square" anchor="ctr">
+            <a:spAutoFit/>
+          </a:bodyPr>
+          <a:lstStyle/>
+          <a:p>
+            <a:pPr algn="l"/>
+            <a:r>
+              <a:rPr sz="1400" b="0">
+                <a:solidFill>
+                  <a:srgbClr val="191E26"/>
+                </a:solidFill>
+                <a:latin typeface="Noto Sans CJK SC"/>
+              </a:rPr>
+              <a:t>默认对手：同类传感器策略、巡航 2.8 m/s、发车领先 3 m。每条有效圈的“1 次”是完整超越，不代表对高速对手或任意初始位置的能力。</a:t>
             </a:r>
           </a:p>
         </p:txBody>
@@ -10488,181 +11378,6 @@
       <p:sp>
         <p:nvSpPr>
           <p:cNvPr id="10" name="TextBox 9"/>
-          <p:cNvSpPr txBox="1"/>
-          <p:nvPr/>
-        </p:nvSpPr>
-        <p:spPr>
-          <a:xfrm>
-            <a:off x="6492240" y="3429000"/>
-            <a:ext cx="4572000" cy="411480"/>
-          </a:xfrm>
-          <a:prstGeom prst="rect">
-            <a:avLst/>
-          </a:prstGeom>
-          <a:noFill/>
-        </p:spPr>
-        <p:txBody>
-          <a:bodyPr wrap="square" anchor="ctr">
-            <a:spAutoFit/>
-          </a:bodyPr>
-          <a:lstStyle/>
-          <a:p>
-            <a:pPr algn="l"/>
-            <a:r>
-              <a:rPr sz="1600" b="1">
-                <a:solidFill>
-                  <a:srgbClr val="191E26"/>
-                </a:solidFill>
-                <a:latin typeface="Noto Sans CJK SC"/>
-              </a:rPr>
-              <a:t>Interlagos A/B：0.133 s 漂移 → 0.0 s；当前策略的漂移 100% 来自后轮增速。</a:t>
-            </a:r>
-          </a:p>
-        </p:txBody>
-      </p:sp>
-      <p:sp>
-        <p:nvSpPr>
-          <p:cNvPr id="11" name="TextBox 10"/>
-          <p:cNvSpPr txBox="1"/>
-          <p:nvPr/>
-        </p:nvSpPr>
-        <p:spPr>
-          <a:xfrm>
-            <a:off x="6492240" y="4114800"/>
-            <a:ext cx="201168" cy="256032"/>
-          </a:xfrm>
-          <a:prstGeom prst="rect">
-            <a:avLst/>
-          </a:prstGeom>
-          <a:noFill/>
-        </p:spPr>
-        <p:txBody>
-          <a:bodyPr wrap="square" anchor="ctr">
-            <a:spAutoFit/>
-          </a:bodyPr>
-          <a:lstStyle/>
-          <a:p>
-            <a:pPr algn="l"/>
-            <a:r>
-              <a:rPr sz="1700" b="1">
-                <a:solidFill>
-                  <a:srgbClr val="2478BE"/>
-                </a:solidFill>
-                <a:latin typeface="Noto Sans CJK SC"/>
-              </a:rPr>
-              <a:t>•</a:t>
-            </a:r>
-          </a:p>
-        </p:txBody>
-      </p:sp>
-      <p:sp>
-        <p:nvSpPr>
-          <p:cNvPr id="12" name="TextBox 11"/>
-          <p:cNvSpPr txBox="1"/>
-          <p:nvPr/>
-        </p:nvSpPr>
-        <p:spPr>
-          <a:xfrm>
-            <a:off x="6729983" y="4096512"/>
-            <a:ext cx="4242816" cy="411480"/>
-          </a:xfrm>
-          <a:prstGeom prst="rect">
-            <a:avLst/>
-          </a:prstGeom>
-          <a:noFill/>
-        </p:spPr>
-        <p:txBody>
-          <a:bodyPr wrap="square" anchor="ctr">
-            <a:spAutoFit/>
-          </a:bodyPr>
-          <a:lstStyle/>
-          <a:p>
-            <a:pPr algn="l"/>
-            <a:r>
-              <a:rPr sz="1400" b="0">
-                <a:solidFill>
-                  <a:srgbClr val="191E26"/>
-                </a:solidFill>
-                <a:latin typeface="Noto Sans CJK SC"/>
-              </a:rPr>
-              <a:t>这证实“在给定仿真执行器下”可做发卡弯漂移。</a:t>
-            </a:r>
-          </a:p>
-        </p:txBody>
-      </p:sp>
-      <p:sp>
-        <p:nvSpPr>
-          <p:cNvPr id="13" name="TextBox 12"/>
-          <p:cNvSpPr txBox="1"/>
-          <p:nvPr/>
-        </p:nvSpPr>
-        <p:spPr>
-          <a:xfrm>
-            <a:off x="6492240" y="4663440"/>
-            <a:ext cx="201168" cy="256032"/>
-          </a:xfrm>
-          <a:prstGeom prst="rect">
-            <a:avLst/>
-          </a:prstGeom>
-          <a:noFill/>
-        </p:spPr>
-        <p:txBody>
-          <a:bodyPr wrap="square" anchor="ctr">
-            <a:spAutoFit/>
-          </a:bodyPr>
-          <a:lstStyle/>
-          <a:p>
-            <a:pPr algn="l"/>
-            <a:r>
-              <a:rPr sz="1700" b="1">
-                <a:solidFill>
-                  <a:srgbClr val="2478BE"/>
-                </a:solidFill>
-                <a:latin typeface="Noto Sans CJK SC"/>
-              </a:rPr>
-              <a:t>•</a:t>
-            </a:r>
-          </a:p>
-        </p:txBody>
-      </p:sp>
-      <p:sp>
-        <p:nvSpPr>
-          <p:cNvPr id="14" name="TextBox 13"/>
-          <p:cNvSpPr txBox="1"/>
-          <p:nvPr/>
-        </p:nvSpPr>
-        <p:spPr>
-          <a:xfrm>
-            <a:off x="6729983" y="4645152"/>
-            <a:ext cx="4242816" cy="411480"/>
-          </a:xfrm>
-          <a:prstGeom prst="rect">
-            <a:avLst/>
-          </a:prstGeom>
-          <a:noFill/>
-        </p:spPr>
-        <p:txBody>
-          <a:bodyPr wrap="square" anchor="ctr">
-            <a:spAutoFit/>
-          </a:bodyPr>
-          <a:lstStyle/>
-          <a:p>
-            <a:pPr algn="l"/>
-            <a:r>
-              <a:rPr sz="1400" b="0">
-                <a:solidFill>
-                  <a:srgbClr val="BE343A"/>
-                </a:solidFill>
-                <a:latin typeface="Noto Sans CJK SC"/>
-              </a:rPr>
-              <a:t>不证实单电机四驱实车能复现：其后轮增速等效为 0。</a:t>
-            </a:r>
-          </a:p>
-        </p:txBody>
-      </p:sp>
-      <p:sp>
-        <p:nvSpPr>
-          <p:cNvPr id="15" name="TextBox 14"/>
           <p:cNvSpPr txBox="1"/>
           <p:nvPr/>
         </p:nvSpPr>
